--- a/reports/AccessMap_Final_Presentation.pptx
+++ b/reports/AccessMap_Final_Presentation.pptx
@@ -55,7 +55,7 @@
         <a:srgbClr val="000000"/>
       </a:buClr>
       <a:buFont typeface="Arial"/>
-      <a:defRPr b="0" i="0" sz="1400" u="none" cap="none" strike="noStrike">
+      <a:defRPr b="0" i="0" spc="0" sz="1400" u="none" cap="none" strike="noStrike">
         <a:solidFill>
           <a:srgbClr val="000000"/>
         </a:solidFill>
@@ -79,7 +79,7 @@
         <a:srgbClr val="000000"/>
       </a:buClr>
       <a:buFont typeface="Arial"/>
-      <a:defRPr b="0" i="0" sz="1400" u="none" cap="none" strike="noStrike">
+      <a:defRPr b="0" i="0" spc="0" sz="1400" u="none" cap="none" strike="noStrike">
         <a:solidFill>
           <a:srgbClr val="000000"/>
         </a:solidFill>
@@ -103,7 +103,7 @@
         <a:srgbClr val="000000"/>
       </a:buClr>
       <a:buFont typeface="Arial"/>
-      <a:defRPr b="0" i="0" sz="1400" u="none" cap="none" strike="noStrike">
+      <a:defRPr b="0" i="0" spc="0" sz="1400" u="none" cap="none" strike="noStrike">
         <a:solidFill>
           <a:srgbClr val="000000"/>
         </a:solidFill>
@@ -127,7 +127,7 @@
         <a:srgbClr val="000000"/>
       </a:buClr>
       <a:buFont typeface="Arial"/>
-      <a:defRPr b="0" i="0" sz="1400" u="none" cap="none" strike="noStrike">
+      <a:defRPr b="0" i="0" spc="0" sz="1400" u="none" cap="none" strike="noStrike">
         <a:solidFill>
           <a:srgbClr val="000000"/>
         </a:solidFill>
@@ -151,7 +151,7 @@
         <a:srgbClr val="000000"/>
       </a:buClr>
       <a:buFont typeface="Arial"/>
-      <a:defRPr b="0" i="0" sz="1400" u="none" cap="none" strike="noStrike">
+      <a:defRPr b="0" i="0" spc="0" sz="1400" u="none" cap="none" strike="noStrike">
         <a:solidFill>
           <a:srgbClr val="000000"/>
         </a:solidFill>
@@ -175,7 +175,7 @@
         <a:srgbClr val="000000"/>
       </a:buClr>
       <a:buFont typeface="Arial"/>
-      <a:defRPr b="0" i="0" sz="1400" u="none" cap="none" strike="noStrike">
+      <a:defRPr b="0" i="0" spc="0" sz="1400" u="none" cap="none" strike="noStrike">
         <a:solidFill>
           <a:srgbClr val="000000"/>
         </a:solidFill>
@@ -199,7 +199,7 @@
         <a:srgbClr val="000000"/>
       </a:buClr>
       <a:buFont typeface="Arial"/>
-      <a:defRPr b="0" i="0" sz="1400" u="none" cap="none" strike="noStrike">
+      <a:defRPr b="0" i="0" spc="0" sz="1400" u="none" cap="none" strike="noStrike">
         <a:solidFill>
           <a:srgbClr val="000000"/>
         </a:solidFill>
@@ -223,7 +223,7 @@
         <a:srgbClr val="000000"/>
       </a:buClr>
       <a:buFont typeface="Arial"/>
-      <a:defRPr b="0" i="0" sz="1400" u="none" cap="none" strike="noStrike">
+      <a:defRPr b="0" i="0" spc="0" sz="1400" u="none" cap="none" strike="noStrike">
         <a:solidFill>
           <a:srgbClr val="000000"/>
         </a:solidFill>
@@ -247,7 +247,7 @@
         <a:srgbClr val="000000"/>
       </a:buClr>
       <a:buFont typeface="Arial"/>
-      <a:defRPr b="0" i="0" sz="1400" u="none" cap="none" strike="noStrike">
+      <a:defRPr b="0" i="0" spc="0" sz="1400" u="none" cap="none" strike="noStrike">
         <a:solidFill>
           <a:srgbClr val="000000"/>
         </a:solidFill>
@@ -497,7 +497,7 @@
         <a:srgbClr val="000000"/>
       </a:buClr>
       <a:buFont typeface="Arial"/>
-      <a:defRPr b="0" i="0" sz="1400" u="none" cap="none" strike="noStrike">
+      <a:defRPr b="0" i="0" spc="0" sz="1400" u="none" cap="none" strike="noStrike">
         <a:solidFill>
           <a:srgbClr val="000000"/>
         </a:solidFill>
@@ -521,7 +521,7 @@
         <a:srgbClr val="000000"/>
       </a:buClr>
       <a:buFont typeface="Arial"/>
-      <a:defRPr b="0" i="0" sz="1400" u="none" cap="none" strike="noStrike">
+      <a:defRPr b="0" i="0" spc="0" sz="1400" u="none" cap="none" strike="noStrike">
         <a:solidFill>
           <a:srgbClr val="000000"/>
         </a:solidFill>
@@ -545,7 +545,7 @@
         <a:srgbClr val="000000"/>
       </a:buClr>
       <a:buFont typeface="Arial"/>
-      <a:defRPr b="0" i="0" sz="1400" u="none" cap="none" strike="noStrike">
+      <a:defRPr b="0" i="0" spc="0" sz="1400" u="none" cap="none" strike="noStrike">
         <a:solidFill>
           <a:srgbClr val="000000"/>
         </a:solidFill>
@@ -569,7 +569,7 @@
         <a:srgbClr val="000000"/>
       </a:buClr>
       <a:buFont typeface="Arial"/>
-      <a:defRPr b="0" i="0" sz="1400" u="none" cap="none" strike="noStrike">
+      <a:defRPr b="0" i="0" spc="0" sz="1400" u="none" cap="none" strike="noStrike">
         <a:solidFill>
           <a:srgbClr val="000000"/>
         </a:solidFill>
@@ -593,7 +593,7 @@
         <a:srgbClr val="000000"/>
       </a:buClr>
       <a:buFont typeface="Arial"/>
-      <a:defRPr b="0" i="0" sz="1400" u="none" cap="none" strike="noStrike">
+      <a:defRPr b="0" i="0" spc="0" sz="1400" u="none" cap="none" strike="noStrike">
         <a:solidFill>
           <a:srgbClr val="000000"/>
         </a:solidFill>
@@ -617,7 +617,7 @@
         <a:srgbClr val="000000"/>
       </a:buClr>
       <a:buFont typeface="Arial"/>
-      <a:defRPr b="0" i="0" sz="1400" u="none" cap="none" strike="noStrike">
+      <a:defRPr b="0" i="0" spc="0" sz="1400" u="none" cap="none" strike="noStrike">
         <a:solidFill>
           <a:srgbClr val="000000"/>
         </a:solidFill>
@@ -641,7 +641,7 @@
         <a:srgbClr val="000000"/>
       </a:buClr>
       <a:buFont typeface="Arial"/>
-      <a:defRPr b="0" i="0" sz="1400" u="none" cap="none" strike="noStrike">
+      <a:defRPr b="0" i="0" spc="0" sz="1400" u="none" cap="none" strike="noStrike">
         <a:solidFill>
           <a:srgbClr val="000000"/>
         </a:solidFill>
@@ -665,7 +665,7 @@
         <a:srgbClr val="000000"/>
       </a:buClr>
       <a:buFont typeface="Arial"/>
-      <a:defRPr b="0" i="0" sz="1400" u="none" cap="none" strike="noStrike">
+      <a:defRPr b="0" i="0" spc="0" sz="1400" u="none" cap="none" strike="noStrike">
         <a:solidFill>
           <a:srgbClr val="000000"/>
         </a:solidFill>
@@ -689,7 +689,7 @@
         <a:srgbClr val="000000"/>
       </a:buClr>
       <a:buFont typeface="Arial"/>
-      <a:defRPr b="0" i="0" sz="1400" u="none" cap="none" strike="noStrike">
+      <a:defRPr b="0" i="0" spc="0" sz="1400" u="none" cap="none" strike="noStrike">
         <a:solidFill>
           <a:srgbClr val="000000"/>
         </a:solidFill>
@@ -786,103 +786,15 @@
           </a:bodyPr>
           <a:lstStyle/>
           <a:p>
-            <a:pPr indent="0" lvl="0" marL="0" rtl="0" algn="l">
-              <a:lnSpc>
-                <a:spcPct val="115000"/>
-              </a:lnSpc>
-              <a:spcBef>
-                <a:spcPts val="0"/>
-              </a:spcBef>
-              <a:spcAft>
-                <a:spcPts val="0"/>
-              </a:spcAft>
-              <a:buClr>
-                <a:schemeClr val="dk1"/>
-              </a:buClr>
-              <a:buSzPts val="1100"/>
-              <a:buFont typeface="Arial"/>
-              <a:buNone/>
-            </a:pPr>
-            <a:r>
-              <a:rPr lang="en" sz="1000">
-                <a:solidFill>
-                  <a:srgbClr val="980000"/>
-                </a:solidFill>
-                <a:latin typeface="Times New Roman"/>
-                <a:ea typeface="Times New Roman"/>
-                <a:cs typeface="Times New Roman"/>
-                <a:sym typeface="Times New Roman"/>
-              </a:rPr>
-              <a:t>Zaina Nadeem</a:t>
-            </a:r>
-            <a:endParaRPr b="1" sz="900">
-              <a:solidFill>
-                <a:srgbClr val="980000"/>
-              </a:solidFill>
-              <a:latin typeface="Times New Roman"/>
-              <a:ea typeface="Times New Roman"/>
-              <a:cs typeface="Times New Roman"/>
-              <a:sym typeface="Times New Roman"/>
-            </a:endParaRPr>
-          </a:p>
-          <a:p>
-            <a:pPr indent="0" lvl="0" marL="0" rtl="0" algn="l">
-              <a:lnSpc>
-                <a:spcPct val="115000"/>
-              </a:lnSpc>
-              <a:spcBef>
-                <a:spcPts val="800"/>
-              </a:spcBef>
-              <a:spcAft>
-                <a:spcPts val="0"/>
-              </a:spcAft>
-              <a:buClr>
-                <a:schemeClr val="dk1"/>
-              </a:buClr>
-              <a:buSzPts val="1100"/>
-              <a:buFont typeface="Arial"/>
-              <a:buNone/>
-            </a:pPr>
-            <a:r>
-              <a:rPr lang="en" sz="1000">
-                <a:solidFill>
-                  <a:srgbClr val="980000"/>
-                </a:solidFill>
-                <a:latin typeface="Times New Roman"/>
-                <a:ea typeface="Times New Roman"/>
-                <a:cs typeface="Times New Roman"/>
-                <a:sym typeface="Times New Roman"/>
-              </a:rPr>
-              <a:t>Zaina Nadeem</a:t>
-            </a:r>
-            <a:endParaRPr b="1" sz="900">
-              <a:solidFill>
-                <a:srgbClr val="980000"/>
-              </a:solidFill>
-              <a:latin typeface="Times New Roman"/>
-              <a:ea typeface="Times New Roman"/>
-              <a:cs typeface="Times New Roman"/>
-              <a:sym typeface="Times New Roman"/>
-            </a:endParaRPr>
-          </a:p>
-          <a:p>
             <a:pPr indent="0" lvl="0" marL="0" marR="0" rtl="0" algn="l">
               <a:spcBef>
-                <a:spcPts val="800"/>
-              </a:spcBef>
-              <a:spcAft>
-                <a:spcPts val="0"/>
-              </a:spcAft>
-              <a:buNone/>
-            </a:pPr>
-            <a:r>
-              <a:rPr lang="en" sz="1200">
-                <a:solidFill>
-                  <a:schemeClr val="dk1"/>
-                </a:solidFill>
-              </a:rPr>
-              <a:t> </a:t>
-            </a:r>
+                <a:spcPts val="0"/>
+              </a:spcBef>
+              <a:spcAft>
+                <a:spcPts val="0"/>
+              </a:spcAft>
+              <a:buNone/>
+            </a:pPr>
             <a:r>
               <a:rPr b="1" lang="en" sz="900">
                 <a:solidFill>
@@ -1077,7 +989,204 @@
       </p:grpSpPr>
       <p:sp>
         <p:nvSpPr>
-          <p:cNvPr id="202" name="Google Shape;202;g3f5960b6c8d_2_154:notes"/>
+          <p:cNvPr id="202" name="Google Shape;202;g3f5960b6c8d_2_138:notes"/>
+          <p:cNvSpPr txBox="1"/>
+          <p:nvPr>
+            <p:ph idx="1" type="body"/>
+          </p:nvPr>
+        </p:nvSpPr>
+        <p:spPr>
+          <a:xfrm>
+            <a:off x="685800" y="4343400"/>
+            <a:ext cx="5486400" cy="4114800"/>
+          </a:xfrm>
+          <a:prstGeom prst="rect">
+            <a:avLst/>
+          </a:prstGeom>
+        </p:spPr>
+        <p:txBody>
+          <a:bodyPr anchorCtr="0" anchor="t" bIns="91425" lIns="91425" spcFirstLastPara="1" rIns="91425" wrap="square" tIns="91425">
+            <a:noAutofit/>
+          </a:bodyPr>
+          <a:lstStyle/>
+          <a:p>
+            <a:pPr indent="0" lvl="0" marL="0" rtl="0" algn="l">
+              <a:lnSpc>
+                <a:spcPct val="115000"/>
+              </a:lnSpc>
+              <a:spcBef>
+                <a:spcPts val="0"/>
+              </a:spcBef>
+              <a:spcAft>
+                <a:spcPts val="0"/>
+              </a:spcAft>
+              <a:buClr>
+                <a:schemeClr val="dk1"/>
+              </a:buClr>
+              <a:buSzPts val="1100"/>
+              <a:buFont typeface="Arial"/>
+              <a:buNone/>
+            </a:pPr>
+            <a:r>
+              <a:rPr b="1" lang="en" sz="900">
+                <a:solidFill>
+                  <a:schemeClr val="dk1"/>
+                </a:solidFill>
+                <a:latin typeface="Times New Roman"/>
+                <a:ea typeface="Times New Roman"/>
+                <a:cs typeface="Times New Roman"/>
+                <a:sym typeface="Times New Roman"/>
+              </a:rPr>
+              <a:t>Slide 11 — Results, In Plain Language/ </a:t>
+            </a:r>
+            <a:r>
+              <a:rPr lang="en" sz="900">
+                <a:solidFill>
+                  <a:srgbClr val="980000"/>
+                </a:solidFill>
+                <a:highlight>
+                  <a:srgbClr val="FFFFFF"/>
+                </a:highlight>
+                <a:latin typeface="Times New Roman"/>
+                <a:ea typeface="Times New Roman"/>
+                <a:cs typeface="Times New Roman"/>
+                <a:sym typeface="Times New Roman"/>
+              </a:rPr>
+              <a:t>Amen Bush </a:t>
+            </a:r>
+            <a:endParaRPr sz="1000">
+              <a:solidFill>
+                <a:srgbClr val="980000"/>
+              </a:solidFill>
+              <a:highlight>
+                <a:srgbClr val="FFFFFF"/>
+              </a:highlight>
+              <a:latin typeface="Times New Roman"/>
+              <a:ea typeface="Times New Roman"/>
+              <a:cs typeface="Times New Roman"/>
+              <a:sym typeface="Times New Roman"/>
+            </a:endParaRPr>
+          </a:p>
+          <a:p>
+            <a:pPr indent="0" lvl="0" marL="0" rtl="0" algn="l">
+              <a:lnSpc>
+                <a:spcPct val="115000"/>
+              </a:lnSpc>
+              <a:spcBef>
+                <a:spcPts val="800"/>
+              </a:spcBef>
+              <a:spcAft>
+                <a:spcPts val="0"/>
+              </a:spcAft>
+              <a:buClr>
+                <a:schemeClr val="dk1"/>
+              </a:buClr>
+              <a:buSzPts val="1100"/>
+              <a:buFont typeface="Arial"/>
+              <a:buNone/>
+            </a:pPr>
+            <a:r>
+              <a:rPr lang="en" sz="900">
+                <a:solidFill>
+                  <a:schemeClr val="dk1"/>
+                </a:solidFill>
+                <a:latin typeface="Times New Roman"/>
+                <a:ea typeface="Times New Roman"/>
+                <a:cs typeface="Times New Roman"/>
+                <a:sym typeface="Times New Roman"/>
+              </a:rPr>
+              <a:t>"To summarize: the Amsterdam model works because we gave it the right features. The US model does not work because the data does not have enough information. Our audit of feature importance was more valuable than any accuracy number. It helped us find the bias and the missing feature.</a:t>
+            </a:r>
+            <a:endParaRPr sz="900">
+              <a:solidFill>
+                <a:schemeClr val="dk1"/>
+              </a:solidFill>
+              <a:latin typeface="Times New Roman"/>
+              <a:ea typeface="Times New Roman"/>
+              <a:cs typeface="Times New Roman"/>
+              <a:sym typeface="Times New Roman"/>
+            </a:endParaRPr>
+          </a:p>
+          <a:p>
+            <a:pPr indent="0" lvl="0" marL="0" rtl="0" algn="l">
+              <a:spcBef>
+                <a:spcPts val="800"/>
+              </a:spcBef>
+              <a:spcAft>
+                <a:spcPts val="0"/>
+              </a:spcAft>
+              <a:buNone/>
+            </a:pPr>
+            <a:r>
+              <a:t/>
+            </a:r>
+            <a:endParaRPr/>
+          </a:p>
+        </p:txBody>
+      </p:sp>
+      <p:sp>
+        <p:nvSpPr>
+          <p:cNvPr id="203" name="Google Shape;203;g3f5960b6c8d_2_138:notes"/>
+          <p:cNvSpPr/>
+          <p:nvPr>
+            <p:ph idx="2" type="sldImg"/>
+          </p:nvPr>
+        </p:nvSpPr>
+        <p:spPr>
+          <a:xfrm>
+            <a:off x="857419" y="685800"/>
+            <a:ext cx="3429169" cy="3429000"/>
+          </a:xfrm>
+          <a:custGeom>
+            <a:rect b="b" l="l" r="r" t="t"/>
+            <a:pathLst>
+              <a:path extrusionOk="0" h="120000" w="120000">
+                <a:moveTo>
+                  <a:pt x="0" y="0"/>
+                </a:moveTo>
+                <a:lnTo>
+                  <a:pt x="120000" y="0"/>
+                </a:lnTo>
+                <a:lnTo>
+                  <a:pt x="120000" y="120000"/>
+                </a:lnTo>
+                <a:lnTo>
+                  <a:pt x="0" y="120000"/>
+                </a:lnTo>
+                <a:close/>
+              </a:path>
+            </a:pathLst>
+          </a:custGeom>
+        </p:spPr>
+      </p:sp>
+    </p:spTree>
+  </p:cSld>
+  <p:clrMapOvr>
+    <a:masterClrMapping/>
+  </p:clrMapOvr>
+</p:notes>
+</file>
+
+<file path=ppt/notesSlides/notesSlide11.xml><?xml version="1.0" encoding="utf-8"?>
+<p:notes xmlns:a="http://schemas.openxmlformats.org/drawingml/2006/main" xmlns:r="http://schemas.openxmlformats.org/officeDocument/2006/relationships" xmlns:mc="http://schemas.openxmlformats.org/markup-compatibility/2006" xmlns:mv="urn:schemas-microsoft-com:mac:vml" xmlns:p="http://schemas.openxmlformats.org/presentationml/2006/main" xmlns:c="http://schemas.openxmlformats.org/drawingml/2006/chart" xmlns:dgm="http://schemas.openxmlformats.org/drawingml/2006/diagram" xmlns:o="urn:schemas-microsoft-com:office:office" xmlns:v="urn:schemas-microsoft-com:vml" xmlns:pvml="urn:schemas-microsoft-com:office:powerpoint" xmlns:com="http://schemas.openxmlformats.org/drawingml/2006/compatibility" xmlns:p14="http://schemas.microsoft.com/office/powerpoint/2010/main" xmlns:p15="http://schemas.microsoft.com/office/powerpoint/2012/main" xmlns:ahyp="http://schemas.microsoft.com/office/drawing/2018/hyperlinkcolor" showMasterPhAnim="0" showMasterSp="0">
+  <p:cSld>
+    <p:spTree>
+      <p:nvGrpSpPr>
+        <p:cNvPr id="218" name="Shape 218"/>
+        <p:cNvGrpSpPr/>
+        <p:nvPr/>
+      </p:nvGrpSpPr>
+      <p:grpSpPr>
+        <a:xfrm>
+          <a:off x="0" y="0"/>
+          <a:ext cx="0" cy="0"/>
+          <a:chOff x="0" y="0"/>
+          <a:chExt cx="0" cy="0"/>
+        </a:xfrm>
+      </p:grpSpPr>
+      <p:sp>
+        <p:nvSpPr>
+          <p:cNvPr id="219" name="Google Shape;219;g3f5960b6c8d_2_154:notes"/>
           <p:cNvSpPr/>
           <p:nvPr>
             <p:ph idx="2" type="sldImg"/>
@@ -1116,7 +1225,7 @@
       </p:sp>
       <p:sp>
         <p:nvSpPr>
-          <p:cNvPr id="203" name="Google Shape;203;g3f5960b6c8d_2_154:notes"/>
+          <p:cNvPr id="220" name="Google Shape;220;g3f5960b6c8d_2_154:notes"/>
           <p:cNvSpPr txBox="1"/>
           <p:nvPr>
             <p:ph idx="1" type="body"/>
@@ -1317,7 +1426,7 @@
       </p:sp>
       <p:sp>
         <p:nvSpPr>
-          <p:cNvPr id="204" name="Google Shape;204;g3f5960b6c8d_2_154:notes"/>
+          <p:cNvPr id="221" name="Google Shape;221;g3f5960b6c8d_2_154:notes"/>
           <p:cNvSpPr txBox="1"/>
           <p:nvPr>
             <p:ph idx="12" type="sldNum"/>
@@ -1383,12 +1492,12 @@
 </p:notes>
 </file>
 
-<file path=ppt/notesSlides/notesSlide11.xml><?xml version="1.0" encoding="utf-8"?>
+<file path=ppt/notesSlides/notesSlide12.xml><?xml version="1.0" encoding="utf-8"?>
 <p:notes xmlns:a="http://schemas.openxmlformats.org/drawingml/2006/main" xmlns:r="http://schemas.openxmlformats.org/officeDocument/2006/relationships" xmlns:mc="http://schemas.openxmlformats.org/markup-compatibility/2006" xmlns:mv="urn:schemas-microsoft-com:mac:vml" xmlns:p="http://schemas.openxmlformats.org/presentationml/2006/main" xmlns:c="http://schemas.openxmlformats.org/drawingml/2006/chart" xmlns:dgm="http://schemas.openxmlformats.org/drawingml/2006/diagram" xmlns:o="urn:schemas-microsoft-com:office:office" xmlns:v="urn:schemas-microsoft-com:vml" xmlns:pvml="urn:schemas-microsoft-com:office:powerpoint" xmlns:com="http://schemas.openxmlformats.org/drawingml/2006/compatibility" xmlns:p14="http://schemas.microsoft.com/office/powerpoint/2010/main" xmlns:p15="http://schemas.microsoft.com/office/powerpoint/2012/main" xmlns:ahyp="http://schemas.microsoft.com/office/drawing/2018/hyperlinkcolor" showMasterPhAnim="0" showMasterSp="0">
   <p:cSld>
     <p:spTree>
       <p:nvGrpSpPr>
-        <p:cNvPr id="224" name="Shape 224"/>
+        <p:cNvPr id="245" name="Shape 245"/>
         <p:cNvGrpSpPr/>
         <p:nvPr/>
       </p:nvGrpSpPr>
@@ -1402,7 +1511,7 @@
       </p:grpSpPr>
       <p:sp>
         <p:nvSpPr>
-          <p:cNvPr id="225" name="Google Shape;225;g3f5960b6c8d_2_138:notes"/>
+          <p:cNvPr id="246" name="Google Shape;246;g3f5960b6c8d_2_176:notes"/>
           <p:cNvSpPr txBox="1"/>
           <p:nvPr>
             <p:ph idx="1" type="body"/>
@@ -1450,69 +1559,23 @@
                 <a:cs typeface="Times New Roman"/>
                 <a:sym typeface="Times New Roman"/>
               </a:rPr>
-              <a:t>Slide 11 — Results, In Plain Language/ </a:t>
-            </a:r>
-            <a:r>
-              <a:rPr lang="en" sz="900">
+              <a:t>Slide 12 — Deployment/  </a:t>
+            </a:r>
+            <a:r>
+              <a:rPr lang="en" sz="1000">
                 <a:solidFill>
                   <a:srgbClr val="980000"/>
                 </a:solidFill>
-                <a:highlight>
-                  <a:srgbClr val="FFFFFF"/>
-                </a:highlight>
                 <a:latin typeface="Times New Roman"/>
                 <a:ea typeface="Times New Roman"/>
                 <a:cs typeface="Times New Roman"/>
                 <a:sym typeface="Times New Roman"/>
               </a:rPr>
-              <a:t>Amen Bush </a:t>
-            </a:r>
-            <a:endParaRPr sz="1000">
+              <a:t>Laxmi Pesara  </a:t>
+            </a:r>
+            <a:endParaRPr b="1" sz="900">
               <a:solidFill>
                 <a:srgbClr val="980000"/>
-              </a:solidFill>
-              <a:highlight>
-                <a:srgbClr val="FFFFFF"/>
-              </a:highlight>
-              <a:latin typeface="Times New Roman"/>
-              <a:ea typeface="Times New Roman"/>
-              <a:cs typeface="Times New Roman"/>
-              <a:sym typeface="Times New Roman"/>
-            </a:endParaRPr>
-          </a:p>
-          <a:p>
-            <a:pPr indent="0" lvl="0" marL="0" rtl="0" algn="l">
-              <a:lnSpc>
-                <a:spcPct val="115000"/>
-              </a:lnSpc>
-              <a:spcBef>
-                <a:spcPts val="800"/>
-              </a:spcBef>
-              <a:spcAft>
-                <a:spcPts val="0"/>
-              </a:spcAft>
-              <a:buClr>
-                <a:schemeClr val="dk1"/>
-              </a:buClr>
-              <a:buSzPts val="1100"/>
-              <a:buFont typeface="Arial"/>
-              <a:buNone/>
-            </a:pPr>
-            <a:r>
-              <a:rPr lang="en" sz="900">
-                <a:solidFill>
-                  <a:schemeClr val="dk1"/>
-                </a:solidFill>
-                <a:latin typeface="Times New Roman"/>
-                <a:ea typeface="Times New Roman"/>
-                <a:cs typeface="Times New Roman"/>
-                <a:sym typeface="Times New Roman"/>
-              </a:rPr>
-              <a:t>"To summarize: the Amsterdam model works because we gave it the right features. The US model does not work because the data does not have enough information. Our audit of feature importance was more valuable than any accuracy number. It helped us find the bias and the missing feature.</a:t>
-            </a:r>
-            <a:endParaRPr sz="900">
-              <a:solidFill>
-                <a:schemeClr val="dk1"/>
               </a:solidFill>
               <a:latin typeface="Times New Roman"/>
               <a:ea typeface="Times New Roman"/>
@@ -1522,6 +1585,46 @@
           </a:p>
           <a:p>
             <a:pPr indent="0" lvl="0" marL="0" rtl="0" algn="l">
+              <a:lnSpc>
+                <a:spcPct val="115000"/>
+              </a:lnSpc>
+              <a:spcBef>
+                <a:spcPts val="800"/>
+              </a:spcBef>
+              <a:spcAft>
+                <a:spcPts val="0"/>
+              </a:spcAft>
+              <a:buClr>
+                <a:schemeClr val="dk1"/>
+              </a:buClr>
+              <a:buSzPts val="1100"/>
+              <a:buFont typeface="Arial"/>
+              <a:buNone/>
+            </a:pPr>
+            <a:r>
+              <a:rPr lang="en" sz="900">
+                <a:solidFill>
+                  <a:schemeClr val="dk1"/>
+                </a:solidFill>
+                <a:latin typeface="Times New Roman"/>
+                <a:ea typeface="Times New Roman"/>
+                <a:cs typeface="Times New Roman"/>
+                <a:sym typeface="Times New Roman"/>
+              </a:rPr>
+              <a:t>We kept the app simple on purpose. We only ship features we tested and trust. The confidence score is explained — it shows how many trees voted for that answer. Inputs are checked, and every limit is written inside the app.</a:t>
+            </a:r>
+            <a:endParaRPr sz="900">
+              <a:solidFill>
+                <a:schemeClr val="dk1"/>
+              </a:solidFill>
+              <a:latin typeface="Times New Roman"/>
+              <a:ea typeface="Times New Roman"/>
+              <a:cs typeface="Times New Roman"/>
+              <a:sym typeface="Times New Roman"/>
+            </a:endParaRPr>
+          </a:p>
+          <a:p>
+            <a:pPr indent="0" lvl="0" marL="0" rtl="0" algn="l">
               <a:spcBef>
                 <a:spcPts val="800"/>
               </a:spcBef>
@@ -1539,7 +1642,7 @@
       </p:sp>
       <p:sp>
         <p:nvSpPr>
-          <p:cNvPr id="226" name="Google Shape;226;g3f5960b6c8d_2_138:notes"/>
+          <p:cNvPr id="247" name="Google Shape;247;g3f5960b6c8d_2_176:notes"/>
           <p:cNvSpPr/>
           <p:nvPr>
             <p:ph idx="2" type="sldImg"/>
@@ -1580,12 +1683,12 @@
 </p:notes>
 </file>
 
-<file path=ppt/notesSlides/notesSlide12.xml><?xml version="1.0" encoding="utf-8"?>
+<file path=ppt/notesSlides/notesSlide13.xml><?xml version="1.0" encoding="utf-8"?>
 <p:notes xmlns:a="http://schemas.openxmlformats.org/drawingml/2006/main" xmlns:r="http://schemas.openxmlformats.org/officeDocument/2006/relationships" xmlns:mc="http://schemas.openxmlformats.org/markup-compatibility/2006" xmlns:mv="urn:schemas-microsoft-com:mac:vml" xmlns:p="http://schemas.openxmlformats.org/presentationml/2006/main" xmlns:c="http://schemas.openxmlformats.org/drawingml/2006/chart" xmlns:dgm="http://schemas.openxmlformats.org/drawingml/2006/diagram" xmlns:o="urn:schemas-microsoft-com:office:office" xmlns:v="urn:schemas-microsoft-com:vml" xmlns:pvml="urn:schemas-microsoft-com:office:powerpoint" xmlns:com="http://schemas.openxmlformats.org/drawingml/2006/compatibility" xmlns:p14="http://schemas.microsoft.com/office/powerpoint/2010/main" xmlns:p15="http://schemas.microsoft.com/office/powerpoint/2012/main" xmlns:ahyp="http://schemas.microsoft.com/office/drawing/2018/hyperlinkcolor" showMasterPhAnim="0" showMasterSp="0">
   <p:cSld>
     <p:spTree>
       <p:nvGrpSpPr>
-        <p:cNvPr id="241" name="Shape 241"/>
+        <p:cNvPr id="259" name="Shape 259"/>
         <p:cNvGrpSpPr/>
         <p:nvPr/>
       </p:nvGrpSpPr>
@@ -1599,198 +1702,7 @@
       </p:grpSpPr>
       <p:sp>
         <p:nvSpPr>
-          <p:cNvPr id="242" name="Google Shape;242;g3f5960b6c8d_2_176:notes"/>
-          <p:cNvSpPr txBox="1"/>
-          <p:nvPr>
-            <p:ph idx="1" type="body"/>
-          </p:nvPr>
-        </p:nvSpPr>
-        <p:spPr>
-          <a:xfrm>
-            <a:off x="685800" y="4343400"/>
-            <a:ext cx="5486400" cy="4114800"/>
-          </a:xfrm>
-          <a:prstGeom prst="rect">
-            <a:avLst/>
-          </a:prstGeom>
-        </p:spPr>
-        <p:txBody>
-          <a:bodyPr anchorCtr="0" anchor="t" bIns="91425" lIns="91425" spcFirstLastPara="1" rIns="91425" wrap="square" tIns="91425">
-            <a:noAutofit/>
-          </a:bodyPr>
-          <a:lstStyle/>
-          <a:p>
-            <a:pPr indent="0" lvl="0" marL="0" rtl="0" algn="l">
-              <a:lnSpc>
-                <a:spcPct val="115000"/>
-              </a:lnSpc>
-              <a:spcBef>
-                <a:spcPts val="0"/>
-              </a:spcBef>
-              <a:spcAft>
-                <a:spcPts val="0"/>
-              </a:spcAft>
-              <a:buClr>
-                <a:schemeClr val="dk1"/>
-              </a:buClr>
-              <a:buSzPts val="1100"/>
-              <a:buFont typeface="Arial"/>
-              <a:buNone/>
-            </a:pPr>
-            <a:r>
-              <a:rPr b="1" lang="en" sz="900">
-                <a:solidFill>
-                  <a:schemeClr val="dk1"/>
-                </a:solidFill>
-                <a:latin typeface="Times New Roman"/>
-                <a:ea typeface="Times New Roman"/>
-                <a:cs typeface="Times New Roman"/>
-                <a:sym typeface="Times New Roman"/>
-              </a:rPr>
-              <a:t>Slide 12 — Deployment/  </a:t>
-            </a:r>
-            <a:r>
-              <a:rPr lang="en" sz="1000">
-                <a:solidFill>
-                  <a:srgbClr val="980000"/>
-                </a:solidFill>
-                <a:latin typeface="Times New Roman"/>
-                <a:ea typeface="Times New Roman"/>
-                <a:cs typeface="Times New Roman"/>
-                <a:sym typeface="Times New Roman"/>
-              </a:rPr>
-              <a:t>Laxmi Pesara  </a:t>
-            </a:r>
-            <a:endParaRPr b="1" sz="900">
-              <a:solidFill>
-                <a:srgbClr val="980000"/>
-              </a:solidFill>
-              <a:latin typeface="Times New Roman"/>
-              <a:ea typeface="Times New Roman"/>
-              <a:cs typeface="Times New Roman"/>
-              <a:sym typeface="Times New Roman"/>
-            </a:endParaRPr>
-          </a:p>
-          <a:p>
-            <a:pPr indent="0" lvl="0" marL="0" rtl="0" algn="l">
-              <a:lnSpc>
-                <a:spcPct val="115000"/>
-              </a:lnSpc>
-              <a:spcBef>
-                <a:spcPts val="800"/>
-              </a:spcBef>
-              <a:spcAft>
-                <a:spcPts val="0"/>
-              </a:spcAft>
-              <a:buClr>
-                <a:schemeClr val="dk1"/>
-              </a:buClr>
-              <a:buSzPts val="1100"/>
-              <a:buFont typeface="Arial"/>
-              <a:buNone/>
-            </a:pPr>
-            <a:r>
-              <a:rPr lang="en" sz="900">
-                <a:solidFill>
-                  <a:schemeClr val="dk1"/>
-                </a:solidFill>
-                <a:latin typeface="Times New Roman"/>
-                <a:ea typeface="Times New Roman"/>
-                <a:cs typeface="Times New Roman"/>
-                <a:sym typeface="Times New Roman"/>
-              </a:rPr>
-              <a:t>We kept the app simple on purpose. We only ship features we tested and trust. The confidence score is explained — it shows how many trees voted for that answer. Inputs are checked, and every limit is written inside the app.</a:t>
-            </a:r>
-            <a:endParaRPr sz="900">
-              <a:solidFill>
-                <a:schemeClr val="dk1"/>
-              </a:solidFill>
-              <a:latin typeface="Times New Roman"/>
-              <a:ea typeface="Times New Roman"/>
-              <a:cs typeface="Times New Roman"/>
-              <a:sym typeface="Times New Roman"/>
-            </a:endParaRPr>
-          </a:p>
-          <a:p>
-            <a:pPr indent="0" lvl="0" marL="0" rtl="0" algn="l">
-              <a:spcBef>
-                <a:spcPts val="800"/>
-              </a:spcBef>
-              <a:spcAft>
-                <a:spcPts val="0"/>
-              </a:spcAft>
-              <a:buNone/>
-            </a:pPr>
-            <a:r>
-              <a:t/>
-            </a:r>
-            <a:endParaRPr/>
-          </a:p>
-        </p:txBody>
-      </p:sp>
-      <p:sp>
-        <p:nvSpPr>
-          <p:cNvPr id="243" name="Google Shape;243;g3f5960b6c8d_2_176:notes"/>
-          <p:cNvSpPr/>
-          <p:nvPr>
-            <p:ph idx="2" type="sldImg"/>
-          </p:nvPr>
-        </p:nvSpPr>
-        <p:spPr>
-          <a:xfrm>
-            <a:off x="857419" y="685800"/>
-            <a:ext cx="3429169" cy="3429000"/>
-          </a:xfrm>
-          <a:custGeom>
-            <a:rect b="b" l="l" r="r" t="t"/>
-            <a:pathLst>
-              <a:path extrusionOk="0" h="120000" w="120000">
-                <a:moveTo>
-                  <a:pt x="0" y="0"/>
-                </a:moveTo>
-                <a:lnTo>
-                  <a:pt x="120000" y="0"/>
-                </a:lnTo>
-                <a:lnTo>
-                  <a:pt x="120000" y="120000"/>
-                </a:lnTo>
-                <a:lnTo>
-                  <a:pt x="0" y="120000"/>
-                </a:lnTo>
-                <a:close/>
-              </a:path>
-            </a:pathLst>
-          </a:custGeom>
-        </p:spPr>
-      </p:sp>
-    </p:spTree>
-  </p:cSld>
-  <p:clrMapOvr>
-    <a:masterClrMapping/>
-  </p:clrMapOvr>
-</p:notes>
-</file>
-
-<file path=ppt/notesSlides/notesSlide13.xml><?xml version="1.0" encoding="utf-8"?>
-<p:notes xmlns:a="http://schemas.openxmlformats.org/drawingml/2006/main" xmlns:r="http://schemas.openxmlformats.org/officeDocument/2006/relationships" xmlns:mc="http://schemas.openxmlformats.org/markup-compatibility/2006" xmlns:mv="urn:schemas-microsoft-com:mac:vml" xmlns:p="http://schemas.openxmlformats.org/presentationml/2006/main" xmlns:c="http://schemas.openxmlformats.org/drawingml/2006/chart" xmlns:dgm="http://schemas.openxmlformats.org/drawingml/2006/diagram" xmlns:o="urn:schemas-microsoft-com:office:office" xmlns:v="urn:schemas-microsoft-com:vml" xmlns:pvml="urn:schemas-microsoft-com:office:powerpoint" xmlns:com="http://schemas.openxmlformats.org/drawingml/2006/compatibility" xmlns:p14="http://schemas.microsoft.com/office/powerpoint/2010/main" xmlns:p15="http://schemas.microsoft.com/office/powerpoint/2012/main" xmlns:ahyp="http://schemas.microsoft.com/office/drawing/2018/hyperlinkcolor" showMasterPhAnim="0" showMasterSp="0">
-  <p:cSld>
-    <p:spTree>
-      <p:nvGrpSpPr>
-        <p:cNvPr id="253" name="Shape 253"/>
-        <p:cNvGrpSpPr/>
-        <p:nvPr/>
-      </p:nvGrpSpPr>
-      <p:grpSpPr>
-        <a:xfrm>
-          <a:off x="0" y="0"/>
-          <a:ext cx="0" cy="0"/>
-          <a:chOff x="0" y="0"/>
-          <a:chExt cx="0" cy="0"/>
-        </a:xfrm>
-      </p:grpSpPr>
-      <p:sp>
-        <p:nvSpPr>
-          <p:cNvPr id="254" name="Google Shape;254;g3f5960b6c8d_2_187:notes"/>
+          <p:cNvPr id="260" name="Google Shape;260;g3f5960b6c8d_2_187:notes"/>
           <p:cNvSpPr/>
           <p:nvPr>
             <p:ph idx="2" type="sldImg"/>
@@ -1829,7 +1741,7 @@
       </p:sp>
       <p:sp>
         <p:nvSpPr>
-          <p:cNvPr id="255" name="Google Shape;255;g3f5960b6c8d_2_187:notes"/>
+          <p:cNvPr id="261" name="Google Shape;261;g3f5960b6c8d_2_187:notes"/>
           <p:cNvSpPr txBox="1"/>
           <p:nvPr>
             <p:ph idx="1" type="body"/>
@@ -1945,7 +1857,7 @@
       </p:sp>
       <p:sp>
         <p:nvSpPr>
-          <p:cNvPr id="256" name="Google Shape;256;g3f5960b6c8d_2_187:notes"/>
+          <p:cNvPr id="262" name="Google Shape;262;g3f5960b6c8d_2_187:notes"/>
           <p:cNvSpPr txBox="1"/>
           <p:nvPr>
             <p:ph idx="12" type="sldNum"/>
@@ -2016,7 +1928,7 @@
   <p:cSld>
     <p:spTree>
       <p:nvGrpSpPr>
-        <p:cNvPr id="269" name="Shape 269"/>
+        <p:cNvPr id="275" name="Shape 275"/>
         <p:cNvGrpSpPr/>
         <p:nvPr/>
       </p:nvGrpSpPr>
@@ -2030,7 +1942,7 @@
       </p:grpSpPr>
       <p:sp>
         <p:nvSpPr>
-          <p:cNvPr id="270" name="Google Shape;270;g3f5960b6c8d_2_202:notes"/>
+          <p:cNvPr id="276" name="Google Shape;276;g3f5960b6c8d_2_202:notes"/>
           <p:cNvSpPr/>
           <p:nvPr>
             <p:ph idx="2" type="sldImg"/>
@@ -2069,7 +1981,7 @@
       </p:sp>
       <p:sp>
         <p:nvSpPr>
-          <p:cNvPr id="271" name="Google Shape;271;g3f5960b6c8d_2_202:notes"/>
+          <p:cNvPr id="277" name="Google Shape;277;g3f5960b6c8d_2_202:notes"/>
           <p:cNvSpPr txBox="1"/>
           <p:nvPr>
             <p:ph idx="1" type="body"/>
@@ -2208,7 +2120,7 @@
       </p:sp>
       <p:sp>
         <p:nvSpPr>
-          <p:cNvPr id="272" name="Google Shape;272;g3f5960b6c8d_2_202:notes"/>
+          <p:cNvPr id="278" name="Google Shape;278;g3f5960b6c8d_2_202:notes"/>
           <p:cNvSpPr txBox="1"/>
           <p:nvPr>
             <p:ph idx="12" type="sldNum"/>
@@ -2279,7 +2191,7 @@
   <p:cSld>
     <p:spTree>
       <p:nvGrpSpPr>
-        <p:cNvPr id="282" name="Shape 282"/>
+        <p:cNvPr id="288" name="Shape 288"/>
         <p:cNvGrpSpPr/>
         <p:nvPr/>
       </p:nvGrpSpPr>
@@ -2293,7 +2205,7 @@
       </p:grpSpPr>
       <p:sp>
         <p:nvSpPr>
-          <p:cNvPr id="283" name="Google Shape;283;g3f5960b6c8d_2_214:notes"/>
+          <p:cNvPr id="289" name="Google Shape;289;g3f5960b6c8d_2_214:notes"/>
           <p:cNvSpPr/>
           <p:nvPr>
             <p:ph idx="2" type="sldImg"/>
@@ -2332,7 +2244,7 @@
       </p:sp>
       <p:sp>
         <p:nvSpPr>
-          <p:cNvPr id="284" name="Google Shape;284;g3f5960b6c8d_2_214:notes"/>
+          <p:cNvPr id="290" name="Google Shape;290;g3f5960b6c8d_2_214:notes"/>
           <p:cNvSpPr txBox="1"/>
           <p:nvPr>
             <p:ph idx="1" type="body"/>
@@ -2409,21 +2321,13 @@
             </a:endParaRPr>
           </a:p>
           <a:p>
-            <a:pPr indent="0" lvl="0" marL="0" rtl="0" algn="l">
-              <a:lnSpc>
-                <a:spcPct val="115000"/>
-              </a:lnSpc>
+            <a:pPr indent="0" lvl="0" marL="0" marR="0" rtl="0" algn="l">
               <a:spcBef>
                 <a:spcPts val="800"/>
               </a:spcBef>
               <a:spcAft>
                 <a:spcPts val="0"/>
               </a:spcAft>
-              <a:buClr>
-                <a:schemeClr val="dk1"/>
-              </a:buClr>
-              <a:buSzPts val="1100"/>
-              <a:buFont typeface="Arial"/>
               <a:buNone/>
             </a:pPr>
             <a:r>
@@ -2436,30 +2340,7 @@
                 <a:cs typeface="Times New Roman"/>
                 <a:sym typeface="Times New Roman"/>
               </a:rPr>
-              <a:t>Next, we want to retrain the PMR model without width and curb height — to see if other features alone can predict accessibility. We also want to test our label rule against the 50 real verified labels. We plan to add location to the search so it can rank results better. And each team member will keep building their own AI skills.</a:t>
-            </a:r>
-            <a:endParaRPr sz="900">
-              <a:solidFill>
-                <a:schemeClr val="dk1"/>
-              </a:solidFill>
-              <a:latin typeface="Times New Roman"/>
-              <a:ea typeface="Times New Roman"/>
-              <a:cs typeface="Times New Roman"/>
-              <a:sym typeface="Times New Roman"/>
-            </a:endParaRPr>
-          </a:p>
-          <a:p>
-            <a:pPr indent="0" lvl="0" marL="0" marR="0" rtl="0" algn="l">
-              <a:spcBef>
-                <a:spcPts val="800"/>
-              </a:spcBef>
-              <a:spcAft>
-                <a:spcPts val="0"/>
-              </a:spcAft>
-              <a:buNone/>
-            </a:pPr>
-            <a:r>
-              <a:t/>
+              <a:t>Going forward, we want to retrain the PMR model without width and curb height to see if the other features can predict anything on their own. We want to test our labeling rule against the 50 verified ground-truth labels we have. We're planning to add location awareness to the search so it ranks results better. And individually, each of us wants to keep building our skills in this space. </a:t>
             </a:r>
             <a:endParaRPr sz="1200">
               <a:solidFill>
@@ -2471,7 +2352,7 @@
       </p:sp>
       <p:sp>
         <p:nvSpPr>
-          <p:cNvPr id="285" name="Google Shape;285;g3f5960b6c8d_2_214:notes"/>
+          <p:cNvPr id="291" name="Google Shape;291;g3f5960b6c8d_2_214:notes"/>
           <p:cNvSpPr txBox="1"/>
           <p:nvPr>
             <p:ph idx="12" type="sldNum"/>
@@ -2542,7 +2423,7 @@
   <p:cSld>
     <p:spTree>
       <p:nvGrpSpPr>
-        <p:cNvPr id="312" name="Shape 312"/>
+        <p:cNvPr id="319" name="Shape 319"/>
         <p:cNvGrpSpPr/>
         <p:nvPr/>
       </p:nvGrpSpPr>
@@ -2556,7 +2437,7 @@
       </p:grpSpPr>
       <p:sp>
         <p:nvSpPr>
-          <p:cNvPr id="313" name="Google Shape;313;g3f5960b6c8d_2_243:notes"/>
+          <p:cNvPr id="320" name="Google Shape;320;g3f5960b6c8d_2_243:notes"/>
           <p:cNvSpPr/>
           <p:nvPr>
             <p:ph idx="2" type="sldImg"/>
@@ -2595,7 +2476,7 @@
       </p:sp>
       <p:sp>
         <p:nvSpPr>
-          <p:cNvPr id="314" name="Google Shape;314;g3f5960b6c8d_2_243:notes"/>
+          <p:cNvPr id="321" name="Google Shape;321;g3f5960b6c8d_2_243:notes"/>
           <p:cNvSpPr txBox="1"/>
           <p:nvPr>
             <p:ph idx="1" type="body"/>
@@ -2699,7 +2580,7 @@
                 <a:cs typeface="Times New Roman"/>
                 <a:sym typeface="Times New Roman"/>
               </a:rPr>
-              <a:t>Here are our data sources and references. Our Amsterdam data comes from the City of Amsterdam Open Data. The US data comes from CrowdFlower. We used Random Forest, FAISS, and ModernBERT. You can find our code and app at these links.</a:t>
+              <a:t>Here are our sources. Amsterdam data is from the City of Amsterdam Open Data portal. US data is from CrowdFlower. We used Random Forest, FAISS, and ModernBERT. Code and app links are listed here. </a:t>
             </a:r>
             <a:endParaRPr sz="900">
               <a:solidFill>
@@ -2734,7 +2615,7 @@
       </p:sp>
       <p:sp>
         <p:nvSpPr>
-          <p:cNvPr id="315" name="Google Shape;315;g3f5960b6c8d_2_243:notes"/>
+          <p:cNvPr id="322" name="Google Shape;322;g3f5960b6c8d_2_243:notes"/>
           <p:cNvSpPr txBox="1"/>
           <p:nvPr>
             <p:ph idx="12" type="sldNum"/>
@@ -2805,7 +2686,7 @@
   <p:cSld>
     <p:spTree>
       <p:nvGrpSpPr>
-        <p:cNvPr id="323" name="Shape 323"/>
+        <p:cNvPr id="330" name="Shape 330"/>
         <p:cNvGrpSpPr/>
         <p:nvPr/>
       </p:nvGrpSpPr>
@@ -2819,7 +2700,7 @@
       </p:grpSpPr>
       <p:sp>
         <p:nvSpPr>
-          <p:cNvPr id="324" name="Google Shape;324;g3f5960b6c8d_2_253:notes"/>
+          <p:cNvPr id="331" name="Google Shape;331;g3f5960b6c8d_2_253:notes"/>
           <p:cNvSpPr/>
           <p:nvPr>
             <p:ph idx="2" type="sldImg"/>
@@ -2858,7 +2739,7 @@
       </p:sp>
       <p:sp>
         <p:nvSpPr>
-          <p:cNvPr id="325" name="Google Shape;325;g3f5960b6c8d_2_253:notes"/>
+          <p:cNvPr id="332" name="Google Shape;332;g3f5960b6c8d_2_253:notes"/>
           <p:cNvSpPr txBox="1"/>
           <p:nvPr>
             <p:ph idx="1" type="body"/>
@@ -2974,7 +2855,7 @@
                 <a:cs typeface="Times New Roman"/>
                 <a:sym typeface="Times New Roman"/>
               </a:rPr>
-              <a:t>Thank you for listening. You can try the app right now at accessmap-13a.streamlit.app. We are happy to answer questions.</a:t>
+              <a:t>Thank you for listening. You can try the app right now at our app. We are happy to answer questions.</a:t>
             </a:r>
             <a:endParaRPr sz="900">
               <a:solidFill>
@@ -3009,7 +2890,7 @@
       </p:sp>
       <p:sp>
         <p:nvSpPr>
-          <p:cNvPr id="326" name="Google Shape;326;g3f5960b6c8d_2_253:notes"/>
+          <p:cNvPr id="333" name="Google Shape;333;g3f5960b6c8d_2_253:notes"/>
           <p:cNvSpPr txBox="1"/>
           <p:nvPr>
             <p:ph idx="12" type="sldNum"/>
@@ -9807,7 +9688,7 @@
           <a:srgbClr val="000000"/>
         </a:buClr>
         <a:buFont typeface="Arial"/>
-        <a:defRPr b="0" i="0" sz="1400" u="none" cap="none" strike="noStrike">
+        <a:defRPr b="0" i="0" spc="0" sz="1400" u="none" cap="none" strike="noStrike">
           <a:solidFill>
             <a:srgbClr val="000000"/>
           </a:solidFill>
@@ -9831,7 +9712,7 @@
           <a:srgbClr val="000000"/>
         </a:buClr>
         <a:buFont typeface="Arial"/>
-        <a:defRPr b="0" i="0" sz="1400" u="none" cap="none" strike="noStrike">
+        <a:defRPr b="0" i="0" spc="0" sz="1400" u="none" cap="none" strike="noStrike">
           <a:solidFill>
             <a:srgbClr val="000000"/>
           </a:solidFill>
@@ -9855,7 +9736,7 @@
           <a:srgbClr val="000000"/>
         </a:buClr>
         <a:buFont typeface="Arial"/>
-        <a:defRPr b="0" i="0" sz="1400" u="none" cap="none" strike="noStrike">
+        <a:defRPr b="0" i="0" spc="0" sz="1400" u="none" cap="none" strike="noStrike">
           <a:solidFill>
             <a:srgbClr val="000000"/>
           </a:solidFill>
@@ -9879,7 +9760,7 @@
           <a:srgbClr val="000000"/>
         </a:buClr>
         <a:buFont typeface="Arial"/>
-        <a:defRPr b="0" i="0" sz="1400" u="none" cap="none" strike="noStrike">
+        <a:defRPr b="0" i="0" spc="0" sz="1400" u="none" cap="none" strike="noStrike">
           <a:solidFill>
             <a:srgbClr val="000000"/>
           </a:solidFill>
@@ -9903,7 +9784,7 @@
           <a:srgbClr val="000000"/>
         </a:buClr>
         <a:buFont typeface="Arial"/>
-        <a:defRPr b="0" i="0" sz="1400" u="none" cap="none" strike="noStrike">
+        <a:defRPr b="0" i="0" spc="0" sz="1400" u="none" cap="none" strike="noStrike">
           <a:solidFill>
             <a:srgbClr val="000000"/>
           </a:solidFill>
@@ -9927,7 +9808,7 @@
           <a:srgbClr val="000000"/>
         </a:buClr>
         <a:buFont typeface="Arial"/>
-        <a:defRPr b="0" i="0" sz="1400" u="none" cap="none" strike="noStrike">
+        <a:defRPr b="0" i="0" spc="0" sz="1400" u="none" cap="none" strike="noStrike">
           <a:solidFill>
             <a:srgbClr val="000000"/>
           </a:solidFill>
@@ -9951,7 +9832,7 @@
           <a:srgbClr val="000000"/>
         </a:buClr>
         <a:buFont typeface="Arial"/>
-        <a:defRPr b="0" i="0" sz="1400" u="none" cap="none" strike="noStrike">
+        <a:defRPr b="0" i="0" spc="0" sz="1400" u="none" cap="none" strike="noStrike">
           <a:solidFill>
             <a:srgbClr val="000000"/>
           </a:solidFill>
@@ -9975,7 +9856,7 @@
           <a:srgbClr val="000000"/>
         </a:buClr>
         <a:buFont typeface="Arial"/>
-        <a:defRPr b="0" i="0" sz="1400" u="none" cap="none" strike="noStrike">
+        <a:defRPr b="0" i="0" spc="0" sz="1400" u="none" cap="none" strike="noStrike">
           <a:solidFill>
             <a:srgbClr val="000000"/>
           </a:solidFill>
@@ -9999,7 +9880,7 @@
           <a:srgbClr val="000000"/>
         </a:buClr>
         <a:buFont typeface="Arial"/>
-        <a:defRPr b="0" i="0" sz="1400" u="none" cap="none" strike="noStrike">
+        <a:defRPr b="0" i="0" spc="0" sz="1400" u="none" cap="none" strike="noStrike">
           <a:solidFill>
             <a:srgbClr val="000000"/>
           </a:solidFill>
@@ -10036,7 +9917,7 @@
           <a:srgbClr val="000000"/>
         </a:buClr>
         <a:buFont typeface="Arial"/>
-        <a:defRPr b="0" i="0" sz="1400" u="none" cap="none" strike="noStrike">
+        <a:defRPr b="0" i="0" spc="0" sz="1400" u="none" cap="none" strike="noStrike">
           <a:solidFill>
             <a:srgbClr val="000000"/>
           </a:solidFill>
@@ -10060,7 +9941,7 @@
           <a:srgbClr val="000000"/>
         </a:buClr>
         <a:buFont typeface="Arial"/>
-        <a:defRPr b="0" i="0" sz="1400" u="none" cap="none" strike="noStrike">
+        <a:defRPr b="0" i="0" spc="0" sz="1400" u="none" cap="none" strike="noStrike">
           <a:solidFill>
             <a:srgbClr val="000000"/>
           </a:solidFill>
@@ -10084,7 +9965,7 @@
           <a:srgbClr val="000000"/>
         </a:buClr>
         <a:buFont typeface="Arial"/>
-        <a:defRPr b="0" i="0" sz="1400" u="none" cap="none" strike="noStrike">
+        <a:defRPr b="0" i="0" spc="0" sz="1400" u="none" cap="none" strike="noStrike">
           <a:solidFill>
             <a:srgbClr val="000000"/>
           </a:solidFill>
@@ -10108,7 +9989,7 @@
           <a:srgbClr val="000000"/>
         </a:buClr>
         <a:buFont typeface="Arial"/>
-        <a:defRPr b="0" i="0" sz="1400" u="none" cap="none" strike="noStrike">
+        <a:defRPr b="0" i="0" spc="0" sz="1400" u="none" cap="none" strike="noStrike">
           <a:solidFill>
             <a:srgbClr val="000000"/>
           </a:solidFill>
@@ -10132,7 +10013,7 @@
           <a:srgbClr val="000000"/>
         </a:buClr>
         <a:buFont typeface="Arial"/>
-        <a:defRPr b="0" i="0" sz="1400" u="none" cap="none" strike="noStrike">
+        <a:defRPr b="0" i="0" spc="0" sz="1400" u="none" cap="none" strike="noStrike">
           <a:solidFill>
             <a:srgbClr val="000000"/>
           </a:solidFill>
@@ -10156,7 +10037,7 @@
           <a:srgbClr val="000000"/>
         </a:buClr>
         <a:buFont typeface="Arial"/>
-        <a:defRPr b="0" i="0" sz="1400" u="none" cap="none" strike="noStrike">
+        <a:defRPr b="0" i="0" spc="0" sz="1400" u="none" cap="none" strike="noStrike">
           <a:solidFill>
             <a:srgbClr val="000000"/>
           </a:solidFill>
@@ -10180,7 +10061,7 @@
           <a:srgbClr val="000000"/>
         </a:buClr>
         <a:buFont typeface="Arial"/>
-        <a:defRPr b="0" i="0" sz="1400" u="none" cap="none" strike="noStrike">
+        <a:defRPr b="0" i="0" spc="0" sz="1400" u="none" cap="none" strike="noStrike">
           <a:solidFill>
             <a:srgbClr val="000000"/>
           </a:solidFill>
@@ -10204,7 +10085,7 @@
           <a:srgbClr val="000000"/>
         </a:buClr>
         <a:buFont typeface="Arial"/>
-        <a:defRPr b="0" i="0" sz="1400" u="none" cap="none" strike="noStrike">
+        <a:defRPr b="0" i="0" spc="0" sz="1400" u="none" cap="none" strike="noStrike">
           <a:solidFill>
             <a:srgbClr val="000000"/>
           </a:solidFill>
@@ -10228,7 +10109,7 @@
           <a:srgbClr val="000000"/>
         </a:buClr>
         <a:buFont typeface="Arial"/>
-        <a:defRPr b="0" i="0" sz="1400" u="none" cap="none" strike="noStrike">
+        <a:defRPr b="0" i="0" spc="0" sz="1400" u="none" cap="none" strike="noStrike">
           <a:solidFill>
             <a:srgbClr val="000000"/>
           </a:solidFill>
@@ -10265,7 +10146,7 @@
           <a:srgbClr val="000000"/>
         </a:buClr>
         <a:buFont typeface="Arial"/>
-        <a:defRPr b="0" i="0" sz="1400" u="none" cap="none" strike="noStrike">
+        <a:defRPr b="0" i="0" spc="0" sz="1400" u="none" cap="none" strike="noStrike">
           <a:solidFill>
             <a:srgbClr val="000000"/>
           </a:solidFill>
@@ -10289,7 +10170,7 @@
           <a:srgbClr val="000000"/>
         </a:buClr>
         <a:buFont typeface="Arial"/>
-        <a:defRPr b="0" i="0" sz="1400" u="none" cap="none" strike="noStrike">
+        <a:defRPr b="0" i="0" spc="0" sz="1400" u="none" cap="none" strike="noStrike">
           <a:solidFill>
             <a:srgbClr val="000000"/>
           </a:solidFill>
@@ -10313,7 +10194,7 @@
           <a:srgbClr val="000000"/>
         </a:buClr>
         <a:buFont typeface="Arial"/>
-        <a:defRPr b="0" i="0" sz="1400" u="none" cap="none" strike="noStrike">
+        <a:defRPr b="0" i="0" spc="0" sz="1400" u="none" cap="none" strike="noStrike">
           <a:solidFill>
             <a:srgbClr val="000000"/>
           </a:solidFill>
@@ -10337,7 +10218,7 @@
           <a:srgbClr val="000000"/>
         </a:buClr>
         <a:buFont typeface="Arial"/>
-        <a:defRPr b="0" i="0" sz="1400" u="none" cap="none" strike="noStrike">
+        <a:defRPr b="0" i="0" spc="0" sz="1400" u="none" cap="none" strike="noStrike">
           <a:solidFill>
             <a:srgbClr val="000000"/>
           </a:solidFill>
@@ -10361,7 +10242,7 @@
           <a:srgbClr val="000000"/>
         </a:buClr>
         <a:buFont typeface="Arial"/>
-        <a:defRPr b="0" i="0" sz="1400" u="none" cap="none" strike="noStrike">
+        <a:defRPr b="0" i="0" spc="0" sz="1400" u="none" cap="none" strike="noStrike">
           <a:solidFill>
             <a:srgbClr val="000000"/>
           </a:solidFill>
@@ -10385,7 +10266,7 @@
           <a:srgbClr val="000000"/>
         </a:buClr>
         <a:buFont typeface="Arial"/>
-        <a:defRPr b="0" i="0" sz="1400" u="none" cap="none" strike="noStrike">
+        <a:defRPr b="0" i="0" spc="0" sz="1400" u="none" cap="none" strike="noStrike">
           <a:solidFill>
             <a:srgbClr val="000000"/>
           </a:solidFill>
@@ -10409,7 +10290,7 @@
           <a:srgbClr val="000000"/>
         </a:buClr>
         <a:buFont typeface="Arial"/>
-        <a:defRPr b="0" i="0" sz="1400" u="none" cap="none" strike="noStrike">
+        <a:defRPr b="0" i="0" spc="0" sz="1400" u="none" cap="none" strike="noStrike">
           <a:solidFill>
             <a:srgbClr val="000000"/>
           </a:solidFill>
@@ -10433,7 +10314,7 @@
           <a:srgbClr val="000000"/>
         </a:buClr>
         <a:buFont typeface="Arial"/>
-        <a:defRPr b="0" i="0" sz="1400" u="none" cap="none" strike="noStrike">
+        <a:defRPr b="0" i="0" spc="0" sz="1400" u="none" cap="none" strike="noStrike">
           <a:solidFill>
             <a:srgbClr val="000000"/>
           </a:solidFill>
@@ -10457,7 +10338,7 @@
           <a:srgbClr val="000000"/>
         </a:buClr>
         <a:buFont typeface="Arial"/>
-        <a:defRPr b="0" i="0" sz="1400" u="none" cap="none" strike="noStrike">
+        <a:defRPr b="0" i="0" spc="0" sz="1400" u="none" cap="none" strike="noStrike">
           <a:solidFill>
             <a:srgbClr val="000000"/>
           </a:solidFill>
@@ -10530,7 +10411,7 @@
           <a:srgbClr val="000000"/>
         </a:buClr>
         <a:buFont typeface="Arial"/>
-        <a:defRPr b="0" i="0" sz="1400" u="none" cap="none" strike="noStrike">
+        <a:defRPr b="0" i="0" spc="0" sz="1400" u="none" cap="none" strike="noStrike">
           <a:solidFill>
             <a:srgbClr val="000000"/>
           </a:solidFill>
@@ -10554,7 +10435,7 @@
           <a:srgbClr val="000000"/>
         </a:buClr>
         <a:buFont typeface="Arial"/>
-        <a:defRPr b="0" i="0" sz="1400" u="none" cap="none" strike="noStrike">
+        <a:defRPr b="0" i="0" spc="0" sz="1400" u="none" cap="none" strike="noStrike">
           <a:solidFill>
             <a:srgbClr val="000000"/>
           </a:solidFill>
@@ -10578,7 +10459,7 @@
           <a:srgbClr val="000000"/>
         </a:buClr>
         <a:buFont typeface="Arial"/>
-        <a:defRPr b="0" i="0" sz="1400" u="none" cap="none" strike="noStrike">
+        <a:defRPr b="0" i="0" spc="0" sz="1400" u="none" cap="none" strike="noStrike">
           <a:solidFill>
             <a:srgbClr val="000000"/>
           </a:solidFill>
@@ -10602,7 +10483,7 @@
           <a:srgbClr val="000000"/>
         </a:buClr>
         <a:buFont typeface="Arial"/>
-        <a:defRPr b="0" i="0" sz="1400" u="none" cap="none" strike="noStrike">
+        <a:defRPr b="0" i="0" spc="0" sz="1400" u="none" cap="none" strike="noStrike">
           <a:solidFill>
             <a:srgbClr val="000000"/>
           </a:solidFill>
@@ -10626,7 +10507,7 @@
           <a:srgbClr val="000000"/>
         </a:buClr>
         <a:buFont typeface="Arial"/>
-        <a:defRPr b="0" i="0" sz="1400" u="none" cap="none" strike="noStrike">
+        <a:defRPr b="0" i="0" spc="0" sz="1400" u="none" cap="none" strike="noStrike">
           <a:solidFill>
             <a:srgbClr val="000000"/>
           </a:solidFill>
@@ -10650,7 +10531,7 @@
           <a:srgbClr val="000000"/>
         </a:buClr>
         <a:buFont typeface="Arial"/>
-        <a:defRPr b="0" i="0" sz="1400" u="none" cap="none" strike="noStrike">
+        <a:defRPr b="0" i="0" spc="0" sz="1400" u="none" cap="none" strike="noStrike">
           <a:solidFill>
             <a:srgbClr val="000000"/>
           </a:solidFill>
@@ -10674,7 +10555,7 @@
           <a:srgbClr val="000000"/>
         </a:buClr>
         <a:buFont typeface="Arial"/>
-        <a:defRPr b="0" i="0" sz="1400" u="none" cap="none" strike="noStrike">
+        <a:defRPr b="0" i="0" spc="0" sz="1400" u="none" cap="none" strike="noStrike">
           <a:solidFill>
             <a:srgbClr val="000000"/>
           </a:solidFill>
@@ -10698,7 +10579,7 @@
           <a:srgbClr val="000000"/>
         </a:buClr>
         <a:buFont typeface="Arial"/>
-        <a:defRPr b="0" i="0" sz="1400" u="none" cap="none" strike="noStrike">
+        <a:defRPr b="0" i="0" spc="0" sz="1400" u="none" cap="none" strike="noStrike">
           <a:solidFill>
             <a:srgbClr val="000000"/>
           </a:solidFill>
@@ -10722,7 +10603,7 @@
           <a:srgbClr val="000000"/>
         </a:buClr>
         <a:buFont typeface="Arial"/>
-        <a:defRPr b="0" i="0" sz="1400" u="none" cap="none" strike="noStrike">
+        <a:defRPr b="0" i="0" spc="0" sz="1400" u="none" cap="none" strike="noStrike">
           <a:solidFill>
             <a:srgbClr val="000000"/>
           </a:solidFill>
@@ -10759,7 +10640,7 @@
           <a:srgbClr val="000000"/>
         </a:buClr>
         <a:buFont typeface="Arial"/>
-        <a:defRPr b="0" i="0" sz="1400" u="none" cap="none" strike="noStrike">
+        <a:defRPr b="0" i="0" spc="0" sz="1400" u="none" cap="none" strike="noStrike">
           <a:solidFill>
             <a:srgbClr val="000000"/>
           </a:solidFill>
@@ -10783,7 +10664,7 @@
           <a:srgbClr val="000000"/>
         </a:buClr>
         <a:buFont typeface="Arial"/>
-        <a:defRPr b="0" i="0" sz="1400" u="none" cap="none" strike="noStrike">
+        <a:defRPr b="0" i="0" spc="0" sz="1400" u="none" cap="none" strike="noStrike">
           <a:solidFill>
             <a:srgbClr val="000000"/>
           </a:solidFill>
@@ -10807,7 +10688,7 @@
           <a:srgbClr val="000000"/>
         </a:buClr>
         <a:buFont typeface="Arial"/>
-        <a:defRPr b="0" i="0" sz="1400" u="none" cap="none" strike="noStrike">
+        <a:defRPr b="0" i="0" spc="0" sz="1400" u="none" cap="none" strike="noStrike">
           <a:solidFill>
             <a:srgbClr val="000000"/>
           </a:solidFill>
@@ -10831,7 +10712,7 @@
           <a:srgbClr val="000000"/>
         </a:buClr>
         <a:buFont typeface="Arial"/>
-        <a:defRPr b="0" i="0" sz="1400" u="none" cap="none" strike="noStrike">
+        <a:defRPr b="0" i="0" spc="0" sz="1400" u="none" cap="none" strike="noStrike">
           <a:solidFill>
             <a:srgbClr val="000000"/>
           </a:solidFill>
@@ -10855,7 +10736,7 @@
           <a:srgbClr val="000000"/>
         </a:buClr>
         <a:buFont typeface="Arial"/>
-        <a:defRPr b="0" i="0" sz="1400" u="none" cap="none" strike="noStrike">
+        <a:defRPr b="0" i="0" spc="0" sz="1400" u="none" cap="none" strike="noStrike">
           <a:solidFill>
             <a:srgbClr val="000000"/>
           </a:solidFill>
@@ -10879,7 +10760,7 @@
           <a:srgbClr val="000000"/>
         </a:buClr>
         <a:buFont typeface="Arial"/>
-        <a:defRPr b="0" i="0" sz="1400" u="none" cap="none" strike="noStrike">
+        <a:defRPr b="0" i="0" spc="0" sz="1400" u="none" cap="none" strike="noStrike">
           <a:solidFill>
             <a:srgbClr val="000000"/>
           </a:solidFill>
@@ -10903,7 +10784,7 @@
           <a:srgbClr val="000000"/>
         </a:buClr>
         <a:buFont typeface="Arial"/>
-        <a:defRPr b="0" i="0" sz="1400" u="none" cap="none" strike="noStrike">
+        <a:defRPr b="0" i="0" spc="0" sz="1400" u="none" cap="none" strike="noStrike">
           <a:solidFill>
             <a:srgbClr val="000000"/>
           </a:solidFill>
@@ -10927,7 +10808,7 @@
           <a:srgbClr val="000000"/>
         </a:buClr>
         <a:buFont typeface="Arial"/>
-        <a:defRPr b="0" i="0" sz="1400" u="none" cap="none" strike="noStrike">
+        <a:defRPr b="0" i="0" spc="0" sz="1400" u="none" cap="none" strike="noStrike">
           <a:solidFill>
             <a:srgbClr val="000000"/>
           </a:solidFill>
@@ -10951,7 +10832,7 @@
           <a:srgbClr val="000000"/>
         </a:buClr>
         <a:buFont typeface="Arial"/>
-        <a:defRPr b="0" i="0" sz="1400" u="none" cap="none" strike="noStrike">
+        <a:defRPr b="0" i="0" spc="0" sz="1400" u="none" cap="none" strike="noStrike">
           <a:solidFill>
             <a:srgbClr val="000000"/>
           </a:solidFill>
@@ -10988,7 +10869,7 @@
           <a:srgbClr val="000000"/>
         </a:buClr>
         <a:buFont typeface="Arial"/>
-        <a:defRPr b="0" i="0" sz="1400" u="none" cap="none" strike="noStrike">
+        <a:defRPr b="0" i="0" spc="0" sz="1400" u="none" cap="none" strike="noStrike">
           <a:solidFill>
             <a:srgbClr val="000000"/>
           </a:solidFill>
@@ -11012,7 +10893,7 @@
           <a:srgbClr val="000000"/>
         </a:buClr>
         <a:buFont typeface="Arial"/>
-        <a:defRPr b="0" i="0" sz="1400" u="none" cap="none" strike="noStrike">
+        <a:defRPr b="0" i="0" spc="0" sz="1400" u="none" cap="none" strike="noStrike">
           <a:solidFill>
             <a:srgbClr val="000000"/>
           </a:solidFill>
@@ -11036,7 +10917,7 @@
           <a:srgbClr val="000000"/>
         </a:buClr>
         <a:buFont typeface="Arial"/>
-        <a:defRPr b="0" i="0" sz="1400" u="none" cap="none" strike="noStrike">
+        <a:defRPr b="0" i="0" spc="0" sz="1400" u="none" cap="none" strike="noStrike">
           <a:solidFill>
             <a:srgbClr val="000000"/>
           </a:solidFill>
@@ -11060,7 +10941,7 @@
           <a:srgbClr val="000000"/>
         </a:buClr>
         <a:buFont typeface="Arial"/>
-        <a:defRPr b="0" i="0" sz="1400" u="none" cap="none" strike="noStrike">
+        <a:defRPr b="0" i="0" spc="0" sz="1400" u="none" cap="none" strike="noStrike">
           <a:solidFill>
             <a:srgbClr val="000000"/>
           </a:solidFill>
@@ -11084,7 +10965,7 @@
           <a:srgbClr val="000000"/>
         </a:buClr>
         <a:buFont typeface="Arial"/>
-        <a:defRPr b="0" i="0" sz="1400" u="none" cap="none" strike="noStrike">
+        <a:defRPr b="0" i="0" spc="0" sz="1400" u="none" cap="none" strike="noStrike">
           <a:solidFill>
             <a:srgbClr val="000000"/>
           </a:solidFill>
@@ -11108,7 +10989,7 @@
           <a:srgbClr val="000000"/>
         </a:buClr>
         <a:buFont typeface="Arial"/>
-        <a:defRPr b="0" i="0" sz="1400" u="none" cap="none" strike="noStrike">
+        <a:defRPr b="0" i="0" spc="0" sz="1400" u="none" cap="none" strike="noStrike">
           <a:solidFill>
             <a:srgbClr val="000000"/>
           </a:solidFill>
@@ -11132,7 +11013,7 @@
           <a:srgbClr val="000000"/>
         </a:buClr>
         <a:buFont typeface="Arial"/>
-        <a:defRPr b="0" i="0" sz="1400" u="none" cap="none" strike="noStrike">
+        <a:defRPr b="0" i="0" spc="0" sz="1400" u="none" cap="none" strike="noStrike">
           <a:solidFill>
             <a:srgbClr val="000000"/>
           </a:solidFill>
@@ -11156,7 +11037,7 @@
           <a:srgbClr val="000000"/>
         </a:buClr>
         <a:buFont typeface="Arial"/>
-        <a:defRPr b="0" i="0" sz="1400" u="none" cap="none" strike="noStrike">
+        <a:defRPr b="0" i="0" spc="0" sz="1400" u="none" cap="none" strike="noStrike">
           <a:solidFill>
             <a:srgbClr val="000000"/>
           </a:solidFill>
@@ -11180,7 +11061,7 @@
           <a:srgbClr val="000000"/>
         </a:buClr>
         <a:buFont typeface="Arial"/>
-        <a:defRPr b="0" i="0" sz="1400" u="none" cap="none" strike="noStrike">
+        <a:defRPr b="0" i="0" spc="0" sz="1400" u="none" cap="none" strike="noStrike">
           <a:solidFill>
             <a:srgbClr val="000000"/>
           </a:solidFill>
@@ -11588,7 +11469,19 @@
                 <a:cs typeface="Calibri"/>
                 <a:sym typeface="Calibri"/>
               </a:rPr>
-              <a:t>· Laxmi Pesara · Gavino Vargas </a:t>
+              <a:t>· Laxmi Pesara · </a:t>
+            </a:r>
+            <a:r>
+              <a:rPr lang="en" sz="1100">
+                <a:solidFill>
+                  <a:srgbClr val="9FB8B6"/>
+                </a:solidFill>
+                <a:latin typeface="Calibri"/>
+                <a:ea typeface="Calibri"/>
+                <a:cs typeface="Calibri"/>
+                <a:sym typeface="Calibri"/>
+              </a:rPr>
+              <a:t>Amen Bush</a:t>
             </a:r>
             <a:endParaRPr sz="1100"/>
           </a:p>
@@ -11617,7 +11510,7 @@
                 <a:cs typeface="Calibri"/>
                 <a:sym typeface="Calibri"/>
               </a:rPr>
-              <a:t>· Ashton Moraes · Amen Bush</a:t>
+              <a:t>· Ashton Moraes </a:t>
             </a:r>
             <a:endParaRPr sz="1100">
               <a:solidFill>
@@ -11746,14 +11639,19 @@
   <p:cSld>
     <p:bg>
       <p:bgPr>
-        <a:solidFill>
-          <a:srgbClr val="0A3A42"/>
-        </a:solidFill>
+        <a:blipFill>
+          <a:blip r:embed="rId3">
+            <a:alphaModFix/>
+          </a:blip>
+          <a:stretch>
+            <a:fillRect/>
+          </a:stretch>
+        </a:blipFill>
       </p:bgPr>
     </p:bg>
     <p:spTree>
       <p:nvGrpSpPr>
-        <p:cNvPr id="205" name="Shape 205"/>
+        <p:cNvPr id="204" name="Shape 204"/>
         <p:cNvGrpSpPr/>
         <p:nvPr/>
       </p:nvGrpSpPr>
@@ -11767,14 +11665,14 @@
       </p:grpSpPr>
       <p:sp>
         <p:nvSpPr>
-          <p:cNvPr id="206" name="Google Shape;206;p24"/>
+          <p:cNvPr id="205" name="Google Shape;205;p24"/>
           <p:cNvSpPr/>
           <p:nvPr/>
         </p:nvSpPr>
         <p:spPr>
           <a:xfrm>
-            <a:off x="480060" y="342900"/>
-            <a:ext cx="7543800" cy="548640"/>
+            <a:off x="393310" y="256150"/>
+            <a:ext cx="7543800" cy="548700"/>
           </a:xfrm>
           <a:prstGeom prst="rect">
             <a:avLst/>
@@ -11798,7 +11696,7 @@
                 <a:spcPts val="0"/>
               </a:spcAft>
               <a:buClr>
-                <a:srgbClr val="FFFFFF"/>
+                <a:srgbClr val="1F2933"/>
               </a:buClr>
               <a:buSzPts val="3000"/>
               <a:buFont typeface="Cambria"/>
@@ -11807,16 +11705,69 @@
             <a:r>
               <a:rPr b="1" lang="en" sz="3000">
                 <a:solidFill>
-                  <a:srgbClr val="FFFFFF"/>
+                  <a:srgbClr val="1F2933"/>
                 </a:solidFill>
                 <a:latin typeface="Cambria"/>
                 <a:ea typeface="Cambria"/>
                 <a:cs typeface="Cambria"/>
                 <a:sym typeface="Cambria"/>
               </a:rPr>
-              <a:t>Live Demo</a:t>
+              <a:t>Results, In Plain Language</a:t>
             </a:r>
             <a:endParaRPr sz="3000">
+              <a:solidFill>
+                <a:schemeClr val="dk1"/>
+              </a:solidFill>
+              <a:latin typeface="Calibri"/>
+              <a:ea typeface="Calibri"/>
+              <a:cs typeface="Calibri"/>
+              <a:sym typeface="Calibri"/>
+            </a:endParaRPr>
+          </a:p>
+        </p:txBody>
+      </p:sp>
+      <p:sp>
+        <p:nvSpPr>
+          <p:cNvPr id="206" name="Google Shape;206;p24"/>
+          <p:cNvSpPr/>
+          <p:nvPr/>
+        </p:nvSpPr>
+        <p:spPr>
+          <a:xfrm>
+            <a:off x="480060" y="1028700"/>
+            <a:ext cx="4080510" cy="1697355"/>
+          </a:xfrm>
+          <a:prstGeom prst="roundRect">
+            <a:avLst>
+              <a:gd fmla="val 2449" name="adj"/>
+            </a:avLst>
+          </a:prstGeom>
+          <a:solidFill>
+            <a:srgbClr val="F4FAF9"/>
+          </a:solidFill>
+          <a:ln>
+            <a:noFill/>
+          </a:ln>
+        </p:spPr>
+        <p:txBody>
+          <a:bodyPr anchorCtr="0" anchor="t" bIns="34275" lIns="68575" spcFirstLastPara="1" rIns="68575" wrap="square" tIns="34275">
+            <a:noAutofit/>
+          </a:bodyPr>
+          <a:lstStyle/>
+          <a:p>
+            <a:pPr indent="0" lvl="0" marL="0" marR="0" rtl="0" algn="l">
+              <a:spcBef>
+                <a:spcPts val="0"/>
+              </a:spcBef>
+              <a:spcAft>
+                <a:spcPts val="0"/>
+              </a:spcAft>
+              <a:buNone/>
+            </a:pPr>
+            <a:r>
+              <a:t/>
+            </a:r>
+            <a:endParaRPr sz="1400">
               <a:solidFill>
                 <a:schemeClr val="dk1"/>
               </a:solidFill>
@@ -11836,8 +11787,8 @@
         </p:nvSpPr>
         <p:spPr>
           <a:xfrm>
-            <a:off x="480060" y="925830"/>
-            <a:ext cx="7543800" cy="411480"/>
+            <a:off x="685800" y="1131570"/>
+            <a:ext cx="3669030" cy="308610"/>
           </a:xfrm>
           <a:prstGeom prst="rect">
             <a:avLst/>
@@ -11861,25 +11812,25 @@
                 <a:spcPts val="0"/>
               </a:spcAft>
               <a:buClr>
-                <a:srgbClr val="02C39A"/>
+                <a:srgbClr val="00A896"/>
               </a:buClr>
-              <a:buSzPts val="1800"/>
+              <a:buSzPts val="1200"/>
               <a:buFont typeface="Calibri"/>
               <a:buNone/>
             </a:pPr>
             <a:r>
-              <a:rPr b="1" lang="en" sz="1800">
-                <a:solidFill>
-                  <a:srgbClr val="02C39A"/>
+              <a:rPr b="1" lang="en" sz="1200">
+                <a:solidFill>
+                  <a:srgbClr val="00A896"/>
                 </a:solidFill>
                 <a:latin typeface="Calibri"/>
                 <a:ea typeface="Calibri"/>
                 <a:cs typeface="Calibri"/>
                 <a:sym typeface="Calibri"/>
               </a:rPr>
-              <a:t>accessmap-13a.streamlit.app</a:t>
-            </a:r>
-            <a:endParaRPr sz="1800">
+              <a:t>What were the results?</a:t>
+            </a:r>
+            <a:endParaRPr sz="1200">
               <a:solidFill>
                 <a:schemeClr val="dk1"/>
               </a:solidFill>
@@ -11899,17 +11850,13 @@
         </p:nvSpPr>
         <p:spPr>
           <a:xfrm>
-            <a:off x="480060" y="1577340"/>
-            <a:ext cx="2674620" cy="1988820"/>
-          </a:xfrm>
-          <a:prstGeom prst="roundRect">
-            <a:avLst>
-              <a:gd fmla="val 4138" name="adj"/>
-            </a:avLst>
+            <a:off x="685800" y="1474470"/>
+            <a:ext cx="3669030" cy="1148715"/>
+          </a:xfrm>
+          <a:prstGeom prst="rect">
+            <a:avLst/>
           </a:prstGeom>
-          <a:solidFill>
-            <a:srgbClr val="FFFFFF"/>
-          </a:solidFill>
+          <a:noFill/>
           <a:ln>
             <a:noFill/>
           </a:ln>
@@ -11927,12 +11874,26 @@
               <a:spcAft>
                 <a:spcPts val="0"/>
               </a:spcAft>
-              <a:buNone/>
-            </a:pPr>
-            <a:r>
-              <a:t/>
-            </a:r>
-            <a:endParaRPr sz="1400">
+              <a:buClr>
+                <a:srgbClr val="1F2933"/>
+              </a:buClr>
+              <a:buSzPts val="1000"/>
+              <a:buFont typeface="Calibri"/>
+              <a:buNone/>
+            </a:pPr>
+            <a:r>
+              <a:rPr lang="en" sz="1000">
+                <a:solidFill>
+                  <a:srgbClr val="1F2933"/>
+                </a:solidFill>
+                <a:latin typeface="Calibri"/>
+                <a:ea typeface="Calibri"/>
+                <a:cs typeface="Calibri"/>
+                <a:sym typeface="Calibri"/>
+              </a:rPr>
+              <a:t>PMR (Amsterdam): 100% accuracy after adding curb height. Housing (US): 85.0% vs. an 85.3% majority baseline once state was removed  recall on bad sidewalks just 0.01. Address search: FAISS retrieval works and ships in the live app.</a:t>
+            </a:r>
+            <a:endParaRPr sz="1000">
               <a:solidFill>
                 <a:schemeClr val="dk1"/>
               </a:solidFill>
@@ -11952,11 +11913,13 @@
         </p:nvSpPr>
         <p:spPr>
           <a:xfrm>
-            <a:off x="685800" y="1783080"/>
-            <a:ext cx="480060" cy="480060"/>
-          </a:xfrm>
-          <a:prstGeom prst="ellipse">
-            <a:avLst/>
+            <a:off x="4766310" y="1028700"/>
+            <a:ext cx="4080510" cy="1697355"/>
+          </a:xfrm>
+          <a:prstGeom prst="roundRect">
+            <a:avLst>
+              <a:gd fmla="val 2449" name="adj"/>
+            </a:avLst>
           </a:prstGeom>
           <a:solidFill>
             <a:srgbClr val="F4FAF9"/>
@@ -11995,23 +11958,16 @@
           </a:p>
         </p:txBody>
       </p:sp>
-      <p:pic>
-        <p:nvPicPr>
-          <p:cNvPr descr="preencoded.png" id="210" name="Google Shape;210;p24"/>
-          <p:cNvPicPr preferRelativeResize="0"/>
+      <p:sp>
+        <p:nvSpPr>
+          <p:cNvPr id="210" name="Google Shape;210;p24"/>
+          <p:cNvSpPr/>
           <p:nvPr/>
-        </p:nvPicPr>
-        <p:blipFill rotWithShape="1">
-          <a:blip r:embed="rId3">
-            <a:alphaModFix/>
-          </a:blip>
-          <a:srcRect b="0" l="0" r="0" t="0"/>
-          <a:stretch/>
-        </p:blipFill>
-        <p:spPr>
-          <a:xfrm>
-            <a:off x="801014" y="1898294"/>
-            <a:ext cx="249632" cy="249631"/>
+        </p:nvSpPr>
+        <p:spPr>
+          <a:xfrm>
+            <a:off x="4972050" y="1131570"/>
+            <a:ext cx="3669030" cy="308610"/>
           </a:xfrm>
           <a:prstGeom prst="rect">
             <a:avLst/>
@@ -12021,7 +11977,50 @@
             <a:noFill/>
           </a:ln>
         </p:spPr>
-      </p:pic>
+        <p:txBody>
+          <a:bodyPr anchorCtr="0" anchor="ctr" bIns="34275" lIns="68575" spcFirstLastPara="1" rIns="68575" wrap="square" tIns="34275">
+            <a:noAutofit/>
+          </a:bodyPr>
+          <a:lstStyle/>
+          <a:p>
+            <a:pPr indent="0" lvl="0" marL="0" marR="0" rtl="0" algn="l">
+              <a:spcBef>
+                <a:spcPts val="0"/>
+              </a:spcBef>
+              <a:spcAft>
+                <a:spcPts val="0"/>
+              </a:spcAft>
+              <a:buClr>
+                <a:srgbClr val="00A896"/>
+              </a:buClr>
+              <a:buSzPts val="1200"/>
+              <a:buFont typeface="Calibri"/>
+              <a:buNone/>
+            </a:pPr>
+            <a:r>
+              <a:rPr b="1" lang="en" sz="1200">
+                <a:solidFill>
+                  <a:srgbClr val="00A896"/>
+                </a:solidFill>
+                <a:latin typeface="Calibri"/>
+                <a:ea typeface="Calibri"/>
+                <a:cs typeface="Calibri"/>
+                <a:sym typeface="Calibri"/>
+              </a:rPr>
+              <a:t>What do the results mean?</a:t>
+            </a:r>
+            <a:endParaRPr sz="1200">
+              <a:solidFill>
+                <a:schemeClr val="dk1"/>
+              </a:solidFill>
+              <a:latin typeface="Calibri"/>
+              <a:ea typeface="Calibri"/>
+              <a:cs typeface="Calibri"/>
+              <a:sym typeface="Calibri"/>
+            </a:endParaRPr>
+          </a:p>
+        </p:txBody>
+      </p:sp>
       <p:sp>
         <p:nvSpPr>
           <p:cNvPr id="211" name="Google Shape;211;p24"/>
@@ -12030,8 +12029,8 @@
         </p:nvSpPr>
         <p:spPr>
           <a:xfrm>
-            <a:off x="1268730" y="1817370"/>
-            <a:ext cx="1851660" cy="411480"/>
+            <a:off x="4972050" y="1474470"/>
+            <a:ext cx="3669030" cy="1148715"/>
           </a:xfrm>
           <a:prstGeom prst="rect">
             <a:avLst/>
@@ -12042,7 +12041,7 @@
           </a:ln>
         </p:spPr>
         <p:txBody>
-          <a:bodyPr anchorCtr="0" anchor="ctr" bIns="34275" lIns="68575" spcFirstLastPara="1" rIns="68575" wrap="square" tIns="34275">
+          <a:bodyPr anchorCtr="0" anchor="t" bIns="34275" lIns="68575" spcFirstLastPara="1" rIns="68575" wrap="square" tIns="34275">
             <a:noAutofit/>
           </a:bodyPr>
           <a:lstStyle/>
@@ -12055,25 +12054,25 @@
                 <a:spcPts val="0"/>
               </a:spcAft>
               <a:buClr>
-                <a:srgbClr val="028090"/>
+                <a:srgbClr val="1F2933"/>
               </a:buClr>
-              <a:buSzPts val="1200"/>
+              <a:buSzPts val="1000"/>
               <a:buFont typeface="Calibri"/>
               <a:buNone/>
             </a:pPr>
             <a:r>
-              <a:rPr b="1" lang="en" sz="1200">
-                <a:solidFill>
-                  <a:srgbClr val="028090"/>
+              <a:rPr lang="en" sz="1000">
+                <a:solidFill>
+                  <a:srgbClr val="1F2933"/>
                 </a:solidFill>
                 <a:latin typeface="Calibri"/>
                 <a:ea typeface="Calibri"/>
                 <a:cs typeface="Calibri"/>
                 <a:sym typeface="Calibri"/>
               </a:rPr>
-              <a:t>Sidewalk Checker</a:t>
-            </a:r>
-            <a:endParaRPr sz="1200">
+              <a:t>The PMR score means the model consistently recovers the width + curb rule we wrote,  proof the pipeline works, not superhuman skill. The Housing tie with the baseline is an honest null result: house-level features alone can’t predict sidewalk condition.</a:t>
+            </a:r>
+            <a:endParaRPr sz="1000">
               <a:solidFill>
                 <a:schemeClr val="dk1"/>
               </a:solidFill>
@@ -12093,19 +12092,23 @@
         </p:nvSpPr>
         <p:spPr>
           <a:xfrm>
-            <a:off x="685800" y="2366010"/>
-            <a:ext cx="2263140" cy="1097280"/>
-          </a:xfrm>
-          <a:prstGeom prst="rect">
-            <a:avLst/>
+            <a:off x="480060" y="2897505"/>
+            <a:ext cx="4080510" cy="1697355"/>
+          </a:xfrm>
+          <a:prstGeom prst="roundRect">
+            <a:avLst>
+              <a:gd fmla="val 2449" name="adj"/>
+            </a:avLst>
           </a:prstGeom>
-          <a:noFill/>
+          <a:solidFill>
+            <a:srgbClr val="F4FAF9"/>
+          </a:solidFill>
           <a:ln>
             <a:noFill/>
           </a:ln>
         </p:spPr>
         <p:txBody>
-          <a:bodyPr anchorCtr="0" anchor="ctr" bIns="34275" lIns="68575" spcFirstLastPara="1" rIns="68575" wrap="square" tIns="34275">
+          <a:bodyPr anchorCtr="0" anchor="t" bIns="34275" lIns="68575" spcFirstLastPara="1" rIns="68575" wrap="square" tIns="34275">
             <a:noAutofit/>
           </a:bodyPr>
           <a:lstStyle/>
@@ -12117,26 +12120,12 @@
               <a:spcAft>
                 <a:spcPts val="0"/>
               </a:spcAft>
-              <a:buClr>
-                <a:srgbClr val="1F2933"/>
-              </a:buClr>
-              <a:buSzPts val="900"/>
-              <a:buFont typeface="Calibri"/>
-              <a:buNone/>
-            </a:pPr>
-            <a:r>
-              <a:rPr lang="en" sz="900">
-                <a:solidFill>
-                  <a:srgbClr val="1F2933"/>
-                </a:solidFill>
-                <a:latin typeface="Calibri"/>
-                <a:ea typeface="Calibri"/>
-                <a:cs typeface="Calibri"/>
-                <a:sym typeface="Calibri"/>
-              </a:rPr>
-              <a:t>Enter width, curb height, crossing, length → accessible / not accessible + confidence</a:t>
-            </a:r>
-            <a:endParaRPr sz="900">
+              <a:buNone/>
+            </a:pPr>
+            <a:r>
+              <a:t/>
+            </a:r>
+            <a:endParaRPr sz="1400">
               <a:solidFill>
                 <a:schemeClr val="dk1"/>
               </a:solidFill>
@@ -12156,23 +12145,19 @@
         </p:nvSpPr>
         <p:spPr>
           <a:xfrm>
-            <a:off x="3326130" y="1577340"/>
-            <a:ext cx="2674620" cy="1988820"/>
-          </a:xfrm>
-          <a:prstGeom prst="roundRect">
-            <a:avLst>
-              <a:gd fmla="val 4138" name="adj"/>
-            </a:avLst>
+            <a:off x="685800" y="3000375"/>
+            <a:ext cx="3669030" cy="308610"/>
+          </a:xfrm>
+          <a:prstGeom prst="rect">
+            <a:avLst/>
           </a:prstGeom>
-          <a:solidFill>
-            <a:srgbClr val="FFFFFF"/>
-          </a:solidFill>
+          <a:noFill/>
           <a:ln>
             <a:noFill/>
           </a:ln>
         </p:spPr>
         <p:txBody>
-          <a:bodyPr anchorCtr="0" anchor="t" bIns="34275" lIns="68575" spcFirstLastPara="1" rIns="68575" wrap="square" tIns="34275">
+          <a:bodyPr anchorCtr="0" anchor="ctr" bIns="34275" lIns="68575" spcFirstLastPara="1" rIns="68575" wrap="square" tIns="34275">
             <a:noAutofit/>
           </a:bodyPr>
           <a:lstStyle/>
@@ -12184,12 +12169,26 @@
               <a:spcAft>
                 <a:spcPts val="0"/>
               </a:spcAft>
-              <a:buNone/>
-            </a:pPr>
-            <a:r>
-              <a:t/>
-            </a:r>
-            <a:endParaRPr sz="1400">
+              <a:buClr>
+                <a:srgbClr val="00A896"/>
+              </a:buClr>
+              <a:buSzPts val="1200"/>
+              <a:buFont typeface="Calibri"/>
+              <a:buNone/>
+            </a:pPr>
+            <a:r>
+              <a:rPr b="1" lang="en" sz="1200">
+                <a:solidFill>
+                  <a:srgbClr val="00A896"/>
+                </a:solidFill>
+                <a:latin typeface="Calibri"/>
+                <a:ea typeface="Calibri"/>
+                <a:cs typeface="Calibri"/>
+                <a:sym typeface="Calibri"/>
+              </a:rPr>
+              <a:t>How did we get them?</a:t>
+            </a:r>
+            <a:endParaRPr sz="1200">
               <a:solidFill>
                 <a:schemeClr val="dk1"/>
               </a:solidFill>
@@ -12209,11 +12208,76 @@
         </p:nvSpPr>
         <p:spPr>
           <a:xfrm>
-            <a:off x="3531870" y="1783080"/>
-            <a:ext cx="480060" cy="480060"/>
-          </a:xfrm>
-          <a:prstGeom prst="ellipse">
+            <a:off x="685800" y="3343275"/>
+            <a:ext cx="3669030" cy="1148715"/>
+          </a:xfrm>
+          <a:prstGeom prst="rect">
             <a:avLst/>
+          </a:prstGeom>
+          <a:noFill/>
+          <a:ln>
+            <a:noFill/>
+          </a:ln>
+        </p:spPr>
+        <p:txBody>
+          <a:bodyPr anchorCtr="0" anchor="t" bIns="34275" lIns="68575" spcFirstLastPara="1" rIns="68575" wrap="square" tIns="34275">
+            <a:noAutofit/>
+          </a:bodyPr>
+          <a:lstStyle/>
+          <a:p>
+            <a:pPr indent="0" lvl="0" marL="0" marR="0" rtl="0" algn="l">
+              <a:spcBef>
+                <a:spcPts val="0"/>
+              </a:spcBef>
+              <a:spcAft>
+                <a:spcPts val="0"/>
+              </a:spcAft>
+              <a:buClr>
+                <a:srgbClr val="1F2933"/>
+              </a:buClr>
+              <a:buSzPts val="1000"/>
+              <a:buFont typeface="Calibri"/>
+              <a:buNone/>
+            </a:pPr>
+            <a:r>
+              <a:rPr lang="en" sz="1000">
+                <a:solidFill>
+                  <a:srgbClr val="1F2933"/>
+                </a:solidFill>
+                <a:latin typeface="Calibri"/>
+                <a:ea typeface="Calibri"/>
+                <a:cs typeface="Calibri"/>
+                <a:sym typeface="Calibri"/>
+              </a:rPr>
+              <a:t>The same recipe on both datasets: clean, encode, train a Random Forest, score on a held-out 20% test set, then audit feature importance. That audit  not the accuracy score   is what exposed the state bias and the missing curb feature.</a:t>
+            </a:r>
+            <a:endParaRPr sz="1000">
+              <a:solidFill>
+                <a:schemeClr val="dk1"/>
+              </a:solidFill>
+              <a:latin typeface="Calibri"/>
+              <a:ea typeface="Calibri"/>
+              <a:cs typeface="Calibri"/>
+              <a:sym typeface="Calibri"/>
+            </a:endParaRPr>
+          </a:p>
+        </p:txBody>
+      </p:sp>
+      <p:sp>
+        <p:nvSpPr>
+          <p:cNvPr id="215" name="Google Shape;215;p24"/>
+          <p:cNvSpPr/>
+          <p:nvPr/>
+        </p:nvSpPr>
+        <p:spPr>
+          <a:xfrm>
+            <a:off x="4766310" y="2897505"/>
+            <a:ext cx="4080510" cy="1697355"/>
+          </a:xfrm>
+          <a:prstGeom prst="roundRect">
+            <a:avLst>
+              <a:gd fmla="val 2449" name="adj"/>
+            </a:avLst>
           </a:prstGeom>
           <a:solidFill>
             <a:srgbClr val="F4FAF9"/>
@@ -12252,23 +12316,16 @@
           </a:p>
         </p:txBody>
       </p:sp>
-      <p:pic>
-        <p:nvPicPr>
-          <p:cNvPr descr="preencoded.png" id="215" name="Google Shape;215;p24"/>
-          <p:cNvPicPr preferRelativeResize="0"/>
+      <p:sp>
+        <p:nvSpPr>
+          <p:cNvPr id="216" name="Google Shape;216;p24"/>
+          <p:cNvSpPr/>
           <p:nvPr/>
-        </p:nvPicPr>
-        <p:blipFill rotWithShape="1">
-          <a:blip r:embed="rId4">
-            <a:alphaModFix/>
-          </a:blip>
-          <a:srcRect b="0" l="0" r="0" t="0"/>
-          <a:stretch/>
-        </p:blipFill>
-        <p:spPr>
-          <a:xfrm>
-            <a:off x="3647084" y="1898294"/>
-            <a:ext cx="249632" cy="249631"/>
+        </p:nvSpPr>
+        <p:spPr>
+          <a:xfrm>
+            <a:off x="4972050" y="3000375"/>
+            <a:ext cx="3669030" cy="308610"/>
           </a:xfrm>
           <a:prstGeom prst="rect">
             <a:avLst/>
@@ -12278,26 +12335,6 @@
             <a:noFill/>
           </a:ln>
         </p:spPr>
-      </p:pic>
-      <p:sp>
-        <p:nvSpPr>
-          <p:cNvPr id="216" name="Google Shape;216;p24"/>
-          <p:cNvSpPr/>
-          <p:nvPr/>
-        </p:nvSpPr>
-        <p:spPr>
-          <a:xfrm>
-            <a:off x="4114800" y="1817370"/>
-            <a:ext cx="1851660" cy="411480"/>
-          </a:xfrm>
-          <a:prstGeom prst="rect">
-            <a:avLst/>
-          </a:prstGeom>
-          <a:noFill/>
-          <a:ln>
-            <a:noFill/>
-          </a:ln>
-        </p:spPr>
         <p:txBody>
           <a:bodyPr anchorCtr="0" anchor="ctr" bIns="34275" lIns="68575" spcFirstLastPara="1" rIns="68575" wrap="square" tIns="34275">
             <a:noAutofit/>
@@ -12312,7 +12349,7 @@
                 <a:spcPts val="0"/>
               </a:spcAft>
               <a:buClr>
-                <a:srgbClr val="028090"/>
+                <a:srgbClr val="00A896"/>
               </a:buClr>
               <a:buSzPts val="1200"/>
               <a:buFont typeface="Calibri"/>
@@ -12321,14 +12358,14 @@
             <a:r>
               <a:rPr b="1" lang="en" sz="1200">
                 <a:solidFill>
-                  <a:srgbClr val="028090"/>
+                  <a:srgbClr val="00A896"/>
                 </a:solidFill>
                 <a:latin typeface="Calibri"/>
                 <a:ea typeface="Calibri"/>
                 <a:cs typeface="Calibri"/>
                 <a:sym typeface="Calibri"/>
               </a:rPr>
-              <a:t>Address Search</a:t>
+              <a:t>How accurate are they?</a:t>
             </a:r>
             <a:endParaRPr sz="1200">
               <a:solidFill>
@@ -12350,8 +12387,8 @@
         </p:nvSpPr>
         <p:spPr>
           <a:xfrm>
-            <a:off x="3531870" y="2366010"/>
-            <a:ext cx="2263140" cy="1097280"/>
+            <a:off x="4972050" y="3343275"/>
+            <a:ext cx="3669030" cy="1148715"/>
           </a:xfrm>
           <a:prstGeom prst="rect">
             <a:avLst/>
@@ -12362,7 +12399,7 @@
           </a:ln>
         </p:spPr>
         <p:txBody>
-          <a:bodyPr anchorCtr="0" anchor="ctr" bIns="34275" lIns="68575" spcFirstLastPara="1" rIns="68575" wrap="square" tIns="34275">
+          <a:bodyPr anchorCtr="0" anchor="t" bIns="34275" lIns="68575" spcFirstLastPara="1" rIns="68575" wrap="square" tIns="34275">
             <a:noAutofit/>
           </a:bodyPr>
           <a:lstStyle/>
@@ -12377,12 +12414,12 @@
               <a:buClr>
                 <a:srgbClr val="1F2933"/>
               </a:buClr>
-              <a:buSzPts val="900"/>
+              <a:buSzPts val="1000"/>
               <a:buFont typeface="Calibri"/>
               <a:buNone/>
             </a:pPr>
             <a:r>
-              <a:rPr lang="en" sz="900">
+              <a:rPr lang="en" sz="1000">
                 <a:solidFill>
                   <a:srgbClr val="1F2933"/>
                 </a:solidFill>
@@ -12391,341 +12428,9 @@
                 <a:cs typeface="Calibri"/>
                 <a:sym typeface="Calibri"/>
               </a:rPr>
-              <a:t>Pick an address → FAISS returns similar addresses with sidewalk labels + distances</a:t>
-            </a:r>
-            <a:endParaRPr sz="900">
-              <a:solidFill>
-                <a:schemeClr val="dk1"/>
-              </a:solidFill>
-              <a:latin typeface="Calibri"/>
-              <a:ea typeface="Calibri"/>
-              <a:cs typeface="Calibri"/>
-              <a:sym typeface="Calibri"/>
-            </a:endParaRPr>
-          </a:p>
-        </p:txBody>
-      </p:sp>
-      <p:sp>
-        <p:nvSpPr>
-          <p:cNvPr id="218" name="Google Shape;218;p24"/>
-          <p:cNvSpPr/>
-          <p:nvPr/>
-        </p:nvSpPr>
-        <p:spPr>
-          <a:xfrm>
-            <a:off x="6172200" y="1577340"/>
-            <a:ext cx="2674620" cy="1988820"/>
-          </a:xfrm>
-          <a:prstGeom prst="roundRect">
-            <a:avLst>
-              <a:gd fmla="val 4138" name="adj"/>
-            </a:avLst>
-          </a:prstGeom>
-          <a:solidFill>
-            <a:srgbClr val="FFFFFF"/>
-          </a:solidFill>
-          <a:ln>
-            <a:noFill/>
-          </a:ln>
-        </p:spPr>
-        <p:txBody>
-          <a:bodyPr anchorCtr="0" anchor="t" bIns="34275" lIns="68575" spcFirstLastPara="1" rIns="68575" wrap="square" tIns="34275">
-            <a:noAutofit/>
-          </a:bodyPr>
-          <a:lstStyle/>
-          <a:p>
-            <a:pPr indent="0" lvl="0" marL="0" marR="0" rtl="0" algn="l">
-              <a:spcBef>
-                <a:spcPts val="0"/>
-              </a:spcBef>
-              <a:spcAft>
-                <a:spcPts val="0"/>
-              </a:spcAft>
-              <a:buNone/>
-            </a:pPr>
-            <a:r>
-              <a:t/>
-            </a:r>
-            <a:endParaRPr sz="1400">
-              <a:solidFill>
-                <a:schemeClr val="dk1"/>
-              </a:solidFill>
-              <a:latin typeface="Calibri"/>
-              <a:ea typeface="Calibri"/>
-              <a:cs typeface="Calibri"/>
-              <a:sym typeface="Calibri"/>
-            </a:endParaRPr>
-          </a:p>
-        </p:txBody>
-      </p:sp>
-      <p:sp>
-        <p:nvSpPr>
-          <p:cNvPr id="219" name="Google Shape;219;p24"/>
-          <p:cNvSpPr/>
-          <p:nvPr/>
-        </p:nvSpPr>
-        <p:spPr>
-          <a:xfrm>
-            <a:off x="6377940" y="1783080"/>
-            <a:ext cx="480060" cy="480060"/>
-          </a:xfrm>
-          <a:prstGeom prst="ellipse">
-            <a:avLst/>
-          </a:prstGeom>
-          <a:solidFill>
-            <a:srgbClr val="F4FAF9"/>
-          </a:solidFill>
-          <a:ln>
-            <a:noFill/>
-          </a:ln>
-        </p:spPr>
-        <p:txBody>
-          <a:bodyPr anchorCtr="0" anchor="t" bIns="34275" lIns="68575" spcFirstLastPara="1" rIns="68575" wrap="square" tIns="34275">
-            <a:noAutofit/>
-          </a:bodyPr>
-          <a:lstStyle/>
-          <a:p>
-            <a:pPr indent="0" lvl="0" marL="0" marR="0" rtl="0" algn="l">
-              <a:spcBef>
-                <a:spcPts val="0"/>
-              </a:spcBef>
-              <a:spcAft>
-                <a:spcPts val="0"/>
-              </a:spcAft>
-              <a:buNone/>
-            </a:pPr>
-            <a:r>
-              <a:t/>
-            </a:r>
-            <a:endParaRPr sz="1400">
-              <a:solidFill>
-                <a:schemeClr val="dk1"/>
-              </a:solidFill>
-              <a:latin typeface="Calibri"/>
-              <a:ea typeface="Calibri"/>
-              <a:cs typeface="Calibri"/>
-              <a:sym typeface="Calibri"/>
-            </a:endParaRPr>
-          </a:p>
-        </p:txBody>
-      </p:sp>
-      <p:pic>
-        <p:nvPicPr>
-          <p:cNvPr descr="preencoded.png" id="220" name="Google Shape;220;p24"/>
-          <p:cNvPicPr preferRelativeResize="0"/>
-          <p:nvPr/>
-        </p:nvPicPr>
-        <p:blipFill rotWithShape="1">
-          <a:blip r:embed="rId5">
-            <a:alphaModFix/>
-          </a:blip>
-          <a:srcRect b="0" l="0" r="0" t="0"/>
-          <a:stretch/>
-        </p:blipFill>
-        <p:spPr>
-          <a:xfrm>
-            <a:off x="6493154" y="1898294"/>
-            <a:ext cx="249632" cy="249631"/>
-          </a:xfrm>
-          <a:prstGeom prst="rect">
-            <a:avLst/>
-          </a:prstGeom>
-          <a:noFill/>
-          <a:ln>
-            <a:noFill/>
-          </a:ln>
-        </p:spPr>
-      </p:pic>
-      <p:sp>
-        <p:nvSpPr>
-          <p:cNvPr id="221" name="Google Shape;221;p24"/>
-          <p:cNvSpPr/>
-          <p:nvPr/>
-        </p:nvSpPr>
-        <p:spPr>
-          <a:xfrm>
-            <a:off x="6960870" y="1817370"/>
-            <a:ext cx="1851660" cy="411480"/>
-          </a:xfrm>
-          <a:prstGeom prst="rect">
-            <a:avLst/>
-          </a:prstGeom>
-          <a:noFill/>
-          <a:ln>
-            <a:noFill/>
-          </a:ln>
-        </p:spPr>
-        <p:txBody>
-          <a:bodyPr anchorCtr="0" anchor="ctr" bIns="34275" lIns="68575" spcFirstLastPara="1" rIns="68575" wrap="square" tIns="34275">
-            <a:noAutofit/>
-          </a:bodyPr>
-          <a:lstStyle/>
-          <a:p>
-            <a:pPr indent="0" lvl="0" marL="0" marR="0" rtl="0" algn="l">
-              <a:spcBef>
-                <a:spcPts val="0"/>
-              </a:spcBef>
-              <a:spcAft>
-                <a:spcPts val="0"/>
-              </a:spcAft>
-              <a:buClr>
-                <a:srgbClr val="028090"/>
-              </a:buClr>
-              <a:buSzPts val="1200"/>
-              <a:buFont typeface="Calibri"/>
-              <a:buNone/>
-            </a:pPr>
-            <a:r>
-              <a:rPr b="1" lang="en" sz="1200">
-                <a:solidFill>
-                  <a:srgbClr val="028090"/>
-                </a:solidFill>
-                <a:latin typeface="Calibri"/>
-                <a:ea typeface="Calibri"/>
-                <a:cs typeface="Calibri"/>
-                <a:sym typeface="Calibri"/>
-              </a:rPr>
-              <a:t>About &amp; Limits</a:t>
-            </a:r>
-            <a:endParaRPr sz="1200">
-              <a:solidFill>
-                <a:schemeClr val="dk1"/>
-              </a:solidFill>
-              <a:latin typeface="Calibri"/>
-              <a:ea typeface="Calibri"/>
-              <a:cs typeface="Calibri"/>
-              <a:sym typeface="Calibri"/>
-            </a:endParaRPr>
-          </a:p>
-        </p:txBody>
-      </p:sp>
-      <p:sp>
-        <p:nvSpPr>
-          <p:cNvPr id="222" name="Google Shape;222;p24"/>
-          <p:cNvSpPr/>
-          <p:nvPr/>
-        </p:nvSpPr>
-        <p:spPr>
-          <a:xfrm>
-            <a:off x="6377940" y="2366010"/>
-            <a:ext cx="2263140" cy="1097280"/>
-          </a:xfrm>
-          <a:prstGeom prst="rect">
-            <a:avLst/>
-          </a:prstGeom>
-          <a:noFill/>
-          <a:ln>
-            <a:noFill/>
-          </a:ln>
-        </p:spPr>
-        <p:txBody>
-          <a:bodyPr anchorCtr="0" anchor="ctr" bIns="34275" lIns="68575" spcFirstLastPara="1" rIns="68575" wrap="square" tIns="34275">
-            <a:noAutofit/>
-          </a:bodyPr>
-          <a:lstStyle/>
-          <a:p>
-            <a:pPr indent="0" lvl="0" marL="0" marR="0" rtl="0" algn="l">
-              <a:spcBef>
-                <a:spcPts val="0"/>
-              </a:spcBef>
-              <a:spcAft>
-                <a:spcPts val="0"/>
-              </a:spcAft>
-              <a:buClr>
-                <a:srgbClr val="1F2933"/>
-              </a:buClr>
-              <a:buSzPts val="900"/>
-              <a:buFont typeface="Calibri"/>
-              <a:buNone/>
-            </a:pPr>
-            <a:r>
-              <a:rPr lang="en" sz="900">
-                <a:solidFill>
-                  <a:srgbClr val="1F2933"/>
-                </a:solidFill>
-                <a:latin typeface="Calibri"/>
-                <a:ea typeface="Calibri"/>
-                <a:cs typeface="Calibri"/>
-                <a:sym typeface="Calibri"/>
-              </a:rPr>
-              <a:t>What the app does, what it refuses to do, and why — honesty as a feature</a:t>
-            </a:r>
-            <a:endParaRPr sz="900">
-              <a:solidFill>
-                <a:schemeClr val="dk1"/>
-              </a:solidFill>
-              <a:latin typeface="Calibri"/>
-              <a:ea typeface="Calibri"/>
-              <a:cs typeface="Calibri"/>
-              <a:sym typeface="Calibri"/>
-            </a:endParaRPr>
-          </a:p>
-        </p:txBody>
-      </p:sp>
-      <p:sp>
-        <p:nvSpPr>
-          <p:cNvPr id="223" name="Google Shape;223;p24"/>
-          <p:cNvSpPr/>
-          <p:nvPr/>
-        </p:nvSpPr>
-        <p:spPr>
-          <a:xfrm>
-            <a:off x="480060" y="3806190"/>
-            <a:ext cx="8298180" cy="822960"/>
-          </a:xfrm>
-          <a:prstGeom prst="rect">
-            <a:avLst/>
-          </a:prstGeom>
-          <a:noFill/>
-          <a:ln>
-            <a:noFill/>
-          </a:ln>
-        </p:spPr>
-        <p:txBody>
-          <a:bodyPr anchorCtr="0" anchor="ctr" bIns="34275" lIns="68575" spcFirstLastPara="1" rIns="68575" wrap="square" tIns="34275">
-            <a:noAutofit/>
-          </a:bodyPr>
-          <a:lstStyle/>
-          <a:p>
-            <a:pPr indent="0" lvl="0" marL="0" marR="0" rtl="0" algn="l">
-              <a:spcBef>
-                <a:spcPts val="0"/>
-              </a:spcBef>
-              <a:spcAft>
-                <a:spcPts val="0"/>
-              </a:spcAft>
-              <a:buClr>
-                <a:srgbClr val="02C39A"/>
-              </a:buClr>
-              <a:buSzPts val="1100"/>
-              <a:buFont typeface="Calibri"/>
-              <a:buNone/>
-            </a:pPr>
-            <a:r>
-              <a:rPr b="1" lang="en" sz="1100">
-                <a:solidFill>
-                  <a:srgbClr val="02C39A"/>
-                </a:solidFill>
-                <a:latin typeface="Calibri"/>
-                <a:ea typeface="Calibri"/>
-                <a:cs typeface="Calibri"/>
-                <a:sym typeface="Calibri"/>
-              </a:rPr>
-              <a:t>One deployment decision we're proud of: </a:t>
-            </a:r>
-            <a:r>
-              <a:rPr lang="en" sz="1100">
-                <a:solidFill>
-                  <a:srgbClr val="E6F2F1"/>
-                </a:solidFill>
-                <a:latin typeface="Calibri"/>
-                <a:ea typeface="Calibri"/>
-                <a:cs typeface="Calibri"/>
-                <a:sym typeface="Calibri"/>
-              </a:rPr>
-              <a:t>the app does NOT predict sidewalk condition for US addresses. We tested that model — it has no signal — so the app reports the real crowd label instead of pretending to predict.</a:t>
-            </a:r>
-            <a:endParaRPr sz="1100">
+              <a:t>PMR: 100% on 14,455 held-out segments, but scored against our own rule-based label; only 50 verified labels exist, too few to test on. Housing: no better than always guessing “ok.” We trust the audited pipeline more than any single number.</a:t>
+            </a:r>
+            <a:endParaRPr sz="1000">
               <a:solidFill>
                 <a:schemeClr val="dk1"/>
               </a:solidFill>
@@ -12762,7 +12467,7 @@
     </p:bg>
     <p:spTree>
       <p:nvGrpSpPr>
-        <p:cNvPr id="227" name="Shape 227"/>
+        <p:cNvPr id="222" name="Shape 222"/>
         <p:cNvGrpSpPr/>
         <p:nvPr/>
       </p:nvGrpSpPr>
@@ -12776,14 +12481,72 @@
       </p:grpSpPr>
       <p:sp>
         <p:nvSpPr>
-          <p:cNvPr id="228" name="Google Shape;228;p25"/>
+          <p:cNvPr id="223" name="Google Shape;223;p25"/>
           <p:cNvSpPr/>
           <p:nvPr/>
         </p:nvSpPr>
         <p:spPr>
           <a:xfrm>
-            <a:off x="393310" y="256150"/>
-            <a:ext cx="7543800" cy="548700"/>
+            <a:off x="685800" y="1783080"/>
+            <a:ext cx="480060" cy="480060"/>
+          </a:xfrm>
+          <a:prstGeom prst="ellipse">
+            <a:avLst/>
+          </a:prstGeom>
+          <a:solidFill>
+            <a:srgbClr val="F4FAF9"/>
+          </a:solidFill>
+          <a:ln>
+            <a:noFill/>
+          </a:ln>
+        </p:spPr>
+        <p:txBody>
+          <a:bodyPr anchorCtr="0" anchor="t" bIns="34275" lIns="68575" spcFirstLastPara="1" rIns="68575" wrap="square" tIns="34275">
+            <a:noAutofit/>
+          </a:bodyPr>
+          <a:lstStyle/>
+          <a:p>
+            <a:pPr indent="0" lvl="0" marL="0" marR="0" rtl="0" algn="l">
+              <a:spcBef>
+                <a:spcPts val="0"/>
+              </a:spcBef>
+              <a:spcAft>
+                <a:spcPts val="0"/>
+              </a:spcAft>
+              <a:buNone/>
+            </a:pPr>
+            <a:r>
+              <a:t/>
+            </a:r>
+            <a:endParaRPr sz="1400">
+              <a:solidFill>
+                <a:schemeClr val="dk1"/>
+              </a:solidFill>
+              <a:latin typeface="Calibri"/>
+              <a:ea typeface="Calibri"/>
+              <a:cs typeface="Calibri"/>
+              <a:sym typeface="Calibri"/>
+            </a:endParaRPr>
+          </a:p>
+        </p:txBody>
+      </p:sp>
+      <p:pic>
+        <p:nvPicPr>
+          <p:cNvPr descr="preencoded.png" id="224" name="Google Shape;224;p25"/>
+          <p:cNvPicPr preferRelativeResize="0"/>
+          <p:nvPr/>
+        </p:nvPicPr>
+        <p:blipFill rotWithShape="1">
+          <a:blip r:embed="rId4">
+            <a:alphaModFix/>
+          </a:blip>
+          <a:srcRect b="0" l="0" r="0" t="0"/>
+          <a:stretch/>
+        </p:blipFill>
+        <p:spPr>
+          <a:xfrm>
+            <a:off x="3647084" y="1898294"/>
+            <a:ext cx="249632" cy="249631"/>
           </a:xfrm>
           <a:prstGeom prst="rect">
             <a:avLst/>
@@ -12793,766 +12556,967 @@
             <a:noFill/>
           </a:ln>
         </p:spPr>
-        <p:txBody>
-          <a:bodyPr anchorCtr="0" anchor="ctr" bIns="34275" lIns="68575" spcFirstLastPara="1" rIns="68575" wrap="square" tIns="34275">
-            <a:noAutofit/>
-          </a:bodyPr>
-          <a:lstStyle/>
-          <a:p>
-            <a:pPr indent="0" lvl="0" marL="0" marR="0" rtl="0" algn="l">
-              <a:spcBef>
-                <a:spcPts val="0"/>
-              </a:spcBef>
-              <a:spcAft>
-                <a:spcPts val="0"/>
-              </a:spcAft>
-              <a:buClr>
-                <a:srgbClr val="1F2933"/>
-              </a:buClr>
-              <a:buSzPts val="3000"/>
-              <a:buFont typeface="Cambria"/>
-              <a:buNone/>
-            </a:pPr>
-            <a:r>
-              <a:rPr b="1" lang="en" sz="3000">
-                <a:solidFill>
-                  <a:srgbClr val="1F2933"/>
-                </a:solidFill>
-                <a:latin typeface="Cambria"/>
-                <a:ea typeface="Cambria"/>
-                <a:cs typeface="Cambria"/>
-                <a:sym typeface="Cambria"/>
-              </a:rPr>
-              <a:t>Results, In Plain Language</a:t>
-            </a:r>
-            <a:endParaRPr sz="3000">
-              <a:solidFill>
-                <a:schemeClr val="dk1"/>
-              </a:solidFill>
-              <a:latin typeface="Calibri"/>
-              <a:ea typeface="Calibri"/>
-              <a:cs typeface="Calibri"/>
-              <a:sym typeface="Calibri"/>
-            </a:endParaRPr>
-          </a:p>
-        </p:txBody>
-      </p:sp>
-      <p:sp>
-        <p:nvSpPr>
-          <p:cNvPr id="229" name="Google Shape;229;p25"/>
-          <p:cNvSpPr/>
+      </p:pic>
+      <p:grpSp>
+        <p:nvGrpSpPr>
+          <p:cNvPr id="225" name="Google Shape;225;p25"/>
+          <p:cNvGrpSpPr/>
           <p:nvPr/>
-        </p:nvSpPr>
-        <p:spPr>
-          <a:xfrm>
-            <a:off x="480060" y="1028700"/>
-            <a:ext cx="4080510" cy="1697355"/>
-          </a:xfrm>
-          <a:prstGeom prst="roundRect">
-            <a:avLst>
-              <a:gd fmla="val 2449" name="adj"/>
-            </a:avLst>
-          </a:prstGeom>
-          <a:solidFill>
-            <a:srgbClr val="F4FAF9"/>
-          </a:solidFill>
-          <a:ln>
-            <a:noFill/>
-          </a:ln>
-        </p:spPr>
-        <p:txBody>
-          <a:bodyPr anchorCtr="0" anchor="t" bIns="34275" lIns="68575" spcFirstLastPara="1" rIns="68575" wrap="square" tIns="34275">
-            <a:noAutofit/>
-          </a:bodyPr>
-          <a:lstStyle/>
-          <a:p>
-            <a:pPr indent="0" lvl="0" marL="0" marR="0" rtl="0" algn="l">
-              <a:spcBef>
-                <a:spcPts val="0"/>
-              </a:spcBef>
-              <a:spcAft>
-                <a:spcPts val="0"/>
-              </a:spcAft>
-              <a:buNone/>
-            </a:pPr>
-            <a:r>
-              <a:t/>
-            </a:r>
-            <a:endParaRPr sz="1400">
-              <a:solidFill>
-                <a:schemeClr val="dk1"/>
-              </a:solidFill>
-              <a:latin typeface="Calibri"/>
-              <a:ea typeface="Calibri"/>
-              <a:cs typeface="Calibri"/>
-              <a:sym typeface="Calibri"/>
-            </a:endParaRPr>
-          </a:p>
-        </p:txBody>
-      </p:sp>
-      <p:sp>
-        <p:nvSpPr>
-          <p:cNvPr id="230" name="Google Shape;230;p25"/>
-          <p:cNvSpPr/>
-          <p:nvPr/>
-        </p:nvSpPr>
-        <p:spPr>
-          <a:xfrm>
-            <a:off x="685800" y="1131570"/>
-            <a:ext cx="3669030" cy="308610"/>
-          </a:xfrm>
-          <a:prstGeom prst="rect">
-            <a:avLst/>
-          </a:prstGeom>
-          <a:noFill/>
-          <a:ln>
-            <a:noFill/>
-          </a:ln>
-        </p:spPr>
-        <p:txBody>
-          <a:bodyPr anchorCtr="0" anchor="ctr" bIns="34275" lIns="68575" spcFirstLastPara="1" rIns="68575" wrap="square" tIns="34275">
-            <a:noAutofit/>
-          </a:bodyPr>
-          <a:lstStyle/>
-          <a:p>
-            <a:pPr indent="0" lvl="0" marL="0" marR="0" rtl="0" algn="l">
-              <a:spcBef>
-                <a:spcPts val="0"/>
-              </a:spcBef>
-              <a:spcAft>
-                <a:spcPts val="0"/>
-              </a:spcAft>
-              <a:buClr>
-                <a:srgbClr val="00A896"/>
-              </a:buClr>
-              <a:buSzPts val="1200"/>
-              <a:buFont typeface="Calibri"/>
-              <a:buNone/>
-            </a:pPr>
-            <a:r>
-              <a:rPr b="1" lang="en" sz="1200">
-                <a:solidFill>
-                  <a:srgbClr val="00A896"/>
+        </p:nvGrpSpPr>
+        <p:grpSpPr>
+          <a:xfrm>
+            <a:off x="3326130" y="1577340"/>
+            <a:ext cx="2674620" cy="1988820"/>
+            <a:chOff x="3326130" y="1577340"/>
+            <a:chExt cx="2674620" cy="1988820"/>
+          </a:xfrm>
+        </p:grpSpPr>
+        <p:sp>
+          <p:nvSpPr>
+            <p:cNvPr id="226" name="Google Shape;226;p25"/>
+            <p:cNvSpPr/>
+            <p:nvPr/>
+          </p:nvSpPr>
+          <p:spPr>
+            <a:xfrm>
+              <a:off x="3326130" y="1577340"/>
+              <a:ext cx="2674620" cy="1988820"/>
+            </a:xfrm>
+            <a:prstGeom prst="roundRect">
+              <a:avLst>
+                <a:gd fmla="val 4138" name="adj"/>
+              </a:avLst>
+            </a:prstGeom>
+            <a:solidFill>
+              <a:srgbClr val="FFFFFF"/>
+            </a:solidFill>
+            <a:ln>
+              <a:noFill/>
+            </a:ln>
+          </p:spPr>
+          <p:txBody>
+            <a:bodyPr anchorCtr="0" anchor="t" bIns="34275" lIns="68575" spcFirstLastPara="1" rIns="68575" wrap="square" tIns="34275">
+              <a:noAutofit/>
+            </a:bodyPr>
+            <a:lstStyle/>
+            <a:p>
+              <a:pPr indent="0" lvl="0" marL="0" marR="0" rtl="0" algn="l">
+                <a:spcBef>
+                  <a:spcPts val="0"/>
+                </a:spcBef>
+                <a:spcAft>
+                  <a:spcPts val="0"/>
+                </a:spcAft>
+                <a:buNone/>
+              </a:pPr>
+              <a:r>
+                <a:t/>
+              </a:r>
+              <a:endParaRPr sz="1400">
+                <a:solidFill>
+                  <a:schemeClr val="dk1"/>
                 </a:solidFill>
                 <a:latin typeface="Calibri"/>
                 <a:ea typeface="Calibri"/>
                 <a:cs typeface="Calibri"/>
                 <a:sym typeface="Calibri"/>
-              </a:rPr>
-              <a:t>What were the results?</a:t>
-            </a:r>
-            <a:endParaRPr sz="1200">
-              <a:solidFill>
-                <a:schemeClr val="dk1"/>
-              </a:solidFill>
-              <a:latin typeface="Calibri"/>
-              <a:ea typeface="Calibri"/>
-              <a:cs typeface="Calibri"/>
-              <a:sym typeface="Calibri"/>
-            </a:endParaRPr>
-          </a:p>
-        </p:txBody>
-      </p:sp>
-      <p:sp>
-        <p:nvSpPr>
-          <p:cNvPr id="231" name="Google Shape;231;p25"/>
-          <p:cNvSpPr/>
-          <p:nvPr/>
-        </p:nvSpPr>
-        <p:spPr>
-          <a:xfrm>
-            <a:off x="685800" y="1474470"/>
-            <a:ext cx="3669030" cy="1148715"/>
-          </a:xfrm>
-          <a:prstGeom prst="rect">
-            <a:avLst/>
-          </a:prstGeom>
-          <a:noFill/>
-          <a:ln>
-            <a:noFill/>
-          </a:ln>
-        </p:spPr>
-        <p:txBody>
-          <a:bodyPr anchorCtr="0" anchor="t" bIns="34275" lIns="68575" spcFirstLastPara="1" rIns="68575" wrap="square" tIns="34275">
-            <a:noAutofit/>
-          </a:bodyPr>
-          <a:lstStyle/>
-          <a:p>
-            <a:pPr indent="0" lvl="0" marL="0" marR="0" rtl="0" algn="l">
-              <a:spcBef>
-                <a:spcPts val="0"/>
-              </a:spcBef>
-              <a:spcAft>
-                <a:spcPts val="0"/>
-              </a:spcAft>
-              <a:buClr>
-                <a:srgbClr val="1F2933"/>
-              </a:buClr>
-              <a:buSzPts val="1000"/>
-              <a:buFont typeface="Calibri"/>
-              <a:buNone/>
-            </a:pPr>
-            <a:r>
-              <a:rPr lang="en" sz="1000">
-                <a:solidFill>
-                  <a:srgbClr val="1F2933"/>
+              </a:endParaRPr>
+            </a:p>
+          </p:txBody>
+        </p:sp>
+        <p:sp>
+          <p:nvSpPr>
+            <p:cNvPr id="227" name="Google Shape;227;p25"/>
+            <p:cNvSpPr/>
+            <p:nvPr/>
+          </p:nvSpPr>
+          <p:spPr>
+            <a:xfrm>
+              <a:off x="3531870" y="1783080"/>
+              <a:ext cx="480060" cy="480060"/>
+            </a:xfrm>
+            <a:prstGeom prst="ellipse">
+              <a:avLst/>
+            </a:prstGeom>
+            <a:solidFill>
+              <a:srgbClr val="F4FAF9"/>
+            </a:solidFill>
+            <a:ln>
+              <a:noFill/>
+            </a:ln>
+          </p:spPr>
+          <p:txBody>
+            <a:bodyPr anchorCtr="0" anchor="t" bIns="34275" lIns="68575" spcFirstLastPara="1" rIns="68575" wrap="square" tIns="34275">
+              <a:noAutofit/>
+            </a:bodyPr>
+            <a:lstStyle/>
+            <a:p>
+              <a:pPr indent="0" lvl="0" marL="0" marR="0" rtl="0" algn="l">
+                <a:spcBef>
+                  <a:spcPts val="0"/>
+                </a:spcBef>
+                <a:spcAft>
+                  <a:spcPts val="0"/>
+                </a:spcAft>
+                <a:buNone/>
+              </a:pPr>
+              <a:r>
+                <a:t/>
+              </a:r>
+              <a:endParaRPr sz="1400">
+                <a:solidFill>
+                  <a:schemeClr val="dk1"/>
                 </a:solidFill>
                 <a:latin typeface="Calibri"/>
                 <a:ea typeface="Calibri"/>
                 <a:cs typeface="Calibri"/>
                 <a:sym typeface="Calibri"/>
-              </a:rPr>
-              <a:t>PMR (Amsterdam): 100% accuracy after adding curb height. Housing (US): 85.0% vs. an 85.3% majority baseline once state was removed — recall on bad sidewalks just 0.01. Address search: FAISS retrieval works and ships in the live app.</a:t>
-            </a:r>
-            <a:endParaRPr sz="1000">
-              <a:solidFill>
-                <a:schemeClr val="dk1"/>
-              </a:solidFill>
-              <a:latin typeface="Calibri"/>
-              <a:ea typeface="Calibri"/>
-              <a:cs typeface="Calibri"/>
-              <a:sym typeface="Calibri"/>
-            </a:endParaRPr>
-          </a:p>
-        </p:txBody>
-      </p:sp>
-      <p:sp>
-        <p:nvSpPr>
-          <p:cNvPr id="232" name="Google Shape;232;p25"/>
-          <p:cNvSpPr/>
-          <p:nvPr/>
-        </p:nvSpPr>
-        <p:spPr>
-          <a:xfrm>
-            <a:off x="4766310" y="1028700"/>
-            <a:ext cx="4080510" cy="1697355"/>
-          </a:xfrm>
-          <a:prstGeom prst="roundRect">
-            <a:avLst>
-              <a:gd fmla="val 2449" name="adj"/>
-            </a:avLst>
-          </a:prstGeom>
-          <a:solidFill>
-            <a:srgbClr val="F4FAF9"/>
-          </a:solidFill>
-          <a:ln>
+              </a:endParaRPr>
+            </a:p>
+          </p:txBody>
+        </p:sp>
+        <p:sp>
+          <p:nvSpPr>
+            <p:cNvPr id="228" name="Google Shape;228;p25"/>
+            <p:cNvSpPr/>
+            <p:nvPr/>
+          </p:nvSpPr>
+          <p:spPr>
+            <a:xfrm>
+              <a:off x="4114800" y="1817370"/>
+              <a:ext cx="1851660" cy="411480"/>
+            </a:xfrm>
+            <a:prstGeom prst="rect">
+              <a:avLst/>
+            </a:prstGeom>
             <a:noFill/>
-          </a:ln>
-        </p:spPr>
-        <p:txBody>
-          <a:bodyPr anchorCtr="0" anchor="t" bIns="34275" lIns="68575" spcFirstLastPara="1" rIns="68575" wrap="square" tIns="34275">
-            <a:noAutofit/>
-          </a:bodyPr>
-          <a:lstStyle/>
-          <a:p>
-            <a:pPr indent="0" lvl="0" marL="0" marR="0" rtl="0" algn="l">
-              <a:spcBef>
-                <a:spcPts val="0"/>
-              </a:spcBef>
-              <a:spcAft>
-                <a:spcPts val="0"/>
-              </a:spcAft>
-              <a:buNone/>
-            </a:pPr>
-            <a:r>
-              <a:t/>
-            </a:r>
-            <a:endParaRPr sz="1400">
-              <a:solidFill>
-                <a:schemeClr val="dk1"/>
-              </a:solidFill>
-              <a:latin typeface="Calibri"/>
-              <a:ea typeface="Calibri"/>
-              <a:cs typeface="Calibri"/>
-              <a:sym typeface="Calibri"/>
-            </a:endParaRPr>
-          </a:p>
-        </p:txBody>
-      </p:sp>
-      <p:sp>
-        <p:nvSpPr>
-          <p:cNvPr id="233" name="Google Shape;233;p25"/>
-          <p:cNvSpPr/>
-          <p:nvPr/>
-        </p:nvSpPr>
-        <p:spPr>
-          <a:xfrm>
-            <a:off x="4972050" y="1131570"/>
-            <a:ext cx="3669030" cy="308610"/>
-          </a:xfrm>
-          <a:prstGeom prst="rect">
-            <a:avLst/>
-          </a:prstGeom>
-          <a:noFill/>
-          <a:ln>
-            <a:noFill/>
-          </a:ln>
-        </p:spPr>
-        <p:txBody>
-          <a:bodyPr anchorCtr="0" anchor="ctr" bIns="34275" lIns="68575" spcFirstLastPara="1" rIns="68575" wrap="square" tIns="34275">
-            <a:noAutofit/>
-          </a:bodyPr>
-          <a:lstStyle/>
-          <a:p>
-            <a:pPr indent="0" lvl="0" marL="0" marR="0" rtl="0" algn="l">
-              <a:spcBef>
-                <a:spcPts val="0"/>
-              </a:spcBef>
-              <a:spcAft>
-                <a:spcPts val="0"/>
-              </a:spcAft>
-              <a:buClr>
-                <a:srgbClr val="00A896"/>
-              </a:buClr>
-              <a:buSzPts val="1200"/>
-              <a:buFont typeface="Calibri"/>
-              <a:buNone/>
-            </a:pPr>
-            <a:r>
-              <a:rPr b="1" lang="en" sz="1200">
-                <a:solidFill>
-                  <a:srgbClr val="00A896"/>
+            <a:ln>
+              <a:noFill/>
+            </a:ln>
+          </p:spPr>
+          <p:txBody>
+            <a:bodyPr anchorCtr="0" anchor="ctr" bIns="34275" lIns="68575" spcFirstLastPara="1" rIns="68575" wrap="square" tIns="34275">
+              <a:noAutofit/>
+            </a:bodyPr>
+            <a:lstStyle/>
+            <a:p>
+              <a:pPr indent="0" lvl="0" marL="0" marR="0" rtl="0" algn="l">
+                <a:spcBef>
+                  <a:spcPts val="0"/>
+                </a:spcBef>
+                <a:spcAft>
+                  <a:spcPts val="0"/>
+                </a:spcAft>
+                <a:buClr>
+                  <a:srgbClr val="028090"/>
+                </a:buClr>
+                <a:buSzPts val="1200"/>
+                <a:buFont typeface="Calibri"/>
+                <a:buNone/>
+              </a:pPr>
+              <a:r>
+                <a:rPr b="1" lang="en" sz="1200">
+                  <a:solidFill>
+                    <a:srgbClr val="028090"/>
+                  </a:solidFill>
+                  <a:latin typeface="Calibri"/>
+                  <a:ea typeface="Calibri"/>
+                  <a:cs typeface="Calibri"/>
+                  <a:sym typeface="Calibri"/>
+                </a:rPr>
+                <a:t>Address Search</a:t>
+              </a:r>
+              <a:endParaRPr sz="1200">
+                <a:solidFill>
+                  <a:schemeClr val="dk1"/>
                 </a:solidFill>
                 <a:latin typeface="Calibri"/>
                 <a:ea typeface="Calibri"/>
                 <a:cs typeface="Calibri"/>
                 <a:sym typeface="Calibri"/>
-              </a:rPr>
-              <a:t>What do the results mean?</a:t>
-            </a:r>
-            <a:endParaRPr sz="1200">
-              <a:solidFill>
-                <a:schemeClr val="dk1"/>
-              </a:solidFill>
-              <a:latin typeface="Calibri"/>
-              <a:ea typeface="Calibri"/>
-              <a:cs typeface="Calibri"/>
-              <a:sym typeface="Calibri"/>
-            </a:endParaRPr>
-          </a:p>
-        </p:txBody>
-      </p:sp>
-      <p:sp>
-        <p:nvSpPr>
-          <p:cNvPr id="234" name="Google Shape;234;p25"/>
-          <p:cNvSpPr/>
-          <p:nvPr/>
-        </p:nvSpPr>
-        <p:spPr>
-          <a:xfrm>
-            <a:off x="4972050" y="1474470"/>
-            <a:ext cx="3669030" cy="1148715"/>
-          </a:xfrm>
-          <a:prstGeom prst="rect">
-            <a:avLst/>
-          </a:prstGeom>
-          <a:noFill/>
-          <a:ln>
+              </a:endParaRPr>
+            </a:p>
+          </p:txBody>
+        </p:sp>
+        <p:sp>
+          <p:nvSpPr>
+            <p:cNvPr id="229" name="Google Shape;229;p25"/>
+            <p:cNvSpPr/>
+            <p:nvPr/>
+          </p:nvSpPr>
+          <p:spPr>
+            <a:xfrm>
+              <a:off x="3531870" y="2366010"/>
+              <a:ext cx="2263140" cy="1097280"/>
+            </a:xfrm>
+            <a:prstGeom prst="rect">
+              <a:avLst/>
+            </a:prstGeom>
             <a:noFill/>
-          </a:ln>
-        </p:spPr>
-        <p:txBody>
-          <a:bodyPr anchorCtr="0" anchor="t" bIns="34275" lIns="68575" spcFirstLastPara="1" rIns="68575" wrap="square" tIns="34275">
-            <a:noAutofit/>
-          </a:bodyPr>
-          <a:lstStyle/>
-          <a:p>
-            <a:pPr indent="0" lvl="0" marL="0" marR="0" rtl="0" algn="l">
-              <a:spcBef>
-                <a:spcPts val="0"/>
-              </a:spcBef>
-              <a:spcAft>
-                <a:spcPts val="0"/>
-              </a:spcAft>
-              <a:buClr>
-                <a:srgbClr val="1F2933"/>
-              </a:buClr>
-              <a:buSzPts val="1000"/>
-              <a:buFont typeface="Calibri"/>
-              <a:buNone/>
-            </a:pPr>
-            <a:r>
-              <a:rPr lang="en" sz="1000">
-                <a:solidFill>
+            <a:ln>
+              <a:noFill/>
+            </a:ln>
+          </p:spPr>
+          <p:txBody>
+            <a:bodyPr anchorCtr="0" anchor="ctr" bIns="34275" lIns="68575" spcFirstLastPara="1" rIns="68575" wrap="square" tIns="34275">
+              <a:noAutofit/>
+            </a:bodyPr>
+            <a:lstStyle/>
+            <a:p>
+              <a:pPr indent="0" lvl="0" marL="0" marR="0" rtl="0" algn="l">
+                <a:spcBef>
+                  <a:spcPts val="0"/>
+                </a:spcBef>
+                <a:spcAft>
+                  <a:spcPts val="0"/>
+                </a:spcAft>
+                <a:buClr>
                   <a:srgbClr val="1F2933"/>
+                </a:buClr>
+                <a:buSzPts val="900"/>
+                <a:buFont typeface="Calibri"/>
+                <a:buNone/>
+              </a:pPr>
+              <a:r>
+                <a:rPr lang="en" sz="900">
+                  <a:solidFill>
+                    <a:srgbClr val="1F2933"/>
+                  </a:solidFill>
+                  <a:latin typeface="Calibri"/>
+                  <a:ea typeface="Calibri"/>
+                  <a:cs typeface="Calibri"/>
+                  <a:sym typeface="Calibri"/>
+                </a:rPr>
+                <a:t>Pick an address → FAISS returns similar addresses with sidewalk labels + distances</a:t>
+              </a:r>
+              <a:endParaRPr sz="900">
+                <a:solidFill>
+                  <a:schemeClr val="dk1"/>
                 </a:solidFill>
                 <a:latin typeface="Calibri"/>
                 <a:ea typeface="Calibri"/>
                 <a:cs typeface="Calibri"/>
                 <a:sym typeface="Calibri"/>
-              </a:rPr>
-              <a:t>The PMR score means the model consistently recovers the width + curb rule we wrote — proof the pipeline works, not superhuman skill. The Housing tie with the baseline is an honest null result: house-level features alone can’t predict sidewalk condition.</a:t>
-            </a:r>
-            <a:endParaRPr sz="1000">
-              <a:solidFill>
-                <a:schemeClr val="dk1"/>
-              </a:solidFill>
-              <a:latin typeface="Calibri"/>
-              <a:ea typeface="Calibri"/>
-              <a:cs typeface="Calibri"/>
-              <a:sym typeface="Calibri"/>
-            </a:endParaRPr>
-          </a:p>
-        </p:txBody>
-      </p:sp>
-      <p:sp>
-        <p:nvSpPr>
-          <p:cNvPr id="235" name="Google Shape;235;p25"/>
-          <p:cNvSpPr/>
+              </a:endParaRPr>
+            </a:p>
+          </p:txBody>
+        </p:sp>
+      </p:grpSp>
+      <p:grpSp>
+        <p:nvGrpSpPr>
+          <p:cNvPr id="230" name="Google Shape;230;p25"/>
+          <p:cNvGrpSpPr/>
           <p:nvPr/>
-        </p:nvSpPr>
-        <p:spPr>
-          <a:xfrm>
-            <a:off x="480060" y="2897505"/>
-            <a:ext cx="4080510" cy="1697355"/>
-          </a:xfrm>
-          <a:prstGeom prst="roundRect">
-            <a:avLst>
-              <a:gd fmla="val 2449" name="adj"/>
-            </a:avLst>
-          </a:prstGeom>
-          <a:solidFill>
-            <a:srgbClr val="F4FAF9"/>
-          </a:solidFill>
-          <a:ln>
-            <a:noFill/>
-          </a:ln>
-        </p:spPr>
-        <p:txBody>
-          <a:bodyPr anchorCtr="0" anchor="t" bIns="34275" lIns="68575" spcFirstLastPara="1" rIns="68575" wrap="square" tIns="34275">
-            <a:noAutofit/>
-          </a:bodyPr>
-          <a:lstStyle/>
-          <a:p>
-            <a:pPr indent="0" lvl="0" marL="0" marR="0" rtl="0" algn="l">
-              <a:spcBef>
-                <a:spcPts val="0"/>
-              </a:spcBef>
-              <a:spcAft>
-                <a:spcPts val="0"/>
-              </a:spcAft>
-              <a:buNone/>
-            </a:pPr>
-            <a:r>
-              <a:t/>
-            </a:r>
-            <a:endParaRPr sz="1400">
-              <a:solidFill>
-                <a:schemeClr val="dk1"/>
-              </a:solidFill>
-              <a:latin typeface="Calibri"/>
-              <a:ea typeface="Calibri"/>
-              <a:cs typeface="Calibri"/>
-              <a:sym typeface="Calibri"/>
-            </a:endParaRPr>
-          </a:p>
-        </p:txBody>
-      </p:sp>
-      <p:sp>
-        <p:nvSpPr>
-          <p:cNvPr id="236" name="Google Shape;236;p25"/>
-          <p:cNvSpPr/>
-          <p:nvPr/>
-        </p:nvSpPr>
-        <p:spPr>
-          <a:xfrm>
-            <a:off x="685800" y="3000375"/>
-            <a:ext cx="3669030" cy="308610"/>
-          </a:xfrm>
-          <a:prstGeom prst="rect">
-            <a:avLst/>
-          </a:prstGeom>
-          <a:noFill/>
-          <a:ln>
-            <a:noFill/>
-          </a:ln>
-        </p:spPr>
-        <p:txBody>
-          <a:bodyPr anchorCtr="0" anchor="ctr" bIns="34275" lIns="68575" spcFirstLastPara="1" rIns="68575" wrap="square" tIns="34275">
-            <a:noAutofit/>
-          </a:bodyPr>
-          <a:lstStyle/>
-          <a:p>
-            <a:pPr indent="0" lvl="0" marL="0" marR="0" rtl="0" algn="l">
-              <a:spcBef>
-                <a:spcPts val="0"/>
-              </a:spcBef>
-              <a:spcAft>
-                <a:spcPts val="0"/>
-              </a:spcAft>
-              <a:buClr>
-                <a:srgbClr val="00A896"/>
-              </a:buClr>
-              <a:buSzPts val="1200"/>
-              <a:buFont typeface="Calibri"/>
-              <a:buNone/>
-            </a:pPr>
-            <a:r>
-              <a:rPr b="1" lang="en" sz="1200">
-                <a:solidFill>
-                  <a:srgbClr val="00A896"/>
+        </p:nvGrpSpPr>
+        <p:grpSpPr>
+          <a:xfrm>
+            <a:off x="6172200" y="1577340"/>
+            <a:ext cx="2674620" cy="1988820"/>
+            <a:chOff x="6172200" y="1577340"/>
+            <a:chExt cx="2674620" cy="1988820"/>
+          </a:xfrm>
+        </p:grpSpPr>
+        <p:sp>
+          <p:nvSpPr>
+            <p:cNvPr id="231" name="Google Shape;231;p25"/>
+            <p:cNvSpPr/>
+            <p:nvPr/>
+          </p:nvSpPr>
+          <p:spPr>
+            <a:xfrm>
+              <a:off x="6172200" y="1577340"/>
+              <a:ext cx="2674620" cy="1988820"/>
+            </a:xfrm>
+            <a:prstGeom prst="roundRect">
+              <a:avLst>
+                <a:gd fmla="val 4138" name="adj"/>
+              </a:avLst>
+            </a:prstGeom>
+            <a:solidFill>
+              <a:srgbClr val="FFFFFF"/>
+            </a:solidFill>
+            <a:ln>
+              <a:noFill/>
+            </a:ln>
+          </p:spPr>
+          <p:txBody>
+            <a:bodyPr anchorCtr="0" anchor="t" bIns="34275" lIns="68575" spcFirstLastPara="1" rIns="68575" wrap="square" tIns="34275">
+              <a:noAutofit/>
+            </a:bodyPr>
+            <a:lstStyle/>
+            <a:p>
+              <a:pPr indent="0" lvl="0" marL="0" marR="0" rtl="0" algn="l">
+                <a:spcBef>
+                  <a:spcPts val="0"/>
+                </a:spcBef>
+                <a:spcAft>
+                  <a:spcPts val="0"/>
+                </a:spcAft>
+                <a:buNone/>
+              </a:pPr>
+              <a:r>
+                <a:t/>
+              </a:r>
+              <a:endParaRPr sz="1400">
+                <a:solidFill>
+                  <a:schemeClr val="dk1"/>
                 </a:solidFill>
                 <a:latin typeface="Calibri"/>
                 <a:ea typeface="Calibri"/>
                 <a:cs typeface="Calibri"/>
                 <a:sym typeface="Calibri"/>
-              </a:rPr>
-              <a:t>How did we get them?</a:t>
-            </a:r>
-            <a:endParaRPr sz="1200">
-              <a:solidFill>
-                <a:schemeClr val="dk1"/>
-              </a:solidFill>
-              <a:latin typeface="Calibri"/>
-              <a:ea typeface="Calibri"/>
-              <a:cs typeface="Calibri"/>
-              <a:sym typeface="Calibri"/>
-            </a:endParaRPr>
-          </a:p>
-        </p:txBody>
-      </p:sp>
-      <p:sp>
-        <p:nvSpPr>
-          <p:cNvPr id="237" name="Google Shape;237;p25"/>
-          <p:cNvSpPr/>
-          <p:nvPr/>
-        </p:nvSpPr>
-        <p:spPr>
-          <a:xfrm>
-            <a:off x="685800" y="3343275"/>
-            <a:ext cx="3669030" cy="1148715"/>
-          </a:xfrm>
-          <a:prstGeom prst="rect">
-            <a:avLst/>
-          </a:prstGeom>
-          <a:noFill/>
-          <a:ln>
-            <a:noFill/>
-          </a:ln>
-        </p:spPr>
-        <p:txBody>
-          <a:bodyPr anchorCtr="0" anchor="t" bIns="34275" lIns="68575" spcFirstLastPara="1" rIns="68575" wrap="square" tIns="34275">
-            <a:noAutofit/>
-          </a:bodyPr>
-          <a:lstStyle/>
-          <a:p>
-            <a:pPr indent="0" lvl="0" marL="0" marR="0" rtl="0" algn="l">
-              <a:spcBef>
-                <a:spcPts val="0"/>
-              </a:spcBef>
-              <a:spcAft>
-                <a:spcPts val="0"/>
-              </a:spcAft>
-              <a:buClr>
-                <a:srgbClr val="1F2933"/>
-              </a:buClr>
-              <a:buSzPts val="1000"/>
-              <a:buFont typeface="Calibri"/>
-              <a:buNone/>
-            </a:pPr>
-            <a:r>
-              <a:rPr lang="en" sz="1000">
-                <a:solidFill>
-                  <a:srgbClr val="1F2933"/>
+              </a:endParaRPr>
+            </a:p>
+          </p:txBody>
+        </p:sp>
+        <p:sp>
+          <p:nvSpPr>
+            <p:cNvPr id="232" name="Google Shape;232;p25"/>
+            <p:cNvSpPr/>
+            <p:nvPr/>
+          </p:nvSpPr>
+          <p:spPr>
+            <a:xfrm>
+              <a:off x="6377940" y="1783080"/>
+              <a:ext cx="480060" cy="480060"/>
+            </a:xfrm>
+            <a:prstGeom prst="ellipse">
+              <a:avLst/>
+            </a:prstGeom>
+            <a:solidFill>
+              <a:srgbClr val="F4FAF9"/>
+            </a:solidFill>
+            <a:ln>
+              <a:noFill/>
+            </a:ln>
+          </p:spPr>
+          <p:txBody>
+            <a:bodyPr anchorCtr="0" anchor="t" bIns="34275" lIns="68575" spcFirstLastPara="1" rIns="68575" wrap="square" tIns="34275">
+              <a:noAutofit/>
+            </a:bodyPr>
+            <a:lstStyle/>
+            <a:p>
+              <a:pPr indent="0" lvl="0" marL="0" marR="0" rtl="0" algn="l">
+                <a:spcBef>
+                  <a:spcPts val="0"/>
+                </a:spcBef>
+                <a:spcAft>
+                  <a:spcPts val="0"/>
+                </a:spcAft>
+                <a:buNone/>
+              </a:pPr>
+              <a:r>
+                <a:t/>
+              </a:r>
+              <a:endParaRPr sz="1400">
+                <a:solidFill>
+                  <a:schemeClr val="dk1"/>
                 </a:solidFill>
                 <a:latin typeface="Calibri"/>
                 <a:ea typeface="Calibri"/>
                 <a:cs typeface="Calibri"/>
                 <a:sym typeface="Calibri"/>
-              </a:rPr>
-              <a:t>The same recipe on both datasets: clean, encode, train a Random Forest, score on a held-out 20% test set, then audit feature importance. That audit — not the accuracy score — is what exposed the state bias and the missing curb feature.</a:t>
-            </a:r>
-            <a:endParaRPr sz="1000">
-              <a:solidFill>
-                <a:schemeClr val="dk1"/>
-              </a:solidFill>
-              <a:latin typeface="Calibri"/>
-              <a:ea typeface="Calibri"/>
-              <a:cs typeface="Calibri"/>
-              <a:sym typeface="Calibri"/>
-            </a:endParaRPr>
-          </a:p>
-        </p:txBody>
-      </p:sp>
-      <p:sp>
-        <p:nvSpPr>
-          <p:cNvPr id="238" name="Google Shape;238;p25"/>
-          <p:cNvSpPr/>
-          <p:nvPr/>
-        </p:nvSpPr>
-        <p:spPr>
-          <a:xfrm>
-            <a:off x="4766310" y="2897505"/>
-            <a:ext cx="4080510" cy="1697355"/>
-          </a:xfrm>
-          <a:prstGeom prst="roundRect">
-            <a:avLst>
-              <a:gd fmla="val 2449" name="adj"/>
-            </a:avLst>
-          </a:prstGeom>
-          <a:solidFill>
-            <a:srgbClr val="F4FAF9"/>
-          </a:solidFill>
-          <a:ln>
+              </a:endParaRPr>
+            </a:p>
+          </p:txBody>
+        </p:sp>
+        <p:pic>
+          <p:nvPicPr>
+            <p:cNvPr descr="preencoded.png" id="233" name="Google Shape;233;p25"/>
+            <p:cNvPicPr preferRelativeResize="0"/>
+            <p:nvPr/>
+          </p:nvPicPr>
+          <p:blipFill rotWithShape="1">
+            <a:blip r:embed="rId5">
+              <a:alphaModFix/>
+            </a:blip>
+            <a:srcRect b="0" l="0" r="0" t="0"/>
+            <a:stretch/>
+          </p:blipFill>
+          <p:spPr>
+            <a:xfrm>
+              <a:off x="6493154" y="1898294"/>
+              <a:ext cx="249632" cy="249631"/>
+            </a:xfrm>
+            <a:prstGeom prst="rect">
+              <a:avLst/>
+            </a:prstGeom>
             <a:noFill/>
-          </a:ln>
-        </p:spPr>
-        <p:txBody>
-          <a:bodyPr anchorCtr="0" anchor="t" bIns="34275" lIns="68575" spcFirstLastPara="1" rIns="68575" wrap="square" tIns="34275">
-            <a:noAutofit/>
-          </a:bodyPr>
-          <a:lstStyle/>
-          <a:p>
-            <a:pPr indent="0" lvl="0" marL="0" marR="0" rtl="0" algn="l">
-              <a:spcBef>
-                <a:spcPts val="0"/>
-              </a:spcBef>
-              <a:spcAft>
-                <a:spcPts val="0"/>
-              </a:spcAft>
-              <a:buNone/>
-            </a:pPr>
-            <a:r>
-              <a:t/>
-            </a:r>
-            <a:endParaRPr sz="1400">
-              <a:solidFill>
-                <a:schemeClr val="dk1"/>
-              </a:solidFill>
-              <a:latin typeface="Calibri"/>
-              <a:ea typeface="Calibri"/>
-              <a:cs typeface="Calibri"/>
-              <a:sym typeface="Calibri"/>
-            </a:endParaRPr>
-          </a:p>
-        </p:txBody>
-      </p:sp>
-      <p:sp>
-        <p:nvSpPr>
-          <p:cNvPr id="239" name="Google Shape;239;p25"/>
-          <p:cNvSpPr/>
-          <p:nvPr/>
-        </p:nvSpPr>
-        <p:spPr>
-          <a:xfrm>
-            <a:off x="4972050" y="3000375"/>
-            <a:ext cx="3669030" cy="308610"/>
-          </a:xfrm>
-          <a:prstGeom prst="rect">
-            <a:avLst/>
-          </a:prstGeom>
-          <a:noFill/>
-          <a:ln>
+            <a:ln>
+              <a:noFill/>
+            </a:ln>
+          </p:spPr>
+        </p:pic>
+        <p:sp>
+          <p:nvSpPr>
+            <p:cNvPr id="234" name="Google Shape;234;p25"/>
+            <p:cNvSpPr/>
+            <p:nvPr/>
+          </p:nvSpPr>
+          <p:spPr>
+            <a:xfrm>
+              <a:off x="6960870" y="1817370"/>
+              <a:ext cx="1851660" cy="411480"/>
+            </a:xfrm>
+            <a:prstGeom prst="rect">
+              <a:avLst/>
+            </a:prstGeom>
             <a:noFill/>
-          </a:ln>
-        </p:spPr>
-        <p:txBody>
-          <a:bodyPr anchorCtr="0" anchor="ctr" bIns="34275" lIns="68575" spcFirstLastPara="1" rIns="68575" wrap="square" tIns="34275">
-            <a:noAutofit/>
-          </a:bodyPr>
-          <a:lstStyle/>
-          <a:p>
-            <a:pPr indent="0" lvl="0" marL="0" marR="0" rtl="0" algn="l">
-              <a:spcBef>
-                <a:spcPts val="0"/>
-              </a:spcBef>
-              <a:spcAft>
-                <a:spcPts val="0"/>
-              </a:spcAft>
-              <a:buClr>
-                <a:srgbClr val="00A896"/>
-              </a:buClr>
-              <a:buSzPts val="1200"/>
-              <a:buFont typeface="Calibri"/>
-              <a:buNone/>
-            </a:pPr>
-            <a:r>
-              <a:rPr b="1" lang="en" sz="1200">
-                <a:solidFill>
-                  <a:srgbClr val="00A896"/>
+            <a:ln>
+              <a:noFill/>
+            </a:ln>
+          </p:spPr>
+          <p:txBody>
+            <a:bodyPr anchorCtr="0" anchor="ctr" bIns="34275" lIns="68575" spcFirstLastPara="1" rIns="68575" wrap="square" tIns="34275">
+              <a:noAutofit/>
+            </a:bodyPr>
+            <a:lstStyle/>
+            <a:p>
+              <a:pPr indent="0" lvl="0" marL="0" marR="0" rtl="0" algn="l">
+                <a:spcBef>
+                  <a:spcPts val="0"/>
+                </a:spcBef>
+                <a:spcAft>
+                  <a:spcPts val="0"/>
+                </a:spcAft>
+                <a:buClr>
+                  <a:srgbClr val="028090"/>
+                </a:buClr>
+                <a:buSzPts val="1200"/>
+                <a:buFont typeface="Calibri"/>
+                <a:buNone/>
+              </a:pPr>
+              <a:r>
+                <a:rPr b="1" lang="en" sz="1200">
+                  <a:solidFill>
+                    <a:srgbClr val="028090"/>
+                  </a:solidFill>
+                  <a:latin typeface="Calibri"/>
+                  <a:ea typeface="Calibri"/>
+                  <a:cs typeface="Calibri"/>
+                  <a:sym typeface="Calibri"/>
+                </a:rPr>
+                <a:t>About &amp; Limits</a:t>
+              </a:r>
+              <a:endParaRPr sz="1200">
+                <a:solidFill>
+                  <a:schemeClr val="dk1"/>
                 </a:solidFill>
                 <a:latin typeface="Calibri"/>
                 <a:ea typeface="Calibri"/>
                 <a:cs typeface="Calibri"/>
                 <a:sym typeface="Calibri"/>
-              </a:rPr>
-              <a:t>How accurate are they?</a:t>
-            </a:r>
-            <a:endParaRPr sz="1200">
-              <a:solidFill>
-                <a:schemeClr val="dk1"/>
-              </a:solidFill>
-              <a:latin typeface="Calibri"/>
-              <a:ea typeface="Calibri"/>
-              <a:cs typeface="Calibri"/>
-              <a:sym typeface="Calibri"/>
-            </a:endParaRPr>
-          </a:p>
-        </p:txBody>
-      </p:sp>
-      <p:sp>
-        <p:nvSpPr>
-          <p:cNvPr id="240" name="Google Shape;240;p25"/>
-          <p:cNvSpPr/>
-          <p:nvPr/>
-        </p:nvSpPr>
-        <p:spPr>
-          <a:xfrm>
-            <a:off x="4972050" y="3343275"/>
-            <a:ext cx="3669030" cy="1148715"/>
-          </a:xfrm>
-          <a:prstGeom prst="rect">
-            <a:avLst/>
-          </a:prstGeom>
-          <a:noFill/>
-          <a:ln>
+              </a:endParaRPr>
+            </a:p>
+          </p:txBody>
+        </p:sp>
+        <p:sp>
+          <p:nvSpPr>
+            <p:cNvPr id="235" name="Google Shape;235;p25"/>
+            <p:cNvSpPr/>
+            <p:nvPr/>
+          </p:nvSpPr>
+          <p:spPr>
+            <a:xfrm>
+              <a:off x="6377940" y="2366010"/>
+              <a:ext cx="2263140" cy="1097280"/>
+            </a:xfrm>
+            <a:prstGeom prst="rect">
+              <a:avLst/>
+            </a:prstGeom>
             <a:noFill/>
-          </a:ln>
-        </p:spPr>
-        <p:txBody>
-          <a:bodyPr anchorCtr="0" anchor="t" bIns="34275" lIns="68575" spcFirstLastPara="1" rIns="68575" wrap="square" tIns="34275">
-            <a:noAutofit/>
-          </a:bodyPr>
-          <a:lstStyle/>
-          <a:p>
-            <a:pPr indent="0" lvl="0" marL="0" marR="0" rtl="0" algn="l">
-              <a:spcBef>
-                <a:spcPts val="0"/>
-              </a:spcBef>
-              <a:spcAft>
-                <a:spcPts val="0"/>
-              </a:spcAft>
-              <a:buClr>
-                <a:srgbClr val="1F2933"/>
-              </a:buClr>
-              <a:buSzPts val="1000"/>
-              <a:buFont typeface="Calibri"/>
-              <a:buNone/>
-            </a:pPr>
-            <a:r>
-              <a:rPr lang="en" sz="1000">
-                <a:solidFill>
+            <a:ln>
+              <a:noFill/>
+            </a:ln>
+          </p:spPr>
+          <p:txBody>
+            <a:bodyPr anchorCtr="0" anchor="ctr" bIns="34275" lIns="68575" spcFirstLastPara="1" rIns="68575" wrap="square" tIns="34275">
+              <a:noAutofit/>
+            </a:bodyPr>
+            <a:lstStyle/>
+            <a:p>
+              <a:pPr indent="0" lvl="0" marL="0" marR="0" rtl="0" algn="l">
+                <a:spcBef>
+                  <a:spcPts val="0"/>
+                </a:spcBef>
+                <a:spcAft>
+                  <a:spcPts val="0"/>
+                </a:spcAft>
+                <a:buClr>
                   <a:srgbClr val="1F2933"/>
+                </a:buClr>
+                <a:buSzPts val="900"/>
+                <a:buFont typeface="Calibri"/>
+                <a:buNone/>
+              </a:pPr>
+              <a:r>
+                <a:rPr lang="en" sz="900">
+                  <a:solidFill>
+                    <a:srgbClr val="1F2933"/>
+                  </a:solidFill>
+                  <a:latin typeface="Calibri"/>
+                  <a:ea typeface="Calibri"/>
+                  <a:cs typeface="Calibri"/>
+                  <a:sym typeface="Calibri"/>
+                </a:rPr>
+                <a:t>What the app does, what it refuses to do, and why, honesty as a feature</a:t>
+              </a:r>
+              <a:endParaRPr sz="900">
+                <a:solidFill>
+                  <a:schemeClr val="dk1"/>
                 </a:solidFill>
                 <a:latin typeface="Calibri"/>
                 <a:ea typeface="Calibri"/>
                 <a:cs typeface="Calibri"/>
                 <a:sym typeface="Calibri"/>
-              </a:rPr>
-              <a:t>PMR: 100% on 14,455 held-out segments — but scored against our own rule-based label; only 50 verified labels exist, too few to test on. Housing: no better than always guessing “ok.” We trust the audited pipeline more than any single number.</a:t>
-            </a:r>
-            <a:endParaRPr sz="1000">
+              </a:endParaRPr>
+            </a:p>
+          </p:txBody>
+        </p:sp>
+      </p:grpSp>
+      <p:grpSp>
+        <p:nvGrpSpPr>
+          <p:cNvPr id="236" name="Google Shape;236;p25"/>
+          <p:cNvGrpSpPr/>
+          <p:nvPr/>
+        </p:nvGrpSpPr>
+        <p:grpSpPr>
+          <a:xfrm>
+            <a:off x="480073" y="342900"/>
+            <a:ext cx="8367176" cy="4286250"/>
+            <a:chOff x="480049" y="342900"/>
+            <a:chExt cx="8298300" cy="4286250"/>
+          </a:xfrm>
+        </p:grpSpPr>
+        <p:sp>
+          <p:nvSpPr>
+            <p:cNvPr id="237" name="Google Shape;237;p25"/>
+            <p:cNvSpPr/>
+            <p:nvPr/>
+          </p:nvSpPr>
+          <p:spPr>
+            <a:xfrm>
+              <a:off x="480049" y="342900"/>
+              <a:ext cx="8298300" cy="548700"/>
+            </a:xfrm>
+            <a:prstGeom prst="rect">
+              <a:avLst/>
+            </a:prstGeom>
+            <a:solidFill>
+              <a:schemeClr val="lt1"/>
+            </a:solidFill>
+            <a:ln>
+              <a:noFill/>
+            </a:ln>
+          </p:spPr>
+          <p:txBody>
+            <a:bodyPr anchorCtr="0" anchor="ctr" bIns="34275" lIns="68575" spcFirstLastPara="1" rIns="68575" wrap="square" tIns="34275">
+              <a:noAutofit/>
+            </a:bodyPr>
+            <a:lstStyle/>
+            <a:p>
+              <a:pPr indent="0" lvl="0" marL="0" marR="0" rtl="0" algn="l">
+                <a:spcBef>
+                  <a:spcPts val="0"/>
+                </a:spcBef>
+                <a:spcAft>
+                  <a:spcPts val="0"/>
+                </a:spcAft>
+                <a:buClr>
+                  <a:srgbClr val="FFFFFF"/>
+                </a:buClr>
+                <a:buSzPts val="3000"/>
+                <a:buFont typeface="Cambria"/>
+                <a:buNone/>
+              </a:pPr>
+              <a:r>
+                <a:rPr b="1" lang="en" sz="3000">
+                  <a:solidFill>
+                    <a:srgbClr val="12484F"/>
+                  </a:solidFill>
+                  <a:latin typeface="Cambria"/>
+                  <a:ea typeface="Cambria"/>
+                  <a:cs typeface="Cambria"/>
+                  <a:sym typeface="Cambria"/>
+                </a:rPr>
+                <a:t>AccessMap</a:t>
+              </a:r>
+              <a:endParaRPr sz="3000">
+                <a:solidFill>
+                  <a:srgbClr val="12484F"/>
+                </a:solidFill>
+                <a:latin typeface="Calibri"/>
+                <a:ea typeface="Calibri"/>
+                <a:cs typeface="Calibri"/>
+                <a:sym typeface="Calibri"/>
+              </a:endParaRPr>
+            </a:p>
+          </p:txBody>
+        </p:sp>
+        <p:sp>
+          <p:nvSpPr>
+            <p:cNvPr id="238" name="Google Shape;238;p25"/>
+            <p:cNvSpPr/>
+            <p:nvPr/>
+          </p:nvSpPr>
+          <p:spPr>
+            <a:xfrm>
+              <a:off x="480049" y="925825"/>
+              <a:ext cx="8298300" cy="411600"/>
+            </a:xfrm>
+            <a:prstGeom prst="rect">
+              <a:avLst/>
+            </a:prstGeom>
+            <a:solidFill>
+              <a:schemeClr val="lt1"/>
+            </a:solidFill>
+            <a:ln>
+              <a:noFill/>
+            </a:ln>
+          </p:spPr>
+          <p:txBody>
+            <a:bodyPr anchorCtr="0" anchor="ctr" bIns="34275" lIns="68575" spcFirstLastPara="1" rIns="68575" wrap="square" tIns="34275">
+              <a:noAutofit/>
+            </a:bodyPr>
+            <a:lstStyle/>
+            <a:p>
+              <a:pPr indent="0" lvl="0" marL="0" marR="0" rtl="0" algn="l">
+                <a:spcBef>
+                  <a:spcPts val="0"/>
+                </a:spcBef>
+                <a:spcAft>
+                  <a:spcPts val="0"/>
+                </a:spcAft>
+                <a:buClr>
+                  <a:srgbClr val="02C39A"/>
+                </a:buClr>
+                <a:buSzPts val="1800"/>
+                <a:buFont typeface="Calibri"/>
+                <a:buNone/>
+              </a:pPr>
+              <a:r>
+                <a:rPr b="1" lang="en" sz="1800">
+                  <a:solidFill>
+                    <a:srgbClr val="02C39A"/>
+                  </a:solidFill>
+                  <a:latin typeface="Calibri"/>
+                  <a:ea typeface="Calibri"/>
+                  <a:cs typeface="Calibri"/>
+                  <a:sym typeface="Calibri"/>
+                </a:rPr>
+                <a:t>accessmap-13a.streamlit.app</a:t>
+              </a:r>
+              <a:endParaRPr sz="1800">
+                <a:solidFill>
+                  <a:schemeClr val="dk1"/>
+                </a:solidFill>
+                <a:latin typeface="Calibri"/>
+                <a:ea typeface="Calibri"/>
+                <a:cs typeface="Calibri"/>
+                <a:sym typeface="Calibri"/>
+              </a:endParaRPr>
+            </a:p>
+          </p:txBody>
+        </p:sp>
+        <p:grpSp>
+          <p:nvGrpSpPr>
+            <p:cNvPr id="239" name="Google Shape;239;p25"/>
+            <p:cNvGrpSpPr/>
+            <p:nvPr/>
+          </p:nvGrpSpPr>
+          <p:grpSpPr>
+            <a:xfrm>
+              <a:off x="480060" y="1577340"/>
+              <a:ext cx="2674620" cy="1988820"/>
+              <a:chOff x="480060" y="1577340"/>
+              <a:chExt cx="2674620" cy="1988820"/>
+            </a:xfrm>
+          </p:grpSpPr>
+          <p:sp>
+            <p:nvSpPr>
+              <p:cNvPr id="240" name="Google Shape;240;p25"/>
+              <p:cNvSpPr/>
+              <p:nvPr/>
+            </p:nvSpPr>
+            <p:spPr>
+              <a:xfrm>
+                <a:off x="480060" y="1577340"/>
+                <a:ext cx="2674620" cy="1988820"/>
+              </a:xfrm>
+              <a:prstGeom prst="roundRect">
+                <a:avLst>
+                  <a:gd fmla="val 4138" name="adj"/>
+                </a:avLst>
+              </a:prstGeom>
               <a:solidFill>
-                <a:schemeClr val="dk1"/>
+                <a:srgbClr val="FFFFFF"/>
               </a:solidFill>
-              <a:latin typeface="Calibri"/>
-              <a:ea typeface="Calibri"/>
-              <a:cs typeface="Calibri"/>
-              <a:sym typeface="Calibri"/>
-            </a:endParaRPr>
-          </a:p>
-        </p:txBody>
-      </p:sp>
+              <a:ln>
+                <a:noFill/>
+              </a:ln>
+            </p:spPr>
+            <p:txBody>
+              <a:bodyPr anchorCtr="0" anchor="t" bIns="34275" lIns="68575" spcFirstLastPara="1" rIns="68575" wrap="square" tIns="34275">
+                <a:noAutofit/>
+              </a:bodyPr>
+              <a:lstStyle/>
+              <a:p>
+                <a:pPr indent="0" lvl="0" marL="0" marR="0" rtl="0" algn="l">
+                  <a:spcBef>
+                    <a:spcPts val="0"/>
+                  </a:spcBef>
+                  <a:spcAft>
+                    <a:spcPts val="0"/>
+                  </a:spcAft>
+                  <a:buNone/>
+                </a:pPr>
+                <a:r>
+                  <a:t/>
+                </a:r>
+                <a:endParaRPr sz="1400">
+                  <a:solidFill>
+                    <a:schemeClr val="dk1"/>
+                  </a:solidFill>
+                  <a:latin typeface="Calibri"/>
+                  <a:ea typeface="Calibri"/>
+                  <a:cs typeface="Calibri"/>
+                  <a:sym typeface="Calibri"/>
+                </a:endParaRPr>
+              </a:p>
+            </p:txBody>
+          </p:sp>
+          <p:pic>
+            <p:nvPicPr>
+              <p:cNvPr descr="preencoded.png" id="241" name="Google Shape;241;p25"/>
+              <p:cNvPicPr preferRelativeResize="0"/>
+              <p:nvPr/>
+            </p:nvPicPr>
+            <p:blipFill rotWithShape="1">
+              <a:blip r:embed="rId6">
+                <a:alphaModFix/>
+              </a:blip>
+              <a:srcRect b="0" l="0" r="0" t="0"/>
+              <a:stretch/>
+            </p:blipFill>
+            <p:spPr>
+              <a:xfrm>
+                <a:off x="801014" y="1898294"/>
+                <a:ext cx="249632" cy="249631"/>
+              </a:xfrm>
+              <a:prstGeom prst="rect">
+                <a:avLst/>
+              </a:prstGeom>
+              <a:noFill/>
+              <a:ln>
+                <a:noFill/>
+              </a:ln>
+            </p:spPr>
+          </p:pic>
+          <p:sp>
+            <p:nvSpPr>
+              <p:cNvPr id="242" name="Google Shape;242;p25"/>
+              <p:cNvSpPr/>
+              <p:nvPr/>
+            </p:nvSpPr>
+            <p:spPr>
+              <a:xfrm>
+                <a:off x="1268730" y="1817370"/>
+                <a:ext cx="1851660" cy="411480"/>
+              </a:xfrm>
+              <a:prstGeom prst="rect">
+                <a:avLst/>
+              </a:prstGeom>
+              <a:noFill/>
+              <a:ln>
+                <a:noFill/>
+              </a:ln>
+            </p:spPr>
+            <p:txBody>
+              <a:bodyPr anchorCtr="0" anchor="ctr" bIns="34275" lIns="68575" spcFirstLastPara="1" rIns="68575" wrap="square" tIns="34275">
+                <a:noAutofit/>
+              </a:bodyPr>
+              <a:lstStyle/>
+              <a:p>
+                <a:pPr indent="0" lvl="0" marL="0" marR="0" rtl="0" algn="l">
+                  <a:spcBef>
+                    <a:spcPts val="0"/>
+                  </a:spcBef>
+                  <a:spcAft>
+                    <a:spcPts val="0"/>
+                  </a:spcAft>
+                  <a:buClr>
+                    <a:srgbClr val="028090"/>
+                  </a:buClr>
+                  <a:buSzPts val="1200"/>
+                  <a:buFont typeface="Calibri"/>
+                  <a:buNone/>
+                </a:pPr>
+                <a:r>
+                  <a:rPr b="1" lang="en" sz="1200">
+                    <a:solidFill>
+                      <a:srgbClr val="028090"/>
+                    </a:solidFill>
+                    <a:latin typeface="Calibri"/>
+                    <a:ea typeface="Calibri"/>
+                    <a:cs typeface="Calibri"/>
+                    <a:sym typeface="Calibri"/>
+                  </a:rPr>
+                  <a:t>Sidewalk Checker</a:t>
+                </a:r>
+                <a:endParaRPr sz="1200">
+                  <a:solidFill>
+                    <a:schemeClr val="dk1"/>
+                  </a:solidFill>
+                  <a:latin typeface="Calibri"/>
+                  <a:ea typeface="Calibri"/>
+                  <a:cs typeface="Calibri"/>
+                  <a:sym typeface="Calibri"/>
+                </a:endParaRPr>
+              </a:p>
+            </p:txBody>
+          </p:sp>
+          <p:sp>
+            <p:nvSpPr>
+              <p:cNvPr id="243" name="Google Shape;243;p25"/>
+              <p:cNvSpPr/>
+              <p:nvPr/>
+            </p:nvSpPr>
+            <p:spPr>
+              <a:xfrm>
+                <a:off x="685800" y="2366010"/>
+                <a:ext cx="2263140" cy="1097280"/>
+              </a:xfrm>
+              <a:prstGeom prst="rect">
+                <a:avLst/>
+              </a:prstGeom>
+              <a:noFill/>
+              <a:ln>
+                <a:noFill/>
+              </a:ln>
+            </p:spPr>
+            <p:txBody>
+              <a:bodyPr anchorCtr="0" anchor="ctr" bIns="34275" lIns="68575" spcFirstLastPara="1" rIns="68575" wrap="square" tIns="34275">
+                <a:noAutofit/>
+              </a:bodyPr>
+              <a:lstStyle/>
+              <a:p>
+                <a:pPr indent="0" lvl="0" marL="0" marR="0" rtl="0" algn="l">
+                  <a:spcBef>
+                    <a:spcPts val="0"/>
+                  </a:spcBef>
+                  <a:spcAft>
+                    <a:spcPts val="0"/>
+                  </a:spcAft>
+                  <a:buClr>
+                    <a:srgbClr val="1F2933"/>
+                  </a:buClr>
+                  <a:buSzPts val="900"/>
+                  <a:buFont typeface="Calibri"/>
+                  <a:buNone/>
+                </a:pPr>
+                <a:r>
+                  <a:rPr lang="en" sz="900">
+                    <a:solidFill>
+                      <a:srgbClr val="1F2933"/>
+                    </a:solidFill>
+                    <a:latin typeface="Calibri"/>
+                    <a:ea typeface="Calibri"/>
+                    <a:cs typeface="Calibri"/>
+                    <a:sym typeface="Calibri"/>
+                  </a:rPr>
+                  <a:t>Enter width, curb height, crossing, length → accessible / not accessible + confidence</a:t>
+                </a:r>
+                <a:endParaRPr sz="900">
+                  <a:solidFill>
+                    <a:schemeClr val="dk1"/>
+                  </a:solidFill>
+                  <a:latin typeface="Calibri"/>
+                  <a:ea typeface="Calibri"/>
+                  <a:cs typeface="Calibri"/>
+                  <a:sym typeface="Calibri"/>
+                </a:endParaRPr>
+              </a:p>
+            </p:txBody>
+          </p:sp>
+        </p:grpSp>
+        <p:sp>
+          <p:nvSpPr>
+            <p:cNvPr id="244" name="Google Shape;244;p25"/>
+            <p:cNvSpPr/>
+            <p:nvPr/>
+          </p:nvSpPr>
+          <p:spPr>
+            <a:xfrm>
+              <a:off x="480060" y="3806190"/>
+              <a:ext cx="8298180" cy="822960"/>
+            </a:xfrm>
+            <a:prstGeom prst="rect">
+              <a:avLst/>
+            </a:prstGeom>
+            <a:solidFill>
+              <a:srgbClr val="12484F"/>
+            </a:solidFill>
+            <a:ln>
+              <a:noFill/>
+            </a:ln>
+          </p:spPr>
+          <p:txBody>
+            <a:bodyPr anchorCtr="0" anchor="ctr" bIns="34275" lIns="68575" spcFirstLastPara="1" rIns="68575" wrap="square" tIns="34275">
+              <a:noAutofit/>
+            </a:bodyPr>
+            <a:lstStyle/>
+            <a:p>
+              <a:pPr indent="0" lvl="0" marL="0" marR="0" rtl="0" algn="l">
+                <a:spcBef>
+                  <a:spcPts val="0"/>
+                </a:spcBef>
+                <a:spcAft>
+                  <a:spcPts val="0"/>
+                </a:spcAft>
+                <a:buClr>
+                  <a:srgbClr val="02C39A"/>
+                </a:buClr>
+                <a:buSzPts val="1100"/>
+                <a:buFont typeface="Calibri"/>
+                <a:buNone/>
+              </a:pPr>
+              <a:r>
+                <a:rPr b="1" lang="en" sz="1100">
+                  <a:solidFill>
+                    <a:srgbClr val="02C39A"/>
+                  </a:solidFill>
+                  <a:latin typeface="Calibri"/>
+                  <a:ea typeface="Calibri"/>
+                  <a:cs typeface="Calibri"/>
+                  <a:sym typeface="Calibri"/>
+                </a:rPr>
+                <a:t>One deployment decision we're proud of: </a:t>
+              </a:r>
+              <a:r>
+                <a:rPr lang="en" sz="1100">
+                  <a:solidFill>
+                    <a:srgbClr val="E6F2F1"/>
+                  </a:solidFill>
+                  <a:latin typeface="Calibri"/>
+                  <a:ea typeface="Calibri"/>
+                  <a:cs typeface="Calibri"/>
+                  <a:sym typeface="Calibri"/>
+                </a:rPr>
+                <a:t>the app does NOT predict sidewalk condition for US addresses. We tested that model — it has no signal — so the app reports the real crowd label instead of pretending to predict.</a:t>
+              </a:r>
+              <a:endParaRPr sz="1100">
+                <a:solidFill>
+                  <a:schemeClr val="dk1"/>
+                </a:solidFill>
+                <a:latin typeface="Calibri"/>
+                <a:ea typeface="Calibri"/>
+                <a:cs typeface="Calibri"/>
+                <a:sym typeface="Calibri"/>
+              </a:endParaRPr>
+            </a:p>
+          </p:txBody>
+        </p:sp>
+      </p:grpSp>
     </p:spTree>
   </p:cSld>
   <p:clrMapOvr>
@@ -13573,7 +13537,7 @@
     </p:bg>
     <p:spTree>
       <p:nvGrpSpPr>
-        <p:cNvPr id="244" name="Shape 244"/>
+        <p:cNvPr id="248" name="Shape 248"/>
         <p:cNvGrpSpPr/>
         <p:nvPr/>
       </p:nvGrpSpPr>
@@ -13587,144 +13551,18 @@
       </p:grpSpPr>
       <p:sp>
         <p:nvSpPr>
-          <p:cNvPr id="245" name="Google Shape;245;p26"/>
+          <p:cNvPr id="249" name="Google Shape;249;p26"/>
           <p:cNvSpPr/>
           <p:nvPr/>
         </p:nvSpPr>
         <p:spPr>
           <a:xfrm>
-            <a:off x="480060" y="377190"/>
-            <a:ext cx="7543800" cy="411480"/>
-          </a:xfrm>
-          <a:prstGeom prst="rect">
-            <a:avLst/>
-          </a:prstGeom>
-          <a:noFill/>
-          <a:ln>
-            <a:noFill/>
-          </a:ln>
-        </p:spPr>
-        <p:txBody>
-          <a:bodyPr anchorCtr="0" anchor="ctr" bIns="34275" lIns="68575" spcFirstLastPara="1" rIns="68575" wrap="square" tIns="34275">
-            <a:noAutofit/>
-          </a:bodyPr>
-          <a:lstStyle/>
-          <a:p>
-            <a:pPr indent="0" lvl="0" marL="0" marR="0" rtl="0" algn="l">
-              <a:spcBef>
-                <a:spcPts val="0"/>
-              </a:spcBef>
-              <a:spcAft>
-                <a:spcPts val="0"/>
-              </a:spcAft>
-              <a:buClr>
-                <a:srgbClr val="02C39A"/>
-              </a:buClr>
-              <a:buSzPts val="1700"/>
-              <a:buFont typeface="Calibri"/>
-              <a:buNone/>
-            </a:pPr>
-            <a:r>
-              <a:rPr b="1" lang="en" sz="1700">
-                <a:solidFill>
-                  <a:srgbClr val="02C39A"/>
-                </a:solidFill>
-                <a:latin typeface="Calibri"/>
-                <a:ea typeface="Calibri"/>
-                <a:cs typeface="Calibri"/>
-                <a:sym typeface="Calibri"/>
-              </a:rPr>
-              <a:t>Deployment</a:t>
-            </a:r>
-            <a:endParaRPr sz="1700">
-              <a:solidFill>
-                <a:schemeClr val="dk1"/>
-              </a:solidFill>
-              <a:latin typeface="Calibri"/>
-              <a:ea typeface="Calibri"/>
-              <a:cs typeface="Calibri"/>
-              <a:sym typeface="Calibri"/>
-            </a:endParaRPr>
-          </a:p>
-        </p:txBody>
-      </p:sp>
-      <p:sp>
-        <p:nvSpPr>
-          <p:cNvPr id="246" name="Google Shape;246;p26"/>
-          <p:cNvSpPr/>
-          <p:nvPr/>
-        </p:nvSpPr>
-        <p:spPr>
-          <a:xfrm>
-            <a:off x="480060" y="822960"/>
-            <a:ext cx="8161020" cy="891540"/>
-          </a:xfrm>
-          <a:prstGeom prst="rect">
-            <a:avLst/>
-          </a:prstGeom>
-          <a:noFill/>
-          <a:ln>
-            <a:noFill/>
-          </a:ln>
-        </p:spPr>
-        <p:txBody>
-          <a:bodyPr anchorCtr="0" anchor="ctr" bIns="34275" lIns="68575" spcFirstLastPara="1" rIns="68575" wrap="square" tIns="34275">
-            <a:noAutofit/>
-          </a:bodyPr>
-          <a:lstStyle/>
-          <a:p>
-            <a:pPr indent="0" lvl="0" marL="0" marR="0" rtl="0" algn="l">
-              <a:spcBef>
-                <a:spcPts val="0"/>
-              </a:spcBef>
-              <a:spcAft>
-                <a:spcPts val="0"/>
-              </a:spcAft>
-              <a:buClr>
-                <a:srgbClr val="FFFFFF"/>
-              </a:buClr>
-              <a:buSzPts val="2100"/>
-              <a:buFont typeface="Cambria"/>
-              <a:buNone/>
-            </a:pPr>
-            <a:r>
-              <a:rPr b="1" lang="en" sz="2100">
-                <a:solidFill>
-                  <a:srgbClr val="FFFFFF"/>
-                </a:solidFill>
-                <a:latin typeface="Cambria"/>
-                <a:ea typeface="Cambria"/>
-                <a:cs typeface="Cambria"/>
-                <a:sym typeface="Cambria"/>
-              </a:rPr>
-              <a:t>Why is the app so simple — and how reliable is it?</a:t>
-            </a:r>
-            <a:endParaRPr sz="2100">
-              <a:solidFill>
-                <a:schemeClr val="dk1"/>
-              </a:solidFill>
-              <a:latin typeface="Calibri"/>
-              <a:ea typeface="Calibri"/>
-              <a:cs typeface="Calibri"/>
-              <a:sym typeface="Calibri"/>
-            </a:endParaRPr>
-          </a:p>
-        </p:txBody>
-      </p:sp>
-      <p:sp>
-        <p:nvSpPr>
-          <p:cNvPr id="247" name="Google Shape;247;p26"/>
-          <p:cNvSpPr/>
-          <p:nvPr/>
-        </p:nvSpPr>
-        <p:spPr>
-          <a:xfrm>
-            <a:off x="480060" y="1920240"/>
-            <a:ext cx="4080510" cy="2400300"/>
+            <a:off x="5140900" y="250650"/>
+            <a:ext cx="3634800" cy="471300"/>
           </a:xfrm>
           <a:prstGeom prst="roundRect">
             <a:avLst>
-              <a:gd fmla="val 3429" name="adj"/>
+              <a:gd fmla="val 16667" name="adj"/>
             </a:avLst>
           </a:prstGeom>
           <a:solidFill>
@@ -13735,26 +13573,40 @@
           </a:ln>
         </p:spPr>
         <p:txBody>
-          <a:bodyPr anchorCtr="0" anchor="t" bIns="34275" lIns="68575" spcFirstLastPara="1" rIns="68575" wrap="square" tIns="34275">
+          <a:bodyPr anchorCtr="0" anchor="ctr" bIns="34275" lIns="68575" spcFirstLastPara="1" rIns="68575" wrap="square" tIns="34275">
             <a:noAutofit/>
           </a:bodyPr>
           <a:lstStyle/>
           <a:p>
-            <a:pPr indent="0" lvl="0" marL="0" marR="0" rtl="0" algn="l">
-              <a:spcBef>
-                <a:spcPts val="0"/>
-              </a:spcBef>
-              <a:spcAft>
-                <a:spcPts val="0"/>
-              </a:spcAft>
-              <a:buNone/>
-            </a:pPr>
-            <a:r>
-              <a:t/>
-            </a:r>
-            <a:endParaRPr sz="1400">
+            <a:pPr indent="0" lvl="0" marL="0" marR="0" rtl="0" algn="ctr">
+              <a:spcBef>
+                <a:spcPts val="0"/>
+              </a:spcBef>
+              <a:spcAft>
+                <a:spcPts val="0"/>
+              </a:spcAft>
+              <a:buClr>
+                <a:srgbClr val="02C39A"/>
+              </a:buClr>
+              <a:buSzPts val="1700"/>
+              <a:buFont typeface="Calibri"/>
+              <a:buNone/>
+            </a:pPr>
+            <a:r>
+              <a:rPr b="1" lang="en" sz="2400">
+                <a:solidFill>
+                  <a:srgbClr val="02C39A"/>
+                </a:solidFill>
+                <a:latin typeface="Calibri"/>
+                <a:ea typeface="Calibri"/>
+                <a:cs typeface="Calibri"/>
+                <a:sym typeface="Calibri"/>
+              </a:rPr>
+              <a:t>Deployment</a:t>
+            </a:r>
+            <a:endParaRPr sz="2400">
               <a:solidFill>
-                <a:schemeClr val="dk1"/>
+                <a:srgbClr val="02C39A"/>
               </a:solidFill>
               <a:latin typeface="Calibri"/>
               <a:ea typeface="Calibri"/>
@@ -13764,16 +13616,426 @@
           </a:p>
         </p:txBody>
       </p:sp>
-      <p:sp>
-        <p:nvSpPr>
-          <p:cNvPr id="248" name="Google Shape;248;p26"/>
-          <p:cNvSpPr/>
+      <p:grpSp>
+        <p:nvGrpSpPr>
+          <p:cNvPr id="250" name="Google Shape;250;p26"/>
+          <p:cNvGrpSpPr/>
           <p:nvPr/>
-        </p:nvSpPr>
-        <p:spPr>
-          <a:xfrm>
-            <a:off x="685800" y="2057400"/>
-            <a:ext cx="3634740" cy="342900"/>
+        </p:nvGrpSpPr>
+        <p:grpSpPr>
+          <a:xfrm>
+            <a:off x="308510" y="208215"/>
+            <a:ext cx="4080600" cy="2400300"/>
+            <a:chOff x="480060" y="1920240"/>
+            <a:chExt cx="4080600" cy="2400300"/>
+          </a:xfrm>
+        </p:grpSpPr>
+        <p:sp>
+          <p:nvSpPr>
+            <p:cNvPr id="251" name="Google Shape;251;p26"/>
+            <p:cNvSpPr/>
+            <p:nvPr/>
+          </p:nvSpPr>
+          <p:spPr>
+            <a:xfrm>
+              <a:off x="480060" y="1920240"/>
+              <a:ext cx="4080600" cy="2400300"/>
+            </a:xfrm>
+            <a:prstGeom prst="round2DiagRect">
+              <a:avLst>
+                <a:gd fmla="val 16667" name="adj1"/>
+                <a:gd fmla="val 0" name="adj2"/>
+              </a:avLst>
+            </a:prstGeom>
+            <a:solidFill>
+              <a:srgbClr val="12484F"/>
+            </a:solidFill>
+            <a:ln>
+              <a:noFill/>
+            </a:ln>
+          </p:spPr>
+          <p:txBody>
+            <a:bodyPr anchorCtr="0" anchor="t" bIns="34275" lIns="68575" spcFirstLastPara="1" rIns="68575" wrap="square" tIns="34275">
+              <a:noAutofit/>
+            </a:bodyPr>
+            <a:lstStyle/>
+            <a:p>
+              <a:pPr indent="0" lvl="0" marL="0" marR="0" rtl="0" algn="l">
+                <a:spcBef>
+                  <a:spcPts val="0"/>
+                </a:spcBef>
+                <a:spcAft>
+                  <a:spcPts val="0"/>
+                </a:spcAft>
+                <a:buNone/>
+              </a:pPr>
+              <a:r>
+                <a:t/>
+              </a:r>
+              <a:endParaRPr sz="1400">
+                <a:solidFill>
+                  <a:schemeClr val="dk1"/>
+                </a:solidFill>
+                <a:latin typeface="Calibri"/>
+                <a:ea typeface="Calibri"/>
+                <a:cs typeface="Calibri"/>
+                <a:sym typeface="Calibri"/>
+              </a:endParaRPr>
+            </a:p>
+          </p:txBody>
+        </p:sp>
+        <p:sp>
+          <p:nvSpPr>
+            <p:cNvPr id="252" name="Google Shape;252;p26"/>
+            <p:cNvSpPr/>
+            <p:nvPr/>
+          </p:nvSpPr>
+          <p:spPr>
+            <a:xfrm>
+              <a:off x="685800" y="2057400"/>
+              <a:ext cx="3634740" cy="342900"/>
+            </a:xfrm>
+            <a:prstGeom prst="round2DiagRect">
+              <a:avLst>
+                <a:gd fmla="val 16667" name="adj1"/>
+                <a:gd fmla="val 0" name="adj2"/>
+              </a:avLst>
+            </a:prstGeom>
+            <a:noFill/>
+            <a:ln>
+              <a:noFill/>
+            </a:ln>
+          </p:spPr>
+          <p:txBody>
+            <a:bodyPr anchorCtr="0" anchor="ctr" bIns="34275" lIns="68575" spcFirstLastPara="1" rIns="68575" wrap="square" tIns="34275">
+              <a:noAutofit/>
+            </a:bodyPr>
+            <a:lstStyle/>
+            <a:p>
+              <a:pPr indent="0" lvl="0" marL="0" marR="0" rtl="0" algn="l">
+                <a:spcBef>
+                  <a:spcPts val="0"/>
+                </a:spcBef>
+                <a:spcAft>
+                  <a:spcPts val="0"/>
+                </a:spcAft>
+                <a:buClr>
+                  <a:srgbClr val="02C39A"/>
+                </a:buClr>
+                <a:buSzPts val="1300"/>
+                <a:buFont typeface="Calibri"/>
+                <a:buNone/>
+              </a:pPr>
+              <a:r>
+                <a:rPr b="1" lang="en" sz="1300">
+                  <a:solidFill>
+                    <a:srgbClr val="FFB4A8"/>
+                  </a:solidFill>
+                  <a:latin typeface="Calibri"/>
+                  <a:ea typeface="Calibri"/>
+                  <a:cs typeface="Calibri"/>
+                  <a:sym typeface="Calibri"/>
+                </a:rPr>
+                <a:t>Why we keep the app simple…</a:t>
+              </a:r>
+              <a:endParaRPr sz="1300">
+                <a:solidFill>
+                  <a:srgbClr val="FFB4A8"/>
+                </a:solidFill>
+                <a:latin typeface="Calibri"/>
+                <a:ea typeface="Calibri"/>
+                <a:cs typeface="Calibri"/>
+                <a:sym typeface="Calibri"/>
+              </a:endParaRPr>
+            </a:p>
+          </p:txBody>
+        </p:sp>
+        <p:sp>
+          <p:nvSpPr>
+            <p:cNvPr id="253" name="Google Shape;253;p26"/>
+            <p:cNvSpPr/>
+            <p:nvPr/>
+          </p:nvSpPr>
+          <p:spPr>
+            <a:xfrm>
+              <a:off x="685800" y="2468880"/>
+              <a:ext cx="3669030" cy="1714500"/>
+            </a:xfrm>
+            <a:prstGeom prst="round2DiagRect">
+              <a:avLst>
+                <a:gd fmla="val 16667" name="adj1"/>
+                <a:gd fmla="val 0" name="adj2"/>
+              </a:avLst>
+            </a:prstGeom>
+            <a:noFill/>
+            <a:ln>
+              <a:noFill/>
+            </a:ln>
+          </p:spPr>
+          <p:txBody>
+            <a:bodyPr anchorCtr="0" anchor="t" bIns="34275" lIns="68575" spcFirstLastPara="1" rIns="68575" wrap="square" tIns="34275">
+              <a:noAutofit/>
+            </a:bodyPr>
+            <a:lstStyle/>
+            <a:p>
+              <a:pPr indent="0" lvl="0" marL="0" marR="0" rtl="0" algn="l">
+                <a:spcBef>
+                  <a:spcPts val="0"/>
+                </a:spcBef>
+                <a:spcAft>
+                  <a:spcPts val="0"/>
+                </a:spcAft>
+                <a:buClr>
+                  <a:srgbClr val="E6F2F1"/>
+                </a:buClr>
+                <a:buSzPts val="1100"/>
+                <a:buFont typeface="Calibri"/>
+                <a:buNone/>
+              </a:pPr>
+              <a:r>
+                <a:rPr lang="en" sz="1100">
+                  <a:solidFill>
+                    <a:srgbClr val="E6F2F1"/>
+                  </a:solidFill>
+                  <a:latin typeface="Calibri"/>
+                  <a:ea typeface="Calibri"/>
+                  <a:cs typeface="Calibri"/>
+                  <a:sym typeface="Calibri"/>
+                </a:rPr>
+                <a:t>Every feature maps to a result we validated. We ship the two things that work, the PMR checker and the address search, and we refuse to ship US sidewalk prediction, because we tested that model and it has no signal. Fewer moving parts also means fewer failure points for the people who rely on the answer.</a:t>
+              </a:r>
+              <a:endParaRPr sz="1100">
+                <a:solidFill>
+                  <a:schemeClr val="dk1"/>
+                </a:solidFill>
+                <a:latin typeface="Calibri"/>
+                <a:ea typeface="Calibri"/>
+                <a:cs typeface="Calibri"/>
+                <a:sym typeface="Calibri"/>
+              </a:endParaRPr>
+            </a:p>
+          </p:txBody>
+        </p:sp>
+      </p:grpSp>
+      <p:grpSp>
+        <p:nvGrpSpPr>
+          <p:cNvPr id="254" name="Google Shape;254;p26"/>
+          <p:cNvGrpSpPr/>
+          <p:nvPr/>
+        </p:nvGrpSpPr>
+        <p:grpSpPr>
+          <a:xfrm>
+            <a:off x="308548" y="2411490"/>
+            <a:ext cx="4080510" cy="2400300"/>
+            <a:chOff x="4766310" y="1920240"/>
+            <a:chExt cx="4080510" cy="2400300"/>
+          </a:xfrm>
+        </p:grpSpPr>
+        <p:sp>
+          <p:nvSpPr>
+            <p:cNvPr id="255" name="Google Shape;255;p26"/>
+            <p:cNvSpPr/>
+            <p:nvPr/>
+          </p:nvSpPr>
+          <p:spPr>
+            <a:xfrm>
+              <a:off x="4766310" y="1920240"/>
+              <a:ext cx="4080510" cy="2400300"/>
+            </a:xfrm>
+            <a:prstGeom prst="round2DiagRect">
+              <a:avLst>
+                <a:gd fmla="val 16667" name="adj1"/>
+                <a:gd fmla="val 0" name="adj2"/>
+              </a:avLst>
+            </a:prstGeom>
+            <a:solidFill>
+              <a:srgbClr val="12484F"/>
+            </a:solidFill>
+            <a:ln>
+              <a:noFill/>
+            </a:ln>
+          </p:spPr>
+          <p:txBody>
+            <a:bodyPr anchorCtr="0" anchor="t" bIns="34275" lIns="68575" spcFirstLastPara="1" rIns="68575" wrap="square" tIns="34275">
+              <a:noAutofit/>
+            </a:bodyPr>
+            <a:lstStyle/>
+            <a:p>
+              <a:pPr indent="0" lvl="0" marL="0" marR="0" rtl="0" algn="l">
+                <a:spcBef>
+                  <a:spcPts val="0"/>
+                </a:spcBef>
+                <a:spcAft>
+                  <a:spcPts val="0"/>
+                </a:spcAft>
+                <a:buNone/>
+              </a:pPr>
+              <a:r>
+                <a:t/>
+              </a:r>
+              <a:endParaRPr sz="1400">
+                <a:solidFill>
+                  <a:schemeClr val="dk1"/>
+                </a:solidFill>
+                <a:latin typeface="Calibri"/>
+                <a:ea typeface="Calibri"/>
+                <a:cs typeface="Calibri"/>
+                <a:sym typeface="Calibri"/>
+              </a:endParaRPr>
+            </a:p>
+          </p:txBody>
+        </p:sp>
+        <p:sp>
+          <p:nvSpPr>
+            <p:cNvPr id="256" name="Google Shape;256;p26"/>
+            <p:cNvSpPr/>
+            <p:nvPr/>
+          </p:nvSpPr>
+          <p:spPr>
+            <a:xfrm>
+              <a:off x="4972050" y="2057400"/>
+              <a:ext cx="3634740" cy="342900"/>
+            </a:xfrm>
+            <a:prstGeom prst="round2DiagRect">
+              <a:avLst>
+                <a:gd fmla="val 16667" name="adj1"/>
+                <a:gd fmla="val 0" name="adj2"/>
+              </a:avLst>
+            </a:prstGeom>
+            <a:noFill/>
+            <a:ln>
+              <a:noFill/>
+            </a:ln>
+          </p:spPr>
+          <p:txBody>
+            <a:bodyPr anchorCtr="0" anchor="ctr" bIns="34275" lIns="68575" spcFirstLastPara="1" rIns="68575" wrap="square" tIns="34275">
+              <a:noAutofit/>
+            </a:bodyPr>
+            <a:lstStyle/>
+            <a:p>
+              <a:pPr indent="0" lvl="0" marL="0" marR="0" rtl="0" algn="l">
+                <a:spcBef>
+                  <a:spcPts val="0"/>
+                </a:spcBef>
+                <a:spcAft>
+                  <a:spcPts val="0"/>
+                </a:spcAft>
+                <a:buClr>
+                  <a:srgbClr val="02C39A"/>
+                </a:buClr>
+                <a:buSzPts val="1300"/>
+                <a:buFont typeface="Calibri"/>
+                <a:buNone/>
+              </a:pPr>
+              <a:r>
+                <a:rPr b="1" lang="en" sz="1300">
+                  <a:solidFill>
+                    <a:srgbClr val="FFB4A8"/>
+                  </a:solidFill>
+                  <a:latin typeface="Calibri"/>
+                  <a:ea typeface="Calibri"/>
+                  <a:cs typeface="Calibri"/>
+                  <a:sym typeface="Calibri"/>
+                </a:rPr>
+                <a:t>How reliable is it…</a:t>
+              </a:r>
+              <a:endParaRPr sz="1300">
+                <a:solidFill>
+                  <a:srgbClr val="FFB4A8"/>
+                </a:solidFill>
+                <a:latin typeface="Calibri"/>
+                <a:ea typeface="Calibri"/>
+                <a:cs typeface="Calibri"/>
+                <a:sym typeface="Calibri"/>
+              </a:endParaRPr>
+            </a:p>
+          </p:txBody>
+        </p:sp>
+        <p:sp>
+          <p:nvSpPr>
+            <p:cNvPr id="257" name="Google Shape;257;p26"/>
+            <p:cNvSpPr/>
+            <p:nvPr/>
+          </p:nvSpPr>
+          <p:spPr>
+            <a:xfrm>
+              <a:off x="4972050" y="2468880"/>
+              <a:ext cx="3669030" cy="1714500"/>
+            </a:xfrm>
+            <a:prstGeom prst="round2DiagRect">
+              <a:avLst>
+                <a:gd fmla="val 16667" name="adj1"/>
+                <a:gd fmla="val 0" name="adj2"/>
+              </a:avLst>
+            </a:prstGeom>
+            <a:noFill/>
+            <a:ln>
+              <a:noFill/>
+            </a:ln>
+          </p:spPr>
+          <p:txBody>
+            <a:bodyPr anchorCtr="0" anchor="t" bIns="34275" lIns="68575" spcFirstLastPara="1" rIns="68575" wrap="square" tIns="34275">
+              <a:noAutofit/>
+            </a:bodyPr>
+            <a:lstStyle/>
+            <a:p>
+              <a:pPr indent="0" lvl="0" marL="0" marR="0" rtl="0" algn="l">
+                <a:spcBef>
+                  <a:spcPts val="0"/>
+                </a:spcBef>
+                <a:spcAft>
+                  <a:spcPts val="0"/>
+                </a:spcAft>
+                <a:buClr>
+                  <a:srgbClr val="E6F2F1"/>
+                </a:buClr>
+                <a:buSzPts val="1100"/>
+                <a:buFont typeface="Calibri"/>
+                <a:buNone/>
+              </a:pPr>
+              <a:r>
+                <a:rPr lang="en" sz="1100">
+                  <a:solidFill>
+                    <a:srgbClr val="E6F2F1"/>
+                  </a:solidFill>
+                  <a:latin typeface="Calibri"/>
+                  <a:ea typeface="Calibri"/>
+                  <a:cs typeface="Calibri"/>
+                  <a:sym typeface="Calibri"/>
+                </a:rPr>
+                <a:t>Confidence now comes with an explanation: it’s the share of the forest’s trees voting for that label, shown with the factors that drove the call. Inputs are range-checked, missing curb heights use the same fill value as training, and every known limit is stated inside the app itself.</a:t>
+              </a:r>
+              <a:endParaRPr sz="1100">
+                <a:solidFill>
+                  <a:schemeClr val="dk1"/>
+                </a:solidFill>
+                <a:latin typeface="Calibri"/>
+                <a:ea typeface="Calibri"/>
+                <a:cs typeface="Calibri"/>
+                <a:sym typeface="Calibri"/>
+              </a:endParaRPr>
+            </a:p>
+          </p:txBody>
+        </p:sp>
+      </p:grpSp>
+      <p:pic>
+        <p:nvPicPr>
+          <p:cNvPr id="258" name="Google Shape;258;p26"/>
+          <p:cNvPicPr preferRelativeResize="0"/>
+          <p:nvPr/>
+        </p:nvPicPr>
+        <p:blipFill>
+          <a:blip r:embed="rId3">
+            <a:alphaModFix/>
+          </a:blip>
+          <a:stretch>
+            <a:fillRect/>
+          </a:stretch>
+        </p:blipFill>
+        <p:spPr>
+          <a:xfrm>
+            <a:off x="4536448" y="967675"/>
+            <a:ext cx="4495850" cy="3461250"/>
           </a:xfrm>
           <a:prstGeom prst="rect">
             <a:avLst/>
@@ -13783,292 +14045,7 @@
             <a:noFill/>
           </a:ln>
         </p:spPr>
-        <p:txBody>
-          <a:bodyPr anchorCtr="0" anchor="ctr" bIns="34275" lIns="68575" spcFirstLastPara="1" rIns="68575" wrap="square" tIns="34275">
-            <a:noAutofit/>
-          </a:bodyPr>
-          <a:lstStyle/>
-          <a:p>
-            <a:pPr indent="0" lvl="0" marL="0" marR="0" rtl="0" algn="l">
-              <a:spcBef>
-                <a:spcPts val="0"/>
-              </a:spcBef>
-              <a:spcAft>
-                <a:spcPts val="0"/>
-              </a:spcAft>
-              <a:buClr>
-                <a:srgbClr val="02C39A"/>
-              </a:buClr>
-              <a:buSzPts val="1300"/>
-              <a:buFont typeface="Calibri"/>
-              <a:buNone/>
-            </a:pPr>
-            <a:r>
-              <a:rPr b="1" lang="en" sz="1300">
-                <a:solidFill>
-                  <a:srgbClr val="02C39A"/>
-                </a:solidFill>
-                <a:latin typeface="Calibri"/>
-                <a:ea typeface="Calibri"/>
-                <a:cs typeface="Calibri"/>
-                <a:sym typeface="Calibri"/>
-              </a:rPr>
-              <a:t>Why we keep the app simple…</a:t>
-            </a:r>
-            <a:endParaRPr sz="1300">
-              <a:solidFill>
-                <a:schemeClr val="dk1"/>
-              </a:solidFill>
-              <a:latin typeface="Calibri"/>
-              <a:ea typeface="Calibri"/>
-              <a:cs typeface="Calibri"/>
-              <a:sym typeface="Calibri"/>
-            </a:endParaRPr>
-          </a:p>
-        </p:txBody>
-      </p:sp>
-      <p:sp>
-        <p:nvSpPr>
-          <p:cNvPr id="249" name="Google Shape;249;p26"/>
-          <p:cNvSpPr/>
-          <p:nvPr/>
-        </p:nvSpPr>
-        <p:spPr>
-          <a:xfrm>
-            <a:off x="685800" y="2468880"/>
-            <a:ext cx="3669030" cy="1714500"/>
-          </a:xfrm>
-          <a:prstGeom prst="rect">
-            <a:avLst/>
-          </a:prstGeom>
-          <a:noFill/>
-          <a:ln>
-            <a:noFill/>
-          </a:ln>
-        </p:spPr>
-        <p:txBody>
-          <a:bodyPr anchorCtr="0" anchor="t" bIns="34275" lIns="68575" spcFirstLastPara="1" rIns="68575" wrap="square" tIns="34275">
-            <a:noAutofit/>
-          </a:bodyPr>
-          <a:lstStyle/>
-          <a:p>
-            <a:pPr indent="0" lvl="0" marL="0" marR="0" rtl="0" algn="l">
-              <a:spcBef>
-                <a:spcPts val="0"/>
-              </a:spcBef>
-              <a:spcAft>
-                <a:spcPts val="0"/>
-              </a:spcAft>
-              <a:buClr>
-                <a:srgbClr val="E6F2F1"/>
-              </a:buClr>
-              <a:buSzPts val="1100"/>
-              <a:buFont typeface="Calibri"/>
-              <a:buNone/>
-            </a:pPr>
-            <a:r>
-              <a:rPr lang="en" sz="1100">
-                <a:solidFill>
-                  <a:srgbClr val="E6F2F1"/>
-                </a:solidFill>
-                <a:latin typeface="Calibri"/>
-                <a:ea typeface="Calibri"/>
-                <a:cs typeface="Calibri"/>
-                <a:sym typeface="Calibri"/>
-              </a:rPr>
-              <a:t>Every feature maps to a result we validated. We ship the two things that work — the PMR checker and the address search — and we refuse to ship US sidewalk prediction, because we tested that model and it has no signal. Fewer moving parts also means fewer failure points for the people who rely on the answer.</a:t>
-            </a:r>
-            <a:endParaRPr sz="1100">
-              <a:solidFill>
-                <a:schemeClr val="dk1"/>
-              </a:solidFill>
-              <a:latin typeface="Calibri"/>
-              <a:ea typeface="Calibri"/>
-              <a:cs typeface="Calibri"/>
-              <a:sym typeface="Calibri"/>
-            </a:endParaRPr>
-          </a:p>
-        </p:txBody>
-      </p:sp>
-      <p:sp>
-        <p:nvSpPr>
-          <p:cNvPr id="250" name="Google Shape;250;p26"/>
-          <p:cNvSpPr/>
-          <p:nvPr/>
-        </p:nvSpPr>
-        <p:spPr>
-          <a:xfrm>
-            <a:off x="4766310" y="1920240"/>
-            <a:ext cx="4080510" cy="2400300"/>
-          </a:xfrm>
-          <a:prstGeom prst="roundRect">
-            <a:avLst>
-              <a:gd fmla="val 3429" name="adj"/>
-            </a:avLst>
-          </a:prstGeom>
-          <a:solidFill>
-            <a:srgbClr val="12484F"/>
-          </a:solidFill>
-          <a:ln>
-            <a:noFill/>
-          </a:ln>
-        </p:spPr>
-        <p:txBody>
-          <a:bodyPr anchorCtr="0" anchor="t" bIns="34275" lIns="68575" spcFirstLastPara="1" rIns="68575" wrap="square" tIns="34275">
-            <a:noAutofit/>
-          </a:bodyPr>
-          <a:lstStyle/>
-          <a:p>
-            <a:pPr indent="0" lvl="0" marL="0" marR="0" rtl="0" algn="l">
-              <a:spcBef>
-                <a:spcPts val="0"/>
-              </a:spcBef>
-              <a:spcAft>
-                <a:spcPts val="0"/>
-              </a:spcAft>
-              <a:buNone/>
-            </a:pPr>
-            <a:r>
-              <a:t/>
-            </a:r>
-            <a:endParaRPr sz="1400">
-              <a:solidFill>
-                <a:schemeClr val="dk1"/>
-              </a:solidFill>
-              <a:latin typeface="Calibri"/>
-              <a:ea typeface="Calibri"/>
-              <a:cs typeface="Calibri"/>
-              <a:sym typeface="Calibri"/>
-            </a:endParaRPr>
-          </a:p>
-        </p:txBody>
-      </p:sp>
-      <p:sp>
-        <p:nvSpPr>
-          <p:cNvPr id="251" name="Google Shape;251;p26"/>
-          <p:cNvSpPr/>
-          <p:nvPr/>
-        </p:nvSpPr>
-        <p:spPr>
-          <a:xfrm>
-            <a:off x="4972050" y="2057400"/>
-            <a:ext cx="3634740" cy="342900"/>
-          </a:xfrm>
-          <a:prstGeom prst="rect">
-            <a:avLst/>
-          </a:prstGeom>
-          <a:noFill/>
-          <a:ln>
-            <a:noFill/>
-          </a:ln>
-        </p:spPr>
-        <p:txBody>
-          <a:bodyPr anchorCtr="0" anchor="ctr" bIns="34275" lIns="68575" spcFirstLastPara="1" rIns="68575" wrap="square" tIns="34275">
-            <a:noAutofit/>
-          </a:bodyPr>
-          <a:lstStyle/>
-          <a:p>
-            <a:pPr indent="0" lvl="0" marL="0" marR="0" rtl="0" algn="l">
-              <a:spcBef>
-                <a:spcPts val="0"/>
-              </a:spcBef>
-              <a:spcAft>
-                <a:spcPts val="0"/>
-              </a:spcAft>
-              <a:buClr>
-                <a:srgbClr val="02C39A"/>
-              </a:buClr>
-              <a:buSzPts val="1300"/>
-              <a:buFont typeface="Calibri"/>
-              <a:buNone/>
-            </a:pPr>
-            <a:r>
-              <a:rPr b="1" lang="en" sz="1300">
-                <a:solidFill>
-                  <a:srgbClr val="02C39A"/>
-                </a:solidFill>
-                <a:latin typeface="Calibri"/>
-                <a:ea typeface="Calibri"/>
-                <a:cs typeface="Calibri"/>
-                <a:sym typeface="Calibri"/>
-              </a:rPr>
-              <a:t>How reliable is it…</a:t>
-            </a:r>
-            <a:endParaRPr sz="1300">
-              <a:solidFill>
-                <a:schemeClr val="dk1"/>
-              </a:solidFill>
-              <a:latin typeface="Calibri"/>
-              <a:ea typeface="Calibri"/>
-              <a:cs typeface="Calibri"/>
-              <a:sym typeface="Calibri"/>
-            </a:endParaRPr>
-          </a:p>
-        </p:txBody>
-      </p:sp>
-      <p:sp>
-        <p:nvSpPr>
-          <p:cNvPr id="252" name="Google Shape;252;p26"/>
-          <p:cNvSpPr/>
-          <p:nvPr/>
-        </p:nvSpPr>
-        <p:spPr>
-          <a:xfrm>
-            <a:off x="4972050" y="2468880"/>
-            <a:ext cx="3669030" cy="1714500"/>
-          </a:xfrm>
-          <a:prstGeom prst="rect">
-            <a:avLst/>
-          </a:prstGeom>
-          <a:noFill/>
-          <a:ln>
-            <a:noFill/>
-          </a:ln>
-        </p:spPr>
-        <p:txBody>
-          <a:bodyPr anchorCtr="0" anchor="t" bIns="34275" lIns="68575" spcFirstLastPara="1" rIns="68575" wrap="square" tIns="34275">
-            <a:noAutofit/>
-          </a:bodyPr>
-          <a:lstStyle/>
-          <a:p>
-            <a:pPr indent="0" lvl="0" marL="0" marR="0" rtl="0" algn="l">
-              <a:spcBef>
-                <a:spcPts val="0"/>
-              </a:spcBef>
-              <a:spcAft>
-                <a:spcPts val="0"/>
-              </a:spcAft>
-              <a:buClr>
-                <a:srgbClr val="E6F2F1"/>
-              </a:buClr>
-              <a:buSzPts val="1100"/>
-              <a:buFont typeface="Calibri"/>
-              <a:buNone/>
-            </a:pPr>
-            <a:r>
-              <a:rPr lang="en" sz="1100">
-                <a:solidFill>
-                  <a:srgbClr val="E6F2F1"/>
-                </a:solidFill>
-                <a:latin typeface="Calibri"/>
-                <a:ea typeface="Calibri"/>
-                <a:cs typeface="Calibri"/>
-                <a:sym typeface="Calibri"/>
-              </a:rPr>
-              <a:t>Confidence now comes with an explanation: it’s the share of the forest’s trees voting for that label, shown with the factors that drove the call. Inputs are range-checked, missing curb heights use the same fill value as training, and every known limit is stated inside the app itself.</a:t>
-            </a:r>
-            <a:endParaRPr sz="1100">
-              <a:solidFill>
-                <a:schemeClr val="dk1"/>
-              </a:solidFill>
-              <a:latin typeface="Calibri"/>
-              <a:ea typeface="Calibri"/>
-              <a:cs typeface="Calibri"/>
-              <a:sym typeface="Calibri"/>
-            </a:endParaRPr>
-          </a:p>
-        </p:txBody>
-      </p:sp>
+      </p:pic>
     </p:spTree>
   </p:cSld>
   <p:clrMapOvr>
@@ -14094,7 +14071,7 @@
     </p:bg>
     <p:spTree>
       <p:nvGrpSpPr>
-        <p:cNvPr id="257" name="Shape 257"/>
+        <p:cNvPr id="263" name="Shape 263"/>
         <p:cNvGrpSpPr/>
         <p:nvPr/>
       </p:nvGrpSpPr>
@@ -14108,7 +14085,7 @@
       </p:grpSpPr>
       <p:sp>
         <p:nvSpPr>
-          <p:cNvPr id="258" name="Google Shape;258;p27"/>
+          <p:cNvPr id="264" name="Google Shape;264;p27"/>
           <p:cNvSpPr/>
           <p:nvPr/>
         </p:nvSpPr>
@@ -14155,7 +14132,7 @@
                 <a:cs typeface="Cambria"/>
                 <a:sym typeface="Cambria"/>
               </a:rPr>
-              <a:t>Impact — Both Sides</a:t>
+              <a:t>Impact - Both Sides</a:t>
             </a:r>
             <a:endParaRPr sz="3000">
               <a:solidFill>
@@ -14171,7 +14148,7 @@
       </p:sp>
       <p:sp>
         <p:nvSpPr>
-          <p:cNvPr id="259" name="Google Shape;259;p27"/>
+          <p:cNvPr id="265" name="Google Shape;265;p27"/>
           <p:cNvSpPr/>
           <p:nvPr/>
         </p:nvSpPr>
@@ -14224,7 +14201,7 @@
       </p:sp>
       <p:sp>
         <p:nvSpPr>
-          <p:cNvPr id="260" name="Google Shape;260;p27"/>
+          <p:cNvPr id="266" name="Google Shape;266;p27"/>
           <p:cNvSpPr/>
           <p:nvPr/>
         </p:nvSpPr>
@@ -14275,7 +14252,7 @@
       </p:sp>
       <p:pic>
         <p:nvPicPr>
-          <p:cNvPr descr="preencoded.png" id="261" name="Google Shape;261;p27"/>
+          <p:cNvPr descr="preencoded.png" id="267" name="Google Shape;267;p27"/>
           <p:cNvPicPr preferRelativeResize="0"/>
           <p:nvPr/>
         </p:nvPicPr>
@@ -14302,7 +14279,7 @@
       </p:pic>
       <p:sp>
         <p:nvSpPr>
-          <p:cNvPr id="262" name="Google Shape;262;p27"/>
+          <p:cNvPr id="268" name="Google Shape;268;p27"/>
           <p:cNvSpPr/>
           <p:nvPr/>
         </p:nvSpPr>
@@ -14365,7 +14342,7 @@
       </p:sp>
       <p:sp>
         <p:nvSpPr>
-          <p:cNvPr id="263" name="Google Shape;263;p27"/>
+          <p:cNvPr id="269" name="Google Shape;269;p27"/>
           <p:cNvSpPr/>
           <p:nvPr/>
         </p:nvSpPr>
@@ -14502,7 +14479,7 @@
       </p:sp>
       <p:sp>
         <p:nvSpPr>
-          <p:cNvPr id="264" name="Google Shape;264;p27"/>
+          <p:cNvPr id="270" name="Google Shape;270;p27"/>
           <p:cNvSpPr/>
           <p:nvPr/>
         </p:nvSpPr>
@@ -14555,7 +14532,7 @@
       </p:sp>
       <p:sp>
         <p:nvSpPr>
-          <p:cNvPr id="265" name="Google Shape;265;p27"/>
+          <p:cNvPr id="271" name="Google Shape;271;p27"/>
           <p:cNvSpPr/>
           <p:nvPr/>
         </p:nvSpPr>
@@ -14606,7 +14583,7 @@
       </p:sp>
       <p:pic>
         <p:nvPicPr>
-          <p:cNvPr descr="preencoded.png" id="266" name="Google Shape;266;p27"/>
+          <p:cNvPr descr="preencoded.png" id="272" name="Google Shape;272;p27"/>
           <p:cNvPicPr preferRelativeResize="0"/>
           <p:nvPr/>
         </p:nvPicPr>
@@ -14633,7 +14610,7 @@
       </p:pic>
       <p:sp>
         <p:nvSpPr>
-          <p:cNvPr id="267" name="Google Shape;267;p27"/>
+          <p:cNvPr id="273" name="Google Shape;273;p27"/>
           <p:cNvSpPr/>
           <p:nvPr/>
         </p:nvSpPr>
@@ -14696,7 +14673,7 @@
       </p:sp>
       <p:sp>
         <p:nvSpPr>
-          <p:cNvPr id="268" name="Google Shape;268;p27"/>
+          <p:cNvPr id="274" name="Google Shape;274;p27"/>
           <p:cNvSpPr/>
           <p:nvPr/>
         </p:nvSpPr>
@@ -14743,7 +14720,7 @@
                 <a:cs typeface="Calibri"/>
                 <a:sym typeface="Calibri"/>
               </a:rPr>
-              <a:t>A biased model could systematically mislabel whole regions — exactly what our Housing model did before the fix</a:t>
+              <a:t>A biased model could systematically mislabel whole regions  exactly what our Housing model did before the fix</a:t>
             </a:r>
             <a:endParaRPr sz="1100">
               <a:solidFill>
@@ -14851,7 +14828,7 @@
     </p:bg>
     <p:spTree>
       <p:nvGrpSpPr>
-        <p:cNvPr id="273" name="Shape 273"/>
+        <p:cNvPr id="279" name="Shape 279"/>
         <p:cNvGrpSpPr/>
         <p:nvPr/>
       </p:nvGrpSpPr>
@@ -14865,7 +14842,7 @@
       </p:grpSpPr>
       <p:sp>
         <p:nvSpPr>
-          <p:cNvPr id="274" name="Google Shape;274;p28"/>
+          <p:cNvPr id="280" name="Google Shape;280;p28"/>
           <p:cNvSpPr/>
           <p:nvPr/>
         </p:nvSpPr>
@@ -14928,7 +14905,7 @@
       </p:sp>
       <p:sp>
         <p:nvSpPr>
-          <p:cNvPr id="275" name="Google Shape;275;p28"/>
+          <p:cNvPr id="281" name="Google Shape;281;p28"/>
           <p:cNvSpPr/>
           <p:nvPr/>
         </p:nvSpPr>
@@ -14991,7 +14968,7 @@
       </p:sp>
       <p:sp>
         <p:nvSpPr>
-          <p:cNvPr id="276" name="Google Shape;276;p28"/>
+          <p:cNvPr id="282" name="Google Shape;282;p28"/>
           <p:cNvSpPr/>
           <p:nvPr/>
         </p:nvSpPr>
@@ -15044,7 +15021,7 @@
       </p:sp>
       <p:sp>
         <p:nvSpPr>
-          <p:cNvPr id="277" name="Google Shape;277;p28"/>
+          <p:cNvPr id="283" name="Google Shape;283;p28"/>
           <p:cNvSpPr/>
           <p:nvPr/>
         </p:nvSpPr>
@@ -15107,7 +15084,7 @@
       </p:sp>
       <p:sp>
         <p:nvSpPr>
-          <p:cNvPr id="278" name="Google Shape;278;p28"/>
+          <p:cNvPr id="284" name="Google Shape;284;p28"/>
           <p:cNvSpPr/>
           <p:nvPr/>
         </p:nvSpPr>
@@ -15170,7 +15147,7 @@
       </p:sp>
       <p:sp>
         <p:nvSpPr>
-          <p:cNvPr id="279" name="Google Shape;279;p28"/>
+          <p:cNvPr id="285" name="Google Shape;285;p28"/>
           <p:cNvSpPr/>
           <p:nvPr/>
         </p:nvSpPr>
@@ -15223,7 +15200,7 @@
       </p:sp>
       <p:sp>
         <p:nvSpPr>
-          <p:cNvPr id="280" name="Google Shape;280;p28"/>
+          <p:cNvPr id="286" name="Google Shape;286;p28"/>
           <p:cNvSpPr/>
           <p:nvPr/>
         </p:nvSpPr>
@@ -15286,7 +15263,7 @@
       </p:sp>
       <p:sp>
         <p:nvSpPr>
-          <p:cNvPr id="281" name="Google Shape;281;p28"/>
+          <p:cNvPr id="287" name="Google Shape;287;p28"/>
           <p:cNvSpPr/>
           <p:nvPr/>
         </p:nvSpPr>
@@ -15333,7 +15310,7 @@
                 <a:cs typeface="Calibri"/>
                 <a:sym typeface="Calibri"/>
               </a:rPr>
-              <a:t>we audited feature importance, removed the proxy, retested, and reported the honest null result instead of a prettier number. The same ML process that created the bias also gave us the tools to catch it — if we chose to look.</a:t>
+              <a:t>we audited feature importance, removed the proxy, retested, and reported the honest null result instead of a prettier number. The same ML process that created the bias also gave us the tools to catch it  if we chose to look.</a:t>
             </a:r>
             <a:endParaRPr sz="1100">
               <a:solidFill>
@@ -15372,7 +15349,7 @@
     </p:bg>
     <p:spTree>
       <p:nvGrpSpPr>
-        <p:cNvPr id="286" name="Shape 286"/>
+        <p:cNvPr id="292" name="Shape 292"/>
         <p:cNvGrpSpPr/>
         <p:nvPr/>
       </p:nvGrpSpPr>
@@ -15386,7 +15363,7 @@
       </p:grpSpPr>
       <p:sp>
         <p:nvSpPr>
-          <p:cNvPr id="287" name="Google Shape;287;p29"/>
+          <p:cNvPr id="293" name="Google Shape;293;p29"/>
           <p:cNvSpPr/>
           <p:nvPr/>
         </p:nvSpPr>
@@ -15451,7 +15428,7 @@
       </p:sp>
       <p:sp>
         <p:nvSpPr>
-          <p:cNvPr id="288" name="Google Shape;288;p29"/>
+          <p:cNvPr id="294" name="Google Shape;294;p29"/>
           <p:cNvSpPr/>
           <p:nvPr/>
         </p:nvSpPr>
@@ -15502,7 +15479,7 @@
       </p:sp>
       <p:pic>
         <p:nvPicPr>
-          <p:cNvPr descr="preencoded.png" id="289" name="Google Shape;289;p29"/>
+          <p:cNvPr descr="preencoded.png" id="295" name="Google Shape;295;p29"/>
           <p:cNvPicPr preferRelativeResize="0"/>
           <p:nvPr/>
         </p:nvPicPr>
@@ -15529,133 +15506,7 @@
       </p:pic>
       <p:sp>
         <p:nvSpPr>
-          <p:cNvPr id="290" name="Google Shape;290;p29"/>
-          <p:cNvSpPr/>
-          <p:nvPr/>
-        </p:nvSpPr>
-        <p:spPr>
-          <a:xfrm>
-            <a:off x="1165860" y="1131570"/>
-            <a:ext cx="4389120" cy="308610"/>
-          </a:xfrm>
-          <a:prstGeom prst="rect">
-            <a:avLst/>
-          </a:prstGeom>
-          <a:noFill/>
-          <a:ln>
-            <a:noFill/>
-          </a:ln>
-        </p:spPr>
-        <p:txBody>
-          <a:bodyPr anchorCtr="0" anchor="ctr" bIns="34275" lIns="68575" spcFirstLastPara="1" rIns="68575" wrap="square" tIns="34275">
-            <a:noAutofit/>
-          </a:bodyPr>
-          <a:lstStyle/>
-          <a:p>
-            <a:pPr indent="0" lvl="0" marL="0" marR="0" rtl="0" algn="l">
-              <a:spcBef>
-                <a:spcPts val="0"/>
-              </a:spcBef>
-              <a:spcAft>
-                <a:spcPts val="0"/>
-              </a:spcAft>
-              <a:buClr>
-                <a:srgbClr val="1F2933"/>
-              </a:buClr>
-              <a:buSzPts val="1200"/>
-              <a:buFont typeface="Calibri"/>
-              <a:buNone/>
-            </a:pPr>
-            <a:r>
-              <a:rPr b="1" lang="en" sz="1200">
-                <a:solidFill>
-                  <a:srgbClr val="1F2933"/>
-                </a:solidFill>
-                <a:latin typeface="Calibri"/>
-                <a:ea typeface="Calibri"/>
-                <a:cs typeface="Calibri"/>
-                <a:sym typeface="Calibri"/>
-              </a:rPr>
-              <a:t>Rule-free PMR experiment</a:t>
-            </a:r>
-            <a:endParaRPr sz="1200">
-              <a:solidFill>
-                <a:schemeClr val="dk1"/>
-              </a:solidFill>
-              <a:latin typeface="Calibri"/>
-              <a:ea typeface="Calibri"/>
-              <a:cs typeface="Calibri"/>
-              <a:sym typeface="Calibri"/>
-            </a:endParaRPr>
-          </a:p>
-        </p:txBody>
-      </p:sp>
-      <p:sp>
-        <p:nvSpPr>
-          <p:cNvPr id="291" name="Google Shape;291;p29"/>
-          <p:cNvSpPr/>
-          <p:nvPr/>
-        </p:nvSpPr>
-        <p:spPr>
-          <a:xfrm>
-            <a:off x="1165860" y="1426464"/>
-            <a:ext cx="6446520" cy="582930"/>
-          </a:xfrm>
-          <a:prstGeom prst="rect">
-            <a:avLst/>
-          </a:prstGeom>
-          <a:noFill/>
-          <a:ln>
-            <a:noFill/>
-          </a:ln>
-        </p:spPr>
-        <p:txBody>
-          <a:bodyPr anchorCtr="0" anchor="ctr" bIns="34275" lIns="68575" spcFirstLastPara="1" rIns="68575" wrap="square" tIns="34275">
-            <a:noAutofit/>
-          </a:bodyPr>
-          <a:lstStyle/>
-          <a:p>
-            <a:pPr indent="0" lvl="0" marL="0" marR="0" rtl="0" algn="l">
-              <a:spcBef>
-                <a:spcPts val="0"/>
-              </a:spcBef>
-              <a:spcAft>
-                <a:spcPts val="0"/>
-              </a:spcAft>
-              <a:buClr>
-                <a:srgbClr val="5B6770"/>
-              </a:buClr>
-              <a:buSzPts val="900"/>
-              <a:buFont typeface="Calibri"/>
-              <a:buNone/>
-            </a:pPr>
-            <a:r>
-              <a:rPr b="1" lang="en" sz="900">
-                <a:solidFill>
-                  <a:schemeClr val="dk2"/>
-                </a:solidFill>
-                <a:latin typeface="Calibri"/>
-                <a:ea typeface="Calibri"/>
-                <a:cs typeface="Calibri"/>
-                <a:sym typeface="Calibri"/>
-              </a:rPr>
-              <a:t>Retrain on only features outside the label rule (crossing, length, width_fill): can accessibility be guessed without measuring? The one test where the model can show real skill.</a:t>
-            </a:r>
-            <a:endParaRPr b="1" sz="900">
-              <a:solidFill>
-                <a:schemeClr val="dk2"/>
-              </a:solidFill>
-              <a:latin typeface="Calibri"/>
-              <a:ea typeface="Calibri"/>
-              <a:cs typeface="Calibri"/>
-              <a:sym typeface="Calibri"/>
-            </a:endParaRPr>
-          </a:p>
-        </p:txBody>
-      </p:sp>
-      <p:sp>
-        <p:nvSpPr>
-          <p:cNvPr id="292" name="Google Shape;292;p29"/>
+          <p:cNvPr id="296" name="Google Shape;296;p29"/>
           <p:cNvSpPr/>
           <p:nvPr/>
         </p:nvSpPr>
@@ -15708,7 +15559,7 @@
       </p:sp>
       <p:sp>
         <p:nvSpPr>
-          <p:cNvPr id="293" name="Google Shape;293;p29"/>
+          <p:cNvPr id="297" name="Google Shape;297;p29"/>
           <p:cNvSpPr/>
           <p:nvPr/>
         </p:nvSpPr>
@@ -15771,7 +15622,7 @@
       </p:sp>
       <p:sp>
         <p:nvSpPr>
-          <p:cNvPr id="294" name="Google Shape;294;p29"/>
+          <p:cNvPr id="298" name="Google Shape;298;p29"/>
           <p:cNvSpPr/>
           <p:nvPr/>
         </p:nvSpPr>
@@ -15822,7 +15673,7 @@
       </p:sp>
       <p:pic>
         <p:nvPicPr>
-          <p:cNvPr descr="preencoded.png" id="295" name="Google Shape;295;p29"/>
+          <p:cNvPr descr="preencoded.png" id="299" name="Google Shape;299;p29"/>
           <p:cNvPicPr preferRelativeResize="0"/>
           <p:nvPr/>
         </p:nvPicPr>
@@ -15849,133 +15700,7 @@
       </p:pic>
       <p:sp>
         <p:nvSpPr>
-          <p:cNvPr id="296" name="Google Shape;296;p29"/>
-          <p:cNvSpPr/>
-          <p:nvPr/>
-        </p:nvSpPr>
-        <p:spPr>
-          <a:xfrm>
-            <a:off x="1165860" y="2036826"/>
-            <a:ext cx="4389120" cy="308610"/>
-          </a:xfrm>
-          <a:prstGeom prst="rect">
-            <a:avLst/>
-          </a:prstGeom>
-          <a:noFill/>
-          <a:ln>
-            <a:noFill/>
-          </a:ln>
-        </p:spPr>
-        <p:txBody>
-          <a:bodyPr anchorCtr="0" anchor="ctr" bIns="34275" lIns="68575" spcFirstLastPara="1" rIns="68575" wrap="square" tIns="34275">
-            <a:noAutofit/>
-          </a:bodyPr>
-          <a:lstStyle/>
-          <a:p>
-            <a:pPr indent="0" lvl="0" marL="0" marR="0" rtl="0" algn="l">
-              <a:spcBef>
-                <a:spcPts val="0"/>
-              </a:spcBef>
-              <a:spcAft>
-                <a:spcPts val="0"/>
-              </a:spcAft>
-              <a:buClr>
-                <a:srgbClr val="1F2933"/>
-              </a:buClr>
-              <a:buSzPts val="1200"/>
-              <a:buFont typeface="Calibri"/>
-              <a:buNone/>
-            </a:pPr>
-            <a:r>
-              <a:rPr b="1" lang="en" sz="1200">
-                <a:solidFill>
-                  <a:srgbClr val="1F2933"/>
-                </a:solidFill>
-                <a:latin typeface="Calibri"/>
-                <a:ea typeface="Calibri"/>
-                <a:cs typeface="Calibri"/>
-                <a:sym typeface="Calibri"/>
-              </a:rPr>
-              <a:t>Validate the label</a:t>
-            </a:r>
-            <a:endParaRPr sz="1200">
-              <a:solidFill>
-                <a:schemeClr val="dk1"/>
-              </a:solidFill>
-              <a:latin typeface="Calibri"/>
-              <a:ea typeface="Calibri"/>
-              <a:cs typeface="Calibri"/>
-              <a:sym typeface="Calibri"/>
-            </a:endParaRPr>
-          </a:p>
-        </p:txBody>
-      </p:sp>
-      <p:sp>
-        <p:nvSpPr>
-          <p:cNvPr id="297" name="Google Shape;297;p29"/>
-          <p:cNvSpPr/>
-          <p:nvPr/>
-        </p:nvSpPr>
-        <p:spPr>
-          <a:xfrm>
-            <a:off x="1165860" y="2331720"/>
-            <a:ext cx="6446520" cy="582930"/>
-          </a:xfrm>
-          <a:prstGeom prst="rect">
-            <a:avLst/>
-          </a:prstGeom>
-          <a:noFill/>
-          <a:ln>
-            <a:noFill/>
-          </a:ln>
-        </p:spPr>
-        <p:txBody>
-          <a:bodyPr anchorCtr="0" anchor="ctr" bIns="34275" lIns="68575" spcFirstLastPara="1" rIns="68575" wrap="square" tIns="34275">
-            <a:noAutofit/>
-          </a:bodyPr>
-          <a:lstStyle/>
-          <a:p>
-            <a:pPr indent="0" lvl="0" marL="0" marR="0" rtl="0" algn="l">
-              <a:spcBef>
-                <a:spcPts val="0"/>
-              </a:spcBef>
-              <a:spcAft>
-                <a:spcPts val="0"/>
-              </a:spcAft>
-              <a:buClr>
-                <a:srgbClr val="5B6770"/>
-              </a:buClr>
-              <a:buSzPts val="900"/>
-              <a:buFont typeface="Calibri"/>
-              <a:buNone/>
-            </a:pPr>
-            <a:r>
-              <a:rPr b="1" lang="en" sz="900">
-                <a:solidFill>
-                  <a:schemeClr val="dk2"/>
-                </a:solidFill>
-                <a:latin typeface="Calibri"/>
-                <a:ea typeface="Calibri"/>
-                <a:cs typeface="Calibri"/>
-                <a:sym typeface="Calibri"/>
-              </a:rPr>
-              <a:t>Compare our width/curb rule against the 50 verified accessibility labels; report agreement.</a:t>
-            </a:r>
-            <a:endParaRPr b="1" sz="900">
-              <a:solidFill>
-                <a:schemeClr val="dk2"/>
-              </a:solidFill>
-              <a:latin typeface="Calibri"/>
-              <a:ea typeface="Calibri"/>
-              <a:cs typeface="Calibri"/>
-              <a:sym typeface="Calibri"/>
-            </a:endParaRPr>
-          </a:p>
-        </p:txBody>
-      </p:sp>
-      <p:sp>
-        <p:nvSpPr>
-          <p:cNvPr id="298" name="Google Shape;298;p29"/>
+          <p:cNvPr id="300" name="Google Shape;300;p29"/>
           <p:cNvSpPr/>
           <p:nvPr/>
         </p:nvSpPr>
@@ -16028,7 +15753,7 @@
       </p:sp>
       <p:sp>
         <p:nvSpPr>
-          <p:cNvPr id="299" name="Google Shape;299;p29"/>
+          <p:cNvPr id="301" name="Google Shape;301;p29"/>
           <p:cNvSpPr/>
           <p:nvPr/>
         </p:nvSpPr>
@@ -16091,7 +15816,7 @@
       </p:sp>
       <p:sp>
         <p:nvSpPr>
-          <p:cNvPr id="300" name="Google Shape;300;p29"/>
+          <p:cNvPr id="302" name="Google Shape;302;p29"/>
           <p:cNvSpPr/>
           <p:nvPr/>
         </p:nvSpPr>
@@ -16142,7 +15867,7 @@
       </p:sp>
       <p:pic>
         <p:nvPicPr>
-          <p:cNvPr descr="preencoded.png" id="301" name="Google Shape;301;p29"/>
+          <p:cNvPr descr="preencoded.png" id="303" name="Google Shape;303;p29"/>
           <p:cNvPicPr preferRelativeResize="0"/>
           <p:nvPr/>
         </p:nvPicPr>
@@ -16167,132 +15892,6 @@
           </a:ln>
         </p:spPr>
       </p:pic>
-      <p:sp>
-        <p:nvSpPr>
-          <p:cNvPr id="302" name="Google Shape;302;p29"/>
-          <p:cNvSpPr/>
-          <p:nvPr/>
-        </p:nvSpPr>
-        <p:spPr>
-          <a:xfrm>
-            <a:off x="1165860" y="2942082"/>
-            <a:ext cx="4389120" cy="308610"/>
-          </a:xfrm>
-          <a:prstGeom prst="rect">
-            <a:avLst/>
-          </a:prstGeom>
-          <a:noFill/>
-          <a:ln>
-            <a:noFill/>
-          </a:ln>
-        </p:spPr>
-        <p:txBody>
-          <a:bodyPr anchorCtr="0" anchor="ctr" bIns="34275" lIns="68575" spcFirstLastPara="1" rIns="68575" wrap="square" tIns="34275">
-            <a:noAutofit/>
-          </a:bodyPr>
-          <a:lstStyle/>
-          <a:p>
-            <a:pPr indent="0" lvl="0" marL="0" marR="0" rtl="0" algn="l">
-              <a:spcBef>
-                <a:spcPts val="0"/>
-              </a:spcBef>
-              <a:spcAft>
-                <a:spcPts val="0"/>
-              </a:spcAft>
-              <a:buClr>
-                <a:srgbClr val="1F2933"/>
-              </a:buClr>
-              <a:buSzPts val="1200"/>
-              <a:buFont typeface="Calibri"/>
-              <a:buNone/>
-            </a:pPr>
-            <a:r>
-              <a:rPr b="1" lang="en" sz="1200">
-                <a:solidFill>
-                  <a:srgbClr val="1F2933"/>
-                </a:solidFill>
-                <a:latin typeface="Calibri"/>
-                <a:ea typeface="Calibri"/>
-                <a:cs typeface="Calibri"/>
-                <a:sym typeface="Calibri"/>
-              </a:rPr>
-              <a:t>Location-aware retrieval</a:t>
-            </a:r>
-            <a:endParaRPr sz="1200">
-              <a:solidFill>
-                <a:schemeClr val="dk1"/>
-              </a:solidFill>
-              <a:latin typeface="Calibri"/>
-              <a:ea typeface="Calibri"/>
-              <a:cs typeface="Calibri"/>
-              <a:sym typeface="Calibri"/>
-            </a:endParaRPr>
-          </a:p>
-        </p:txBody>
-      </p:sp>
-      <p:sp>
-        <p:nvSpPr>
-          <p:cNvPr id="303" name="Google Shape;303;p29"/>
-          <p:cNvSpPr/>
-          <p:nvPr/>
-        </p:nvSpPr>
-        <p:spPr>
-          <a:xfrm>
-            <a:off x="1165860" y="3236976"/>
-            <a:ext cx="6446520" cy="582930"/>
-          </a:xfrm>
-          <a:prstGeom prst="rect">
-            <a:avLst/>
-          </a:prstGeom>
-          <a:noFill/>
-          <a:ln>
-            <a:noFill/>
-          </a:ln>
-        </p:spPr>
-        <p:txBody>
-          <a:bodyPr anchorCtr="0" anchor="ctr" bIns="34275" lIns="68575" spcFirstLastPara="1" rIns="68575" wrap="square" tIns="34275">
-            <a:noAutofit/>
-          </a:bodyPr>
-          <a:lstStyle/>
-          <a:p>
-            <a:pPr indent="0" lvl="0" marL="0" marR="0" rtl="0" algn="l">
-              <a:spcBef>
-                <a:spcPts val="0"/>
-              </a:spcBef>
-              <a:spcAft>
-                <a:spcPts val="0"/>
-              </a:spcAft>
-              <a:buClr>
-                <a:srgbClr val="5B6770"/>
-              </a:buClr>
-              <a:buSzPts val="900"/>
-              <a:buFont typeface="Calibri"/>
-              <a:buNone/>
-            </a:pPr>
-            <a:r>
-              <a:rPr b="1" lang="en" sz="900">
-                <a:solidFill>
-                  <a:schemeClr val="dk2"/>
-                </a:solidFill>
-                <a:latin typeface="Calibri"/>
-                <a:ea typeface="Calibri"/>
-                <a:cs typeface="Calibri"/>
-                <a:sym typeface="Calibri"/>
-              </a:rPr>
-              <a:t>Add coordinates to the PMR index so retrieval ranks within tied groups instead of returning exact ties.</a:t>
-            </a:r>
-            <a:endParaRPr b="1" sz="900">
-              <a:solidFill>
-                <a:schemeClr val="dk2"/>
-              </a:solidFill>
-              <a:latin typeface="Calibri"/>
-              <a:ea typeface="Calibri"/>
-              <a:cs typeface="Calibri"/>
-              <a:sym typeface="Calibri"/>
-            </a:endParaRPr>
-          </a:p>
-        </p:txBody>
-      </p:sp>
       <p:sp>
         <p:nvSpPr>
           <p:cNvPr id="304" name="Google Shape;304;p29"/>
@@ -16487,110 +16086,139 @@
           </a:ln>
         </p:spPr>
       </p:pic>
-      <p:sp>
-        <p:nvSpPr>
+      <p:grpSp>
+        <p:nvGrpSpPr>
           <p:cNvPr id="308" name="Google Shape;308;p29"/>
-          <p:cNvSpPr/>
+          <p:cNvGrpSpPr/>
           <p:nvPr/>
-        </p:nvSpPr>
-        <p:spPr>
-          <a:xfrm>
-            <a:off x="1165860" y="3847338"/>
-            <a:ext cx="4389120" cy="308610"/>
-          </a:xfrm>
-          <a:prstGeom prst="rect">
-            <a:avLst/>
-          </a:prstGeom>
-          <a:noFill/>
-          <a:ln>
-            <a:noFill/>
-          </a:ln>
-        </p:spPr>
-        <p:txBody>
-          <a:bodyPr anchorCtr="0" anchor="ctr" bIns="34275" lIns="68575" spcFirstLastPara="1" rIns="68575" wrap="square" tIns="34275">
-            <a:noAutofit/>
-          </a:bodyPr>
-          <a:lstStyle/>
-          <a:p>
-            <a:pPr indent="0" lvl="0" marL="0" marR="0" rtl="0" algn="l">
-              <a:spcBef>
-                <a:spcPts val="0"/>
-              </a:spcBef>
-              <a:spcAft>
-                <a:spcPts val="0"/>
-              </a:spcAft>
-              <a:buClr>
-                <a:srgbClr val="1F2933"/>
-              </a:buClr>
-              <a:buSzPts val="1200"/>
-              <a:buFont typeface="Calibri"/>
-              <a:buNone/>
-            </a:pPr>
-            <a:r>
-              <a:rPr b="1" lang="en" sz="1200">
-                <a:solidFill>
+        </p:nvGrpSpPr>
+        <p:grpSpPr>
+          <a:xfrm>
+            <a:off x="1165845" y="1131575"/>
+            <a:ext cx="6446535" cy="3593587"/>
+            <a:chOff x="1165845" y="1131575"/>
+            <a:chExt cx="6446535" cy="3593587"/>
+          </a:xfrm>
+        </p:grpSpPr>
+        <p:sp>
+          <p:nvSpPr>
+            <p:cNvPr id="309" name="Google Shape;309;p29"/>
+            <p:cNvSpPr/>
+            <p:nvPr/>
+          </p:nvSpPr>
+          <p:spPr>
+            <a:xfrm>
+              <a:off x="1165845" y="1131575"/>
+              <a:ext cx="6446400" cy="308700"/>
+            </a:xfrm>
+            <a:prstGeom prst="rect">
+              <a:avLst/>
+            </a:prstGeom>
+            <a:solidFill>
+              <a:schemeClr val="lt1"/>
+            </a:solidFill>
+            <a:ln>
+              <a:noFill/>
+            </a:ln>
+          </p:spPr>
+          <p:txBody>
+            <a:bodyPr anchorCtr="0" anchor="ctr" bIns="34275" lIns="68575" spcFirstLastPara="1" rIns="68575" wrap="square" tIns="34275">
+              <a:noAutofit/>
+            </a:bodyPr>
+            <a:lstStyle/>
+            <a:p>
+              <a:pPr indent="0" lvl="0" marL="0" marR="0" rtl="0" algn="l">
+                <a:spcBef>
+                  <a:spcPts val="0"/>
+                </a:spcBef>
+                <a:spcAft>
+                  <a:spcPts val="0"/>
+                </a:spcAft>
+                <a:buClr>
                   <a:srgbClr val="1F2933"/>
+                </a:buClr>
+                <a:buSzPts val="1200"/>
+                <a:buFont typeface="Calibri"/>
+                <a:buNone/>
+              </a:pPr>
+              <a:r>
+                <a:rPr b="1" lang="en" sz="1200">
+                  <a:solidFill>
+                    <a:srgbClr val="1F2933"/>
+                  </a:solidFill>
+                  <a:latin typeface="Calibri"/>
+                  <a:ea typeface="Calibri"/>
+                  <a:cs typeface="Calibri"/>
+                  <a:sym typeface="Calibri"/>
+                </a:rPr>
+                <a:t>Rule-free PMR experiment</a:t>
+              </a:r>
+              <a:endParaRPr sz="1200">
+                <a:solidFill>
+                  <a:schemeClr val="dk1"/>
                 </a:solidFill>
                 <a:latin typeface="Calibri"/>
                 <a:ea typeface="Calibri"/>
                 <a:cs typeface="Calibri"/>
                 <a:sym typeface="Calibri"/>
-              </a:rPr>
-              <a:t>Individual roadmaps</a:t>
-            </a:r>
-            <a:endParaRPr sz="1200">
-              <a:solidFill>
-                <a:schemeClr val="dk1"/>
-              </a:solidFill>
-              <a:latin typeface="Calibri"/>
-              <a:ea typeface="Calibri"/>
-              <a:cs typeface="Calibri"/>
-              <a:sym typeface="Calibri"/>
-            </a:endParaRPr>
-          </a:p>
-        </p:txBody>
-      </p:sp>
-      <p:sp>
-        <p:nvSpPr>
-          <p:cNvPr id="309" name="Google Shape;309;p29"/>
-          <p:cNvSpPr/>
-          <p:nvPr/>
-        </p:nvSpPr>
-        <p:spPr>
-          <a:xfrm>
-            <a:off x="1165860" y="4142232"/>
-            <a:ext cx="6446520" cy="582930"/>
-          </a:xfrm>
-          <a:prstGeom prst="rect">
-            <a:avLst/>
-          </a:prstGeom>
-          <a:noFill/>
-          <a:ln>
-            <a:noFill/>
-          </a:ln>
-        </p:spPr>
-        <p:txBody>
-          <a:bodyPr anchorCtr="0" anchor="ctr" bIns="34275" lIns="68575" spcFirstLastPara="1" rIns="68575" wrap="square" tIns="34275">
-            <a:noAutofit/>
-          </a:bodyPr>
-          <a:lstStyle/>
-          <a:p>
-            <a:pPr indent="0" lvl="0" marL="0" marR="0" rtl="0" algn="l">
-              <a:spcBef>
-                <a:spcPts val="0"/>
-              </a:spcBef>
-              <a:spcAft>
-                <a:spcPts val="0"/>
-              </a:spcAft>
-              <a:buClr>
-                <a:srgbClr val="5B6770"/>
-              </a:buClr>
-              <a:buSzPts val="900"/>
-              <a:buFont typeface="Calibri"/>
-              <a:buNone/>
-            </a:pPr>
-            <a:r>
-              <a:rPr b="1" lang="en" sz="900">
+              </a:endParaRPr>
+            </a:p>
+          </p:txBody>
+        </p:sp>
+        <p:sp>
+          <p:nvSpPr>
+            <p:cNvPr id="310" name="Google Shape;310;p29"/>
+            <p:cNvSpPr/>
+            <p:nvPr/>
+          </p:nvSpPr>
+          <p:spPr>
+            <a:xfrm>
+              <a:off x="1165860" y="1426464"/>
+              <a:ext cx="6446520" cy="582930"/>
+            </a:xfrm>
+            <a:prstGeom prst="rect">
+              <a:avLst/>
+            </a:prstGeom>
+            <a:solidFill>
+              <a:schemeClr val="lt1"/>
+            </a:solidFill>
+            <a:ln>
+              <a:noFill/>
+            </a:ln>
+          </p:spPr>
+          <p:txBody>
+            <a:bodyPr anchorCtr="0" anchor="ctr" bIns="34275" lIns="68575" spcFirstLastPara="1" rIns="68575" wrap="square" tIns="34275">
+              <a:noAutofit/>
+            </a:bodyPr>
+            <a:lstStyle/>
+            <a:p>
+              <a:pPr indent="0" lvl="0" marL="0" marR="0" rtl="0" algn="l">
+                <a:spcBef>
+                  <a:spcPts val="0"/>
+                </a:spcBef>
+                <a:spcAft>
+                  <a:spcPts val="0"/>
+                </a:spcAft>
+                <a:buClr>
+                  <a:srgbClr val="5B6770"/>
+                </a:buClr>
+                <a:buSzPts val="900"/>
+                <a:buFont typeface="Calibri"/>
+                <a:buNone/>
+              </a:pPr>
+              <a:r>
+                <a:rPr b="1" lang="en" sz="900">
+                  <a:solidFill>
+                    <a:schemeClr val="dk2"/>
+                  </a:solidFill>
+                  <a:latin typeface="Calibri"/>
+                  <a:ea typeface="Calibri"/>
+                  <a:cs typeface="Calibri"/>
+                  <a:sym typeface="Calibri"/>
+                </a:rPr>
+                <a:t>Retrain on only features outside the label rule (crossing, length, width_fill): can accessibility be guessed without measuring? The one test where the model can show real skill.</a:t>
+              </a:r>
+              <a:endParaRPr b="1" sz="900">
                 <a:solidFill>
                   <a:schemeClr val="dk2"/>
                 </a:solidFill>
@@ -16598,24 +16226,404 @@
                 <a:ea typeface="Calibri"/>
                 <a:cs typeface="Calibri"/>
                 <a:sym typeface="Calibri"/>
-              </a:rPr>
-              <a:t>Each member continues per their My AI Roadmap; repo stays public as a portfolio piece.</a:t>
-            </a:r>
-            <a:endParaRPr b="1" sz="900">
-              <a:solidFill>
-                <a:schemeClr val="dk2"/>
-              </a:solidFill>
-              <a:latin typeface="Calibri"/>
-              <a:ea typeface="Calibri"/>
-              <a:cs typeface="Calibri"/>
-              <a:sym typeface="Calibri"/>
-            </a:endParaRPr>
-          </a:p>
-        </p:txBody>
-      </p:sp>
+              </a:endParaRPr>
+            </a:p>
+          </p:txBody>
+        </p:sp>
+        <p:sp>
+          <p:nvSpPr>
+            <p:cNvPr id="311" name="Google Shape;311;p29"/>
+            <p:cNvSpPr/>
+            <p:nvPr/>
+          </p:nvSpPr>
+          <p:spPr>
+            <a:xfrm>
+              <a:off x="1165845" y="2036825"/>
+              <a:ext cx="6446400" cy="308700"/>
+            </a:xfrm>
+            <a:prstGeom prst="rect">
+              <a:avLst/>
+            </a:prstGeom>
+            <a:solidFill>
+              <a:schemeClr val="lt1"/>
+            </a:solidFill>
+            <a:ln>
+              <a:noFill/>
+            </a:ln>
+          </p:spPr>
+          <p:txBody>
+            <a:bodyPr anchorCtr="0" anchor="ctr" bIns="34275" lIns="68575" spcFirstLastPara="1" rIns="68575" wrap="square" tIns="34275">
+              <a:noAutofit/>
+            </a:bodyPr>
+            <a:lstStyle/>
+            <a:p>
+              <a:pPr indent="0" lvl="0" marL="0" marR="0" rtl="0" algn="l">
+                <a:spcBef>
+                  <a:spcPts val="0"/>
+                </a:spcBef>
+                <a:spcAft>
+                  <a:spcPts val="0"/>
+                </a:spcAft>
+                <a:buClr>
+                  <a:srgbClr val="1F2933"/>
+                </a:buClr>
+                <a:buSzPts val="1200"/>
+                <a:buFont typeface="Calibri"/>
+                <a:buNone/>
+              </a:pPr>
+              <a:r>
+                <a:rPr b="1" lang="en" sz="1200">
+                  <a:solidFill>
+                    <a:srgbClr val="1F2933"/>
+                  </a:solidFill>
+                  <a:latin typeface="Calibri"/>
+                  <a:ea typeface="Calibri"/>
+                  <a:cs typeface="Calibri"/>
+                  <a:sym typeface="Calibri"/>
+                </a:rPr>
+                <a:t>Validate the label</a:t>
+              </a:r>
+              <a:endParaRPr sz="1200">
+                <a:solidFill>
+                  <a:schemeClr val="dk1"/>
+                </a:solidFill>
+                <a:latin typeface="Calibri"/>
+                <a:ea typeface="Calibri"/>
+                <a:cs typeface="Calibri"/>
+                <a:sym typeface="Calibri"/>
+              </a:endParaRPr>
+            </a:p>
+          </p:txBody>
+        </p:sp>
+        <p:sp>
+          <p:nvSpPr>
+            <p:cNvPr id="312" name="Google Shape;312;p29"/>
+            <p:cNvSpPr/>
+            <p:nvPr/>
+          </p:nvSpPr>
+          <p:spPr>
+            <a:xfrm>
+              <a:off x="1165860" y="2331720"/>
+              <a:ext cx="6446520" cy="582930"/>
+            </a:xfrm>
+            <a:prstGeom prst="rect">
+              <a:avLst/>
+            </a:prstGeom>
+            <a:solidFill>
+              <a:schemeClr val="lt1"/>
+            </a:solidFill>
+            <a:ln>
+              <a:noFill/>
+            </a:ln>
+          </p:spPr>
+          <p:txBody>
+            <a:bodyPr anchorCtr="0" anchor="ctr" bIns="34275" lIns="68575" spcFirstLastPara="1" rIns="68575" wrap="square" tIns="34275">
+              <a:noAutofit/>
+            </a:bodyPr>
+            <a:lstStyle/>
+            <a:p>
+              <a:pPr indent="0" lvl="0" marL="0" marR="0" rtl="0" algn="l">
+                <a:spcBef>
+                  <a:spcPts val="0"/>
+                </a:spcBef>
+                <a:spcAft>
+                  <a:spcPts val="0"/>
+                </a:spcAft>
+                <a:buClr>
+                  <a:srgbClr val="5B6770"/>
+                </a:buClr>
+                <a:buSzPts val="900"/>
+                <a:buFont typeface="Calibri"/>
+                <a:buNone/>
+              </a:pPr>
+              <a:r>
+                <a:rPr b="1" lang="en" sz="900">
+                  <a:solidFill>
+                    <a:schemeClr val="dk2"/>
+                  </a:solidFill>
+                  <a:latin typeface="Calibri"/>
+                  <a:ea typeface="Calibri"/>
+                  <a:cs typeface="Calibri"/>
+                  <a:sym typeface="Calibri"/>
+                </a:rPr>
+                <a:t>Compare our width/curb rule against the 50 verified accessibility labels; report agreement.</a:t>
+              </a:r>
+              <a:endParaRPr b="1" sz="900">
+                <a:solidFill>
+                  <a:schemeClr val="dk2"/>
+                </a:solidFill>
+                <a:latin typeface="Calibri"/>
+                <a:ea typeface="Calibri"/>
+                <a:cs typeface="Calibri"/>
+                <a:sym typeface="Calibri"/>
+              </a:endParaRPr>
+            </a:p>
+          </p:txBody>
+        </p:sp>
+        <p:sp>
+          <p:nvSpPr>
+            <p:cNvPr id="313" name="Google Shape;313;p29"/>
+            <p:cNvSpPr/>
+            <p:nvPr/>
+          </p:nvSpPr>
+          <p:spPr>
+            <a:xfrm>
+              <a:off x="1165845" y="2942075"/>
+              <a:ext cx="6446400" cy="308700"/>
+            </a:xfrm>
+            <a:prstGeom prst="rect">
+              <a:avLst/>
+            </a:prstGeom>
+            <a:solidFill>
+              <a:schemeClr val="lt1"/>
+            </a:solidFill>
+            <a:ln>
+              <a:noFill/>
+            </a:ln>
+          </p:spPr>
+          <p:txBody>
+            <a:bodyPr anchorCtr="0" anchor="ctr" bIns="34275" lIns="68575" spcFirstLastPara="1" rIns="68575" wrap="square" tIns="34275">
+              <a:noAutofit/>
+            </a:bodyPr>
+            <a:lstStyle/>
+            <a:p>
+              <a:pPr indent="0" lvl="0" marL="0" marR="0" rtl="0" algn="l">
+                <a:spcBef>
+                  <a:spcPts val="0"/>
+                </a:spcBef>
+                <a:spcAft>
+                  <a:spcPts val="0"/>
+                </a:spcAft>
+                <a:buClr>
+                  <a:srgbClr val="1F2933"/>
+                </a:buClr>
+                <a:buSzPts val="1200"/>
+                <a:buFont typeface="Calibri"/>
+                <a:buNone/>
+              </a:pPr>
+              <a:r>
+                <a:rPr b="1" lang="en" sz="1200">
+                  <a:solidFill>
+                    <a:srgbClr val="1F2933"/>
+                  </a:solidFill>
+                  <a:latin typeface="Calibri"/>
+                  <a:ea typeface="Calibri"/>
+                  <a:cs typeface="Calibri"/>
+                  <a:sym typeface="Calibri"/>
+                </a:rPr>
+                <a:t>Location-aware retrieval</a:t>
+              </a:r>
+              <a:endParaRPr sz="1200">
+                <a:solidFill>
+                  <a:schemeClr val="dk1"/>
+                </a:solidFill>
+                <a:latin typeface="Calibri"/>
+                <a:ea typeface="Calibri"/>
+                <a:cs typeface="Calibri"/>
+                <a:sym typeface="Calibri"/>
+              </a:endParaRPr>
+            </a:p>
+          </p:txBody>
+        </p:sp>
+        <p:sp>
+          <p:nvSpPr>
+            <p:cNvPr id="314" name="Google Shape;314;p29"/>
+            <p:cNvSpPr/>
+            <p:nvPr/>
+          </p:nvSpPr>
+          <p:spPr>
+            <a:xfrm>
+              <a:off x="1165860" y="3236976"/>
+              <a:ext cx="6446520" cy="582930"/>
+            </a:xfrm>
+            <a:prstGeom prst="rect">
+              <a:avLst/>
+            </a:prstGeom>
+            <a:solidFill>
+              <a:schemeClr val="lt1"/>
+            </a:solidFill>
+            <a:ln>
+              <a:noFill/>
+            </a:ln>
+          </p:spPr>
+          <p:txBody>
+            <a:bodyPr anchorCtr="0" anchor="ctr" bIns="34275" lIns="68575" spcFirstLastPara="1" rIns="68575" wrap="square" tIns="34275">
+              <a:noAutofit/>
+            </a:bodyPr>
+            <a:lstStyle/>
+            <a:p>
+              <a:pPr indent="0" lvl="0" marL="0" marR="0" rtl="0" algn="l">
+                <a:spcBef>
+                  <a:spcPts val="0"/>
+                </a:spcBef>
+                <a:spcAft>
+                  <a:spcPts val="0"/>
+                </a:spcAft>
+                <a:buClr>
+                  <a:srgbClr val="5B6770"/>
+                </a:buClr>
+                <a:buSzPts val="900"/>
+                <a:buFont typeface="Calibri"/>
+                <a:buNone/>
+              </a:pPr>
+              <a:r>
+                <a:rPr b="1" lang="en" sz="900">
+                  <a:solidFill>
+                    <a:schemeClr val="dk2"/>
+                  </a:solidFill>
+                  <a:latin typeface="Calibri"/>
+                  <a:ea typeface="Calibri"/>
+                  <a:cs typeface="Calibri"/>
+                  <a:sym typeface="Calibri"/>
+                </a:rPr>
+                <a:t>Add coordinates to the PMR index so retrieval ranks within tied groups instead of returning exact ties.</a:t>
+              </a:r>
+              <a:endParaRPr b="1" sz="900">
+                <a:solidFill>
+                  <a:schemeClr val="dk2"/>
+                </a:solidFill>
+                <a:latin typeface="Calibri"/>
+                <a:ea typeface="Calibri"/>
+                <a:cs typeface="Calibri"/>
+                <a:sym typeface="Calibri"/>
+              </a:endParaRPr>
+            </a:p>
+          </p:txBody>
+        </p:sp>
+        <p:sp>
+          <p:nvSpPr>
+            <p:cNvPr id="315" name="Google Shape;315;p29"/>
+            <p:cNvSpPr/>
+            <p:nvPr/>
+          </p:nvSpPr>
+          <p:spPr>
+            <a:xfrm>
+              <a:off x="1165845" y="3847350"/>
+              <a:ext cx="6446400" cy="308700"/>
+            </a:xfrm>
+            <a:prstGeom prst="rect">
+              <a:avLst/>
+            </a:prstGeom>
+            <a:solidFill>
+              <a:schemeClr val="lt1"/>
+            </a:solidFill>
+            <a:ln>
+              <a:noFill/>
+            </a:ln>
+          </p:spPr>
+          <p:txBody>
+            <a:bodyPr anchorCtr="0" anchor="ctr" bIns="34275" lIns="68575" spcFirstLastPara="1" rIns="68575" wrap="square" tIns="34275">
+              <a:noAutofit/>
+            </a:bodyPr>
+            <a:lstStyle/>
+            <a:p>
+              <a:pPr indent="0" lvl="0" marL="0" marR="0" rtl="0" algn="l">
+                <a:spcBef>
+                  <a:spcPts val="0"/>
+                </a:spcBef>
+                <a:spcAft>
+                  <a:spcPts val="0"/>
+                </a:spcAft>
+                <a:buClr>
+                  <a:srgbClr val="1F2933"/>
+                </a:buClr>
+                <a:buSzPts val="1200"/>
+                <a:buFont typeface="Calibri"/>
+                <a:buNone/>
+              </a:pPr>
+              <a:r>
+                <a:rPr b="1" lang="en" sz="1200">
+                  <a:solidFill>
+                    <a:srgbClr val="1F2933"/>
+                  </a:solidFill>
+                  <a:latin typeface="Calibri"/>
+                  <a:ea typeface="Calibri"/>
+                  <a:cs typeface="Calibri"/>
+                  <a:sym typeface="Calibri"/>
+                </a:rPr>
+                <a:t>Individual roadmaps</a:t>
+              </a:r>
+              <a:endParaRPr sz="1200">
+                <a:solidFill>
+                  <a:schemeClr val="dk1"/>
+                </a:solidFill>
+                <a:latin typeface="Calibri"/>
+                <a:ea typeface="Calibri"/>
+                <a:cs typeface="Calibri"/>
+                <a:sym typeface="Calibri"/>
+              </a:endParaRPr>
+            </a:p>
+          </p:txBody>
+        </p:sp>
+        <p:sp>
+          <p:nvSpPr>
+            <p:cNvPr id="316" name="Google Shape;316;p29"/>
+            <p:cNvSpPr/>
+            <p:nvPr/>
+          </p:nvSpPr>
+          <p:spPr>
+            <a:xfrm>
+              <a:off x="1165860" y="4142232"/>
+              <a:ext cx="6446520" cy="582930"/>
+            </a:xfrm>
+            <a:prstGeom prst="rect">
+              <a:avLst/>
+            </a:prstGeom>
+            <a:solidFill>
+              <a:schemeClr val="lt1"/>
+            </a:solidFill>
+            <a:ln>
+              <a:noFill/>
+            </a:ln>
+          </p:spPr>
+          <p:txBody>
+            <a:bodyPr anchorCtr="0" anchor="ctr" bIns="34275" lIns="68575" spcFirstLastPara="1" rIns="68575" wrap="square" tIns="34275">
+              <a:noAutofit/>
+            </a:bodyPr>
+            <a:lstStyle/>
+            <a:p>
+              <a:pPr indent="0" lvl="0" marL="0" marR="0" rtl="0" algn="l">
+                <a:spcBef>
+                  <a:spcPts val="0"/>
+                </a:spcBef>
+                <a:spcAft>
+                  <a:spcPts val="0"/>
+                </a:spcAft>
+                <a:buClr>
+                  <a:srgbClr val="5B6770"/>
+                </a:buClr>
+                <a:buSzPts val="900"/>
+                <a:buFont typeface="Calibri"/>
+                <a:buNone/>
+              </a:pPr>
+              <a:r>
+                <a:rPr b="1" lang="en" sz="900">
+                  <a:solidFill>
+                    <a:schemeClr val="dk2"/>
+                  </a:solidFill>
+                  <a:latin typeface="Calibri"/>
+                  <a:ea typeface="Calibri"/>
+                  <a:cs typeface="Calibri"/>
+                  <a:sym typeface="Calibri"/>
+                </a:rPr>
+                <a:t>Each member continues per their My AI Roadmap; repo stays public as a portfolio piece.</a:t>
+              </a:r>
+              <a:endParaRPr b="1" sz="900">
+                <a:solidFill>
+                  <a:schemeClr val="dk2"/>
+                </a:solidFill>
+                <a:latin typeface="Calibri"/>
+                <a:ea typeface="Calibri"/>
+                <a:cs typeface="Calibri"/>
+                <a:sym typeface="Calibri"/>
+              </a:endParaRPr>
+            </a:p>
+          </p:txBody>
+        </p:sp>
+      </p:grpSp>
       <p:sp>
         <p:nvSpPr>
-          <p:cNvPr id="310" name="Google Shape;310;p29"/>
+          <p:cNvPr id="317" name="Google Shape;317;p29"/>
           <p:cNvSpPr/>
           <p:nvPr/>
         </p:nvSpPr>
@@ -16668,7 +16676,7 @@
       </p:sp>
       <p:sp>
         <p:nvSpPr>
-          <p:cNvPr id="311" name="Google Shape;311;p29"/>
+          <p:cNvPr id="318" name="Google Shape;318;p29"/>
           <p:cNvSpPr/>
           <p:nvPr/>
         </p:nvSpPr>
@@ -16749,7 +16757,7 @@
     </p:bg>
     <p:spTree>
       <p:nvGrpSpPr>
-        <p:cNvPr id="316" name="Shape 316"/>
+        <p:cNvPr id="323" name="Shape 323"/>
         <p:cNvGrpSpPr/>
         <p:nvPr/>
       </p:nvGrpSpPr>
@@ -16763,7 +16771,7 @@
       </p:grpSpPr>
       <p:sp>
         <p:nvSpPr>
-          <p:cNvPr id="317" name="Google Shape;317;p30"/>
+          <p:cNvPr id="324" name="Google Shape;324;p30"/>
           <p:cNvSpPr/>
           <p:nvPr/>
         </p:nvSpPr>
@@ -16826,7 +16834,7 @@
       </p:sp>
       <p:sp>
         <p:nvSpPr>
-          <p:cNvPr id="318" name="Google Shape;318;p30"/>
+          <p:cNvPr id="325" name="Google Shape;325;p30"/>
           <p:cNvSpPr/>
           <p:nvPr/>
         </p:nvSpPr>
@@ -16889,7 +16897,7 @@
       </p:sp>
       <p:sp>
         <p:nvSpPr>
-          <p:cNvPr id="319" name="Google Shape;319;p30"/>
+          <p:cNvPr id="326" name="Google Shape;326;p30"/>
           <p:cNvSpPr/>
           <p:nvPr/>
         </p:nvSpPr>
@@ -16936,7 +16944,7 @@
                 <a:cs typeface="Calibri"/>
                 <a:sym typeface="Calibri"/>
               </a:rPr>
-              <a:t>City of Amsterdam Open Data — PMR sidewalk accessibility dataset (72,274 segments)</a:t>
+              <a:t>City of Amsterdam Open Data -  PMR sidewalk accessibility dataset (72,274 segments)</a:t>
             </a:r>
             <a:endParaRPr sz="1000">
               <a:solidFill>
@@ -16973,7 +16981,7 @@
                 <a:cs typeface="Calibri"/>
                 <a:sym typeface="Calibri"/>
               </a:rPr>
-              <a:t>CrowdFlower / Figure Eight “Data for Everyone” — Housing: Wheelchairs dataset (10,104 crowd-labeled US addresses)</a:t>
+              <a:t>CrowdFlower / Figure Eight “Data for Everyone” - Housing: Wheelchairs dataset (10,104 crowd-labeled US addresses)</a:t>
             </a:r>
             <a:endParaRPr sz="1000">
               <a:solidFill>
@@ -16989,7 +16997,7 @@
       </p:sp>
       <p:sp>
         <p:nvSpPr>
-          <p:cNvPr id="320" name="Google Shape;320;p30"/>
+          <p:cNvPr id="327" name="Google Shape;327;p30"/>
           <p:cNvSpPr/>
           <p:nvPr/>
         </p:nvSpPr>
@@ -17052,7 +17060,7 @@
       </p:sp>
       <p:sp>
         <p:nvSpPr>
-          <p:cNvPr id="321" name="Google Shape;321;p30"/>
+          <p:cNvPr id="328" name="Google Shape;328;p30"/>
           <p:cNvSpPr/>
           <p:nvPr/>
         </p:nvSpPr>
@@ -17263,7 +17271,7 @@
       </p:sp>
       <p:sp>
         <p:nvSpPr>
-          <p:cNvPr id="322" name="Google Shape;322;p30"/>
+          <p:cNvPr id="329" name="Google Shape;329;p30"/>
           <p:cNvSpPr/>
           <p:nvPr/>
         </p:nvSpPr>
@@ -17380,7 +17388,7 @@
     </p:bg>
     <p:spTree>
       <p:nvGrpSpPr>
-        <p:cNvPr id="327" name="Shape 327"/>
+        <p:cNvPr id="334" name="Shape 334"/>
         <p:cNvGrpSpPr/>
         <p:nvPr/>
       </p:nvGrpSpPr>
@@ -17394,7 +17402,7 @@
       </p:grpSpPr>
       <p:sp>
         <p:nvSpPr>
-          <p:cNvPr id="328" name="Google Shape;328;p31"/>
+          <p:cNvPr id="335" name="Google Shape;335;p31"/>
           <p:cNvSpPr/>
           <p:nvPr/>
         </p:nvSpPr>
@@ -17445,7 +17453,7 @@
       </p:sp>
       <p:pic>
         <p:nvPicPr>
-          <p:cNvPr descr="preencoded.png" id="329" name="Google Shape;329;p31"/>
+          <p:cNvPr descr="preencoded.png" id="336" name="Google Shape;336;p31"/>
           <p:cNvPicPr preferRelativeResize="0"/>
           <p:nvPr/>
         </p:nvPicPr>
@@ -17472,7 +17480,7 @@
       </p:pic>
       <p:sp>
         <p:nvSpPr>
-          <p:cNvPr id="330" name="Google Shape;330;p31"/>
+          <p:cNvPr id="337" name="Google Shape;337;p31"/>
           <p:cNvSpPr/>
           <p:nvPr/>
         </p:nvSpPr>
@@ -17535,7 +17543,7 @@
       </p:sp>
       <p:sp>
         <p:nvSpPr>
-          <p:cNvPr id="331" name="Google Shape;331;p31"/>
+          <p:cNvPr id="338" name="Google Shape;338;p31"/>
           <p:cNvSpPr/>
           <p:nvPr/>
         </p:nvSpPr>
@@ -17598,7 +17606,7 @@
       </p:sp>
       <p:sp>
         <p:nvSpPr>
-          <p:cNvPr id="332" name="Google Shape;332;p31"/>
+          <p:cNvPr id="339" name="Google Shape;339;p31"/>
           <p:cNvSpPr/>
           <p:nvPr/>
         </p:nvSpPr>
@@ -17673,7 +17681,7 @@
       </p:sp>
       <p:sp>
         <p:nvSpPr>
-          <p:cNvPr id="333" name="Google Shape;333;p31"/>
+          <p:cNvPr id="340" name="Google Shape;340;p31"/>
           <p:cNvSpPr/>
           <p:nvPr/>
         </p:nvSpPr>
@@ -20167,7 +20175,7 @@
                 <a:cs typeface="Calibri"/>
                 <a:sym typeface="Calibri"/>
               </a:rPr>
-              <a:t>Feature importance is readable — that's how we caught the bias</a:t>
+              <a:t>Feature importance is readablethat's how we caught the bias</a:t>
             </a:r>
             <a:endParaRPr sz="900">
               <a:solidFill>
@@ -22152,7 +22160,7 @@
                 <a:cs typeface="Cambria"/>
                 <a:sym typeface="Cambria"/>
               </a:rPr>
-              <a:t>Challenge 1 — The Housing Model Learned Geography</a:t>
+              <a:t>Challenge 1 - The Housing Model Learned Geography</a:t>
             </a:r>
             <a:endParaRPr sz="2400">
               <a:solidFill>
@@ -22253,7 +22261,7 @@
                 <a:cs typeface="Calibri"/>
                 <a:sym typeface="Calibri"/>
               </a:rPr>
-              <a:t>67.4% accuracy vs. an 85.3% baseline — worse than guessing.</a:t>
+              <a:t>67.4% accuracy vs. an 85.3% baseline  worse than guessing.</a:t>
             </a:r>
             <a:br>
               <a:rPr lang="en" sz="1200">
@@ -22640,7 +22648,7 @@
                 <a:cs typeface="Calibri"/>
                 <a:sym typeface="Calibri"/>
               </a:rPr>
-              <a:t>85.0% ties the 85.3% baseline. Recall on bad sidewalks: 0.01. Without state, no signal is left — and the raw data has no other features to add.</a:t>
+              <a:t>85.0% ties the 85.3% baseline. Recall on bad sidewalks: 0.01. Without state, no signal is left and the raw data has no other features to add.</a:t>
             </a:r>
             <a:endParaRPr sz="1000">
               <a:solidFill>
@@ -22768,7 +22776,7 @@
                 <a:cs typeface="Calibri"/>
                 <a:sym typeface="Calibri"/>
               </a:rPr>
-              <a:t>“This dataset can't predict sidewalk condition, and here's why” is our headline bias finding — not a failure to hide.</a:t>
+              <a:t>“This dataset can't predict sidewalk condition, and here's why” is our headline bias finding  not a failure to hide.</a:t>
             </a:r>
             <a:endParaRPr sz="1000">
               <a:solidFill>
@@ -22902,7 +22910,7 @@
                 <a:cs typeface="Cambria"/>
                 <a:sym typeface="Cambria"/>
               </a:rPr>
-              <a:t>Challenge 2 — Confidently Wrong, Not Unsure</a:t>
+              <a:t>Challenge 2 - Confidently Wrong, Not Unsure</a:t>
             </a:r>
             <a:endParaRPr sz="2600">
               <a:solidFill>
@@ -23542,7 +23550,31 @@
                 <a:cs typeface="Calibri"/>
                 <a:sym typeface="Calibri"/>
               </a:rPr>
-              <a:t>Our label rule = width + curb height. But the model only ever saw width — it was guessing the curb half blind.</a:t>
+              <a:t>Our label rule = width + curb height. But the model only ever saw width, </a:t>
+            </a:r>
+            <a:r>
+              <a:rPr lang="en" sz="1000">
+                <a:solidFill>
+                  <a:srgbClr val="E6F2F1"/>
+                </a:solidFill>
+                <a:latin typeface="Calibri"/>
+                <a:ea typeface="Calibri"/>
+                <a:cs typeface="Calibri"/>
+                <a:sym typeface="Calibri"/>
+              </a:rPr>
+              <a:t>i</a:t>
+            </a:r>
+            <a:r>
+              <a:rPr lang="en" sz="1000">
+                <a:solidFill>
+                  <a:srgbClr val="E6F2F1"/>
+                </a:solidFill>
+                <a:latin typeface="Calibri"/>
+                <a:ea typeface="Calibri"/>
+                <a:cs typeface="Calibri"/>
+                <a:sym typeface="Calibri"/>
+              </a:rPr>
+              <a:t>t was guessing the curb half blind.</a:t>
             </a:r>
             <a:endParaRPr sz="1000">
               <a:solidFill>
@@ -23605,7 +23637,7 @@
                 <a:cs typeface="Calibri"/>
                 <a:sym typeface="Calibri"/>
               </a:rPr>
-              <a:t>We added curb_height_max and a missing-value flag (74% of rows have no curb measurement — the missingness itself is information).</a:t>
+              <a:t>We added curb_height_max and a missing-value flag (74% of rows have no curb measurement  the missingness itself is information).</a:t>
             </a:r>
             <a:endParaRPr sz="1000">
               <a:solidFill>
@@ -23768,7 +23800,7 @@
                 <a:cs typeface="Cambria"/>
                 <a:sym typeface="Cambria"/>
               </a:rPr>
-              <a:t>Evaluation — Read the Numbers Honestly</a:t>
+              <a:t>Evaluation - Read the Numbers Honestly</a:t>
             </a:r>
             <a:endParaRPr sz="2600">
               <a:solidFill>
@@ -24048,9 +24080,9 @@
 </file>
 
 <file path=ppt/theme/theme1.xml><?xml version="1.0" encoding="utf-8"?>
-<a:theme xmlns:a="http://schemas.openxmlformats.org/drawingml/2006/main" xmlns:r="http://schemas.openxmlformats.org/officeDocument/2006/relationships" name="Office Theme">
+<a:theme xmlns:a="http://schemas.openxmlformats.org/drawingml/2006/main" xmlns:r="http://schemas.openxmlformats.org/officeDocument/2006/relationships" name="Simple Light">
   <a:themeElements>
-    <a:clrScheme name="Office">
+    <a:clrScheme name="Simple Light">
       <a:dk1>
         <a:srgbClr val="000000"/>
       </a:dk1>
@@ -24058,34 +24090,34 @@
         <a:srgbClr val="FFFFFF"/>
       </a:lt1>
       <a:dk2>
-        <a:srgbClr val="44546A"/>
+        <a:srgbClr val="595959"/>
       </a:dk2>
       <a:lt2>
-        <a:srgbClr val="E7E6E6"/>
+        <a:srgbClr val="EEEEEE"/>
       </a:lt2>
       <a:accent1>
-        <a:srgbClr val="4472C4"/>
+        <a:srgbClr val="4285F4"/>
       </a:accent1>
       <a:accent2>
-        <a:srgbClr val="ED7D31"/>
+        <a:srgbClr val="212121"/>
       </a:accent2>
       <a:accent3>
-        <a:srgbClr val="A5A5A5"/>
+        <a:srgbClr val="78909C"/>
       </a:accent3>
       <a:accent4>
-        <a:srgbClr val="FFC000"/>
+        <a:srgbClr val="FFAB40"/>
       </a:accent4>
       <a:accent5>
-        <a:srgbClr val="5B9BD5"/>
+        <a:srgbClr val="0097A7"/>
       </a:accent5>
       <a:accent6>
-        <a:srgbClr val="70AD47"/>
+        <a:srgbClr val="EEFF41"/>
       </a:accent6>
       <a:hlink>
-        <a:srgbClr val="0563C1"/>
+        <a:srgbClr val="0097A7"/>
       </a:hlink>
       <a:folHlink>
-        <a:srgbClr val="954F72"/>
+        <a:srgbClr val="0097A7"/>
       </a:folHlink>
     </a:clrScheme>
     <a:fontScheme name="Office">
@@ -24606,9 +24638,9 @@
 </file>
 
 <file path=ppt/theme/theme3.xml><?xml version="1.0" encoding="utf-8"?>
-<a:theme xmlns:a="http://schemas.openxmlformats.org/drawingml/2006/main" xmlns:r="http://schemas.openxmlformats.org/officeDocument/2006/relationships" name="Simple Light">
+<a:theme xmlns:a="http://schemas.openxmlformats.org/drawingml/2006/main" xmlns:r="http://schemas.openxmlformats.org/officeDocument/2006/relationships" name="Office Theme">
   <a:themeElements>
-    <a:clrScheme name="Simple Light">
+    <a:clrScheme name="Office">
       <a:dk1>
         <a:srgbClr val="000000"/>
       </a:dk1>
@@ -24616,34 +24648,34 @@
         <a:srgbClr val="FFFFFF"/>
       </a:lt1>
       <a:dk2>
-        <a:srgbClr val="595959"/>
+        <a:srgbClr val="44546A"/>
       </a:dk2>
       <a:lt2>
-        <a:srgbClr val="EEEEEE"/>
+        <a:srgbClr val="E7E6E6"/>
       </a:lt2>
       <a:accent1>
-        <a:srgbClr val="4285F4"/>
+        <a:srgbClr val="4472C4"/>
       </a:accent1>
       <a:accent2>
-        <a:srgbClr val="212121"/>
+        <a:srgbClr val="ED7D31"/>
       </a:accent2>
       <a:accent3>
-        <a:srgbClr val="78909C"/>
+        <a:srgbClr val="A5A5A5"/>
       </a:accent3>
       <a:accent4>
-        <a:srgbClr val="FFAB40"/>
+        <a:srgbClr val="FFC000"/>
       </a:accent4>
       <a:accent5>
-        <a:srgbClr val="0097A7"/>
+        <a:srgbClr val="5B9BD5"/>
       </a:accent5>
       <a:accent6>
-        <a:srgbClr val="EEFF41"/>
+        <a:srgbClr val="70AD47"/>
       </a:accent6>
       <a:hlink>
-        <a:srgbClr val="0097A7"/>
+        <a:srgbClr val="0563C1"/>
       </a:hlink>
       <a:folHlink>
-        <a:srgbClr val="0097A7"/>
+        <a:srgbClr val="954F72"/>
       </a:folHlink>
     </a:clrScheme>
     <a:fontScheme name="Office">
